--- a/movie data analysis project ppt.pptx
+++ b/movie data analysis project ppt.pptx
@@ -18,8 +18,8 @@
 </file>
 
 <file path=ppt/slideLayouts/slideLayout1.xml><?xml version="1.0" encoding="utf-8"?>
-<p:sldLayout xmlns:a="http://schemas.openxmlformats.org/drawingml/2006/main" xmlns:p="http://schemas.openxmlformats.org/presentationml/2006/main" xmlns:r="http://schemas.openxmlformats.org/officeDocument/2006/relationships" xmlns:p14="http://schemas.microsoft.com/office/powerpoint/2010/main" xmlns:p15="http://schemas.microsoft.com/office/powerpoint/2012/main" xmlns:mc="http://schemas.openxmlformats.org/markup-compatibility/2006" type="title" preserve="1">
-  <p:cSld name="Title Slide">
+<p:sldLayout xmlns:a="http://schemas.openxmlformats.org/drawingml/2006/main" xmlns:p="http://schemas.openxmlformats.org/presentationml/2006/main" xmlns:r="http://schemas.openxmlformats.org/officeDocument/2006/relationships" xmlns:p14="http://schemas.microsoft.com/office/powerpoint/2010/main" xmlns:p15="http://schemas.microsoft.com/office/powerpoint/2012/main" xmlns:mc="http://schemas.openxmlformats.org/markup-compatibility/2006" type="blank" preserve="1">
+  <p:cSld name="Blank">
     <p:bg>
       <p:bgPr>
         <a:solidFill>
@@ -48,85 +48,13 @@
             <a:spLocks noGrp="1"/>
           </p:cNvSpPr>
           <p:nvPr>
-            <p:ph type="title"/>
-          </p:nvPr>
-        </p:nvSpPr>
-        <p:spPr>
-          <a:xfrm>
-            <a:off x="1143000" y="841680"/>
-            <a:ext cx="6857640" cy="1790280"/>
-          </a:xfrm>
-          <a:prstGeom prst="rect">
-            <a:avLst/>
-          </a:prstGeom>
-          <a:noFill/>
-          <a:ln w="0">
-            <a:noFill/>
-          </a:ln>
-        </p:spPr>
-        <p:txBody>
-          <a:bodyPr lIns="91440" tIns="45720" rIns="91440" bIns="45720" anchor="b">
-            <a:noAutofit/>
-          </a:bodyPr>
-          <a:lstStyle>
-            <a:lvl1pPr indent="0" algn="ctr" defTabSz="685800">
-              <a:lnSpc>
-                <a:spcPct val="90000"/>
-              </a:lnSpc>
-              <a:buNone/>
-              <a:defRPr lang="en-US" sz="4500" b="0" u="none" strike="noStrike">
-                <a:solidFill>
-                  <a:schemeClr val="dk1"/>
-                </a:solidFill>
-                <a:effectLst/>
-                <a:uFillTx/>
-                <a:latin typeface="Calibri Light"/>
-              </a:defRPr>
-            </a:lvl1pPr>
-          </a:lstStyle>
-          <a:p>
-            <a:pPr indent="0" algn="ctr" defTabSz="685800">
-              <a:lnSpc>
-                <a:spcPct val="90000"/>
-              </a:lnSpc>
-              <a:buNone/>
-            </a:pPr>
-            <a:r>
-              <a:rPr lang="en-US" sz="4500" b="0" u="none" strike="noStrike">
-                <a:solidFill>
-                  <a:schemeClr val="dk1"/>
-                </a:solidFill>
-                <a:effectLst/>
-                <a:uFillTx/>
-                <a:latin typeface="Calibri Light"/>
-              </a:rPr>
-              <a:t>Click to edit Master title style</a:t>
-            </a:r>
-            <a:endParaRPr lang="en-US" sz="4500" b="0" u="none" strike="noStrike">
-              <a:solidFill>
-                <a:schemeClr val="dk1"/>
-              </a:solidFill>
-              <a:effectLst/>
-              <a:uFillTx/>
-              <a:latin typeface="Calibri Light"/>
-            </a:endParaRPr>
-          </a:p>
-        </p:txBody>
-      </p:sp>
-      <p:sp>
-        <p:nvSpPr>
-          <p:cNvPr id="3" name="PlaceHolder 2"/>
-          <p:cNvSpPr>
-            <a:spLocks noGrp="1"/>
-          </p:cNvSpPr>
-          <p:nvPr>
             <p:ph type="dt" idx="1"/>
           </p:nvPr>
         </p:nvSpPr>
         <p:spPr>
           <a:xfrm>
             <a:off x="628560" y="4767120"/>
-            <a:ext cx="2057040" cy="273600"/>
+            <a:ext cx="2056680" cy="273240"/>
           </a:xfrm>
           <a:prstGeom prst="rect">
             <a:avLst/>
@@ -146,6 +74,9 @@
                 <a:spcPct val="100000"/>
               </a:lnSpc>
               <a:buNone/>
+              <a:tabLst>
+                <a:tab pos="0" algn="l"/>
+              </a:tabLst>
               <a:defRPr lang="en-IN" sz="900" b="0" u="none" strike="noStrike">
                 <a:solidFill>
                   <a:schemeClr val="dk1">
@@ -164,6 +95,9 @@
                 <a:spcPct val="100000"/>
               </a:lnSpc>
               <a:buNone/>
+              <a:tabLst>
+                <a:tab pos="0" algn="l"/>
+              </a:tabLst>
             </a:pPr>
             <a:r>
               <a:rPr lang="en-IN" sz="900" b="0" u="none" strike="noStrike">
@@ -191,7 +125,7 @@
       </p:sp>
       <p:sp>
         <p:nvSpPr>
-          <p:cNvPr id="4" name="PlaceHolder 3"/>
+          <p:cNvPr id="3" name="PlaceHolder 2"/>
           <p:cNvSpPr>
             <a:spLocks noGrp="1"/>
           </p:cNvSpPr>
@@ -202,7 +136,7 @@
         <p:spPr>
           <a:xfrm>
             <a:off x="3029040" y="4767120"/>
-            <a:ext cx="3085920" cy="273600"/>
+            <a:ext cx="3085560" cy="273240"/>
           </a:xfrm>
           <a:prstGeom prst="rect">
             <a:avLst/>
@@ -218,7 +152,13 @@
           </a:bodyPr>
           <a:lstStyle>
             <a:lvl1pPr indent="0" algn="ctr">
+              <a:lnSpc>
+                <a:spcPct val="100000"/>
+              </a:lnSpc>
               <a:buNone/>
+              <a:tabLst>
+                <a:tab pos="0" algn="l"/>
+              </a:tabLst>
               <a:defRPr lang="en-US" sz="1400" b="0" u="none" strike="noStrike">
                 <a:solidFill>
                   <a:srgbClr val="000000"/>
@@ -231,7 +171,13 @@
           </a:lstStyle>
           <a:p>
             <a:pPr indent="0" algn="ctr">
+              <a:lnSpc>
+                <a:spcPct val="100000"/>
+              </a:lnSpc>
               <a:buNone/>
+              <a:tabLst>
+                <a:tab pos="0" algn="l"/>
+              </a:tabLst>
             </a:pPr>
             <a:r>
               <a:rPr lang="en-US" sz="1400" b="0" u="none" strike="noStrike">
@@ -257,7 +203,7 @@
       </p:sp>
       <p:sp>
         <p:nvSpPr>
-          <p:cNvPr id="5" name="PlaceHolder 4"/>
+          <p:cNvPr id="4" name="PlaceHolder 3"/>
           <p:cNvSpPr>
             <a:spLocks noGrp="1"/>
           </p:cNvSpPr>
@@ -268,7 +214,7 @@
         <p:spPr>
           <a:xfrm>
             <a:off x="6458040" y="4767120"/>
-            <a:ext cx="2057040" cy="273600"/>
+            <a:ext cx="2056680" cy="273240"/>
           </a:xfrm>
           <a:prstGeom prst="rect">
             <a:avLst/>
@@ -288,6 +234,9 @@
                 <a:spcPct val="100000"/>
               </a:lnSpc>
               <a:buNone/>
+              <a:tabLst>
+                <a:tab pos="0" algn="l"/>
+              </a:tabLst>
               <a:defRPr lang="en-IN" sz="900" b="0" u="none" strike="noStrike">
                 <a:solidFill>
                   <a:schemeClr val="dk1">
@@ -306,8 +255,11 @@
                 <a:spcPct val="100000"/>
               </a:lnSpc>
               <a:buNone/>
-            </a:pPr>
-            <a:fld id="{7B37967A-A28C-4318-A7FB-39B47DD7C668}" type="slidenum">
+              <a:tabLst>
+                <a:tab pos="0" algn="l"/>
+              </a:tabLst>
+            </a:pPr>
+            <a:fld id="{9F58BF3E-B953-49B2-8FAA-C11751C1E3AB}" type="slidenum">
               <a:rPr lang="en-IN" sz="900" b="0" u="none" strike="noStrike">
                 <a:solidFill>
                   <a:schemeClr val="dk1">
@@ -327,6 +279,72 @@
               <a:effectLst/>
               <a:uFillTx/>
               <a:latin typeface="Times New Roman"/>
+            </a:endParaRPr>
+          </a:p>
+        </p:txBody>
+      </p:sp>
+      <p:sp>
+        <p:nvSpPr>
+          <p:cNvPr id="5" name="PlaceHolder 4"/>
+          <p:cNvSpPr>
+            <a:spLocks noGrp="1"/>
+          </p:cNvSpPr>
+          <p:nvPr>
+            <p:ph type="title"/>
+          </p:nvPr>
+        </p:nvSpPr>
+        <p:spPr>
+          <a:xfrm>
+            <a:off x="457200" y="205200"/>
+            <a:ext cx="8229240" cy="858600"/>
+          </a:xfrm>
+          <a:prstGeom prst="rect">
+            <a:avLst/>
+          </a:prstGeom>
+          <a:noFill/>
+          <a:ln w="0">
+            <a:noFill/>
+          </a:ln>
+        </p:spPr>
+        <p:txBody>
+          <a:bodyPr lIns="0" tIns="0" rIns="0" bIns="0" anchor="ctr">
+            <a:noAutofit/>
+          </a:bodyPr>
+          <a:lstStyle>
+            <a:lvl1pPr indent="0" algn="ctr">
+              <a:buNone/>
+              <a:defRPr lang="en-US" sz="4400" b="0" u="none" strike="noStrike">
+                <a:solidFill>
+                  <a:srgbClr val="000000"/>
+                </a:solidFill>
+                <a:effectLst/>
+                <a:uFillTx/>
+                <a:latin typeface="Arial"/>
+              </a:defRPr>
+            </a:lvl1pPr>
+          </a:lstStyle>
+          <a:p>
+            <a:pPr indent="0" algn="ctr">
+              <a:buNone/>
+            </a:pPr>
+            <a:r>
+              <a:rPr lang="en-US" sz="4400" b="0" u="none" strike="noStrike">
+                <a:solidFill>
+                  <a:srgbClr val="000000"/>
+                </a:solidFill>
+                <a:effectLst/>
+                <a:uFillTx/>
+                <a:latin typeface="Arial"/>
+              </a:rPr>
+              <a:t>Click to edit the title text format</a:t>
+            </a:r>
+            <a:endParaRPr lang="en-US" sz="4400" b="0" u="none" strike="noStrike">
+              <a:solidFill>
+                <a:srgbClr val="000000"/>
+              </a:solidFill>
+              <a:effectLst/>
+              <a:uFillTx/>
+              <a:latin typeface="Arial"/>
             </a:endParaRPr>
           </a:p>
         </p:txBody>
@@ -359,33 +377,28 @@
             <a:normAutofit/>
           </a:bodyPr>
           <a:lstStyle>
-            <a:lvl1pPr algn="l" defTabSz="685800">
-              <a:lnSpc>
-                <a:spcPct val="90000"/>
-              </a:lnSpc>
-              <a:spcBef>
-                <a:spcPts val="751"/>
-              </a:spcBef>
-              <a:buClr>
-                <a:srgbClr val="000000"/>
-              </a:buClr>
-              <a:buFont typeface="Arial"/>
-              <a:buChar char="•"/>
-              <a:defRPr lang="en-US" sz="2100" b="0" u="none" strike="noStrike">
-                <a:solidFill>
-                  <a:schemeClr val="dk1"/>
-                </a:solidFill>
-                <a:effectLst/>
-                <a:uFillTx/>
-                <a:latin typeface="Calibri"/>
+            <a:lvl1pPr algn="l">
+              <a:spcBef>
+                <a:spcPts val="1417"/>
+              </a:spcBef>
+              <a:buClr>
+                <a:srgbClr val="000000"/>
+              </a:buClr>
+              <a:buSzPct val="45000"/>
+              <a:buFont typeface="Wingdings" charset="2"/>
+              <a:buChar char=""/>
+              <a:defRPr lang="en-US" sz="3200" b="0" u="none" strike="noStrike">
+                <a:solidFill>
+                  <a:srgbClr val="000000"/>
+                </a:solidFill>
+                <a:effectLst/>
+                <a:uFillTx/>
+                <a:latin typeface="Arial"/>
               </a:defRPr>
             </a:lvl1pPr>
-            <a:lvl2pPr lvl="1" algn="l" defTabSz="685800">
-              <a:lnSpc>
-                <a:spcPct val="90000"/>
-              </a:lnSpc>
-              <a:spcBef>
-                <a:spcPts val="374"/>
+            <a:lvl2pPr lvl="1" algn="l">
+              <a:spcBef>
+                <a:spcPts val="1134"/>
               </a:spcBef>
               <a:buClr>
                 <a:srgbClr val="000000"/>
@@ -393,21 +406,18 @@
               <a:buSzPct val="75000"/>
               <a:buFont typeface="Symbol" charset="2"/>
               <a:buChar char=""/>
-              <a:defRPr lang="en-US" sz="1800" b="0" u="none" strike="noStrike">
-                <a:solidFill>
-                  <a:schemeClr val="dk1"/>
-                </a:solidFill>
-                <a:effectLst/>
-                <a:uFillTx/>
-                <a:latin typeface="Calibri"/>
+              <a:defRPr lang="en-US" sz="2800" b="0" u="none" strike="noStrike">
+                <a:solidFill>
+                  <a:srgbClr val="000000"/>
+                </a:solidFill>
+                <a:effectLst/>
+                <a:uFillTx/>
+                <a:latin typeface="Arial"/>
               </a:defRPr>
             </a:lvl2pPr>
-            <a:lvl3pPr lvl="2" algn="l" defTabSz="685800">
-              <a:lnSpc>
-                <a:spcPct val="90000"/>
-              </a:lnSpc>
-              <a:spcBef>
-                <a:spcPts val="374"/>
+            <a:lvl3pPr lvl="2" algn="l">
+              <a:spcBef>
+                <a:spcPts val="850"/>
               </a:spcBef>
               <a:buClr>
                 <a:srgbClr val="000000"/>
@@ -415,21 +425,18 @@
               <a:buSzPct val="45000"/>
               <a:buFont typeface="Wingdings" charset="2"/>
               <a:buChar char=""/>
-              <a:defRPr lang="en-US" sz="1500" b="0" u="none" strike="noStrike">
-                <a:solidFill>
-                  <a:schemeClr val="dk1"/>
-                </a:solidFill>
-                <a:effectLst/>
-                <a:uFillTx/>
-                <a:latin typeface="Calibri"/>
+              <a:defRPr lang="en-US" sz="2400" b="0" u="none" strike="noStrike">
+                <a:solidFill>
+                  <a:srgbClr val="000000"/>
+                </a:solidFill>
+                <a:effectLst/>
+                <a:uFillTx/>
+                <a:latin typeface="Arial"/>
               </a:defRPr>
             </a:lvl3pPr>
-            <a:lvl4pPr lvl="3" algn="l" defTabSz="685800">
-              <a:lnSpc>
-                <a:spcPct val="90000"/>
-              </a:lnSpc>
-              <a:spcBef>
-                <a:spcPts val="374"/>
+            <a:lvl4pPr lvl="3" algn="l">
+              <a:spcBef>
+                <a:spcPts val="567"/>
               </a:spcBef>
               <a:buClr>
                 <a:srgbClr val="000000"/>
@@ -437,41 +444,16 @@
               <a:buSzPct val="75000"/>
               <a:buFont typeface="Symbol" charset="2"/>
               <a:buChar char=""/>
-              <a:defRPr lang="en-US" sz="1350" b="0" u="none" strike="noStrike">
-                <a:solidFill>
-                  <a:schemeClr val="dk1"/>
-                </a:solidFill>
-                <a:effectLst/>
-                <a:uFillTx/>
-                <a:latin typeface="Calibri"/>
+              <a:defRPr lang="en-US" sz="2000" b="0" u="none" strike="noStrike">
+                <a:solidFill>
+                  <a:srgbClr val="000000"/>
+                </a:solidFill>
+                <a:effectLst/>
+                <a:uFillTx/>
+                <a:latin typeface="Arial"/>
               </a:defRPr>
             </a:lvl4pPr>
-            <a:lvl5pPr lvl="4" algn="l" defTabSz="685800">
-              <a:lnSpc>
-                <a:spcPct val="90000"/>
-              </a:lnSpc>
-              <a:spcBef>
-                <a:spcPts val="374"/>
-              </a:spcBef>
-              <a:buClr>
-                <a:srgbClr val="000000"/>
-              </a:buClr>
-              <a:buSzPct val="45000"/>
-              <a:buFont typeface="Wingdings" charset="2"/>
-              <a:buChar char=""/>
-              <a:defRPr lang="en-US" sz="1350" b="0" u="none" strike="noStrike">
-                <a:solidFill>
-                  <a:schemeClr val="dk1"/>
-                </a:solidFill>
-                <a:effectLst/>
-                <a:uFillTx/>
-                <a:latin typeface="Calibri"/>
-              </a:defRPr>
-            </a:lvl5pPr>
-            <a:lvl6pPr lvl="5" algn="l" defTabSz="685800">
-              <a:lnSpc>
-                <a:spcPct val="90000"/>
-              </a:lnSpc>
+            <a:lvl5pPr lvl="4" algn="l">
               <a:spcBef>
                 <a:spcPts val="283"/>
               </a:spcBef>
@@ -483,17 +465,14 @@
               <a:buChar char=""/>
               <a:defRPr lang="en-US" sz="2000" b="0" u="none" strike="noStrike">
                 <a:solidFill>
-                  <a:schemeClr val="dk1"/>
-                </a:solidFill>
-                <a:effectLst/>
-                <a:uFillTx/>
-                <a:latin typeface="Calibri"/>
-              </a:defRPr>
-            </a:lvl6pPr>
-            <a:lvl7pPr lvl="6" algn="l" defTabSz="685800">
-              <a:lnSpc>
-                <a:spcPct val="90000"/>
-              </a:lnSpc>
+                  <a:srgbClr val="000000"/>
+                </a:solidFill>
+                <a:effectLst/>
+                <a:uFillTx/>
+                <a:latin typeface="Arial"/>
+              </a:defRPr>
+            </a:lvl5pPr>
+            <a:lvl6pPr lvl="5" algn="l">
               <a:spcBef>
                 <a:spcPts val="283"/>
               </a:spcBef>
@@ -505,55 +484,69 @@
               <a:buChar char=""/>
               <a:defRPr lang="en-US" sz="2000" b="0" u="none" strike="noStrike">
                 <a:solidFill>
-                  <a:schemeClr val="dk1"/>
-                </a:solidFill>
-                <a:effectLst/>
-                <a:uFillTx/>
-                <a:latin typeface="Calibri"/>
+                  <a:srgbClr val="000000"/>
+                </a:solidFill>
+                <a:effectLst/>
+                <a:uFillTx/>
+                <a:latin typeface="Arial"/>
+              </a:defRPr>
+            </a:lvl6pPr>
+            <a:lvl7pPr lvl="6" algn="l">
+              <a:spcBef>
+                <a:spcPts val="283"/>
+              </a:spcBef>
+              <a:buClr>
+                <a:srgbClr val="000000"/>
+              </a:buClr>
+              <a:buSzPct val="45000"/>
+              <a:buFont typeface="Wingdings" charset="2"/>
+              <a:buChar char=""/>
+              <a:defRPr lang="en-US" sz="2000" b="0" u="none" strike="noStrike">
+                <a:solidFill>
+                  <a:srgbClr val="000000"/>
+                </a:solidFill>
+                <a:effectLst/>
+                <a:uFillTx/>
+                <a:latin typeface="Arial"/>
               </a:defRPr>
             </a:lvl7pPr>
           </a:lstStyle>
           <a:p>
-            <a:pPr marL="171360" indent="-171360" algn="l" defTabSz="685800">
-              <a:lnSpc>
-                <a:spcPct val="90000"/>
-              </a:lnSpc>
-              <a:spcBef>
-                <a:spcPts val="751"/>
-              </a:spcBef>
-              <a:buClr>
-                <a:srgbClr val="000000"/>
-              </a:buClr>
-              <a:buFont typeface="Arial"/>
-              <a:buChar char="•"/>
-            </a:pPr>
-            <a:r>
-              <a:rPr lang="en-US" sz="2100" b="0" u="none" strike="noStrike">
-                <a:solidFill>
-                  <a:schemeClr val="dk1"/>
-                </a:solidFill>
-                <a:effectLst/>
-                <a:uFillTx/>
-                <a:latin typeface="Calibri"/>
+            <a:pPr marL="432000" indent="-324000" algn="l">
+              <a:spcBef>
+                <a:spcPts val="1417"/>
+              </a:spcBef>
+              <a:buClr>
+                <a:srgbClr val="000000"/>
+              </a:buClr>
+              <a:buSzPct val="45000"/>
+              <a:buFont typeface="Wingdings" charset="2"/>
+              <a:buChar char=""/>
+            </a:pPr>
+            <a:r>
+              <a:rPr lang="en-US" sz="3200" b="0" u="none" strike="noStrike">
+                <a:solidFill>
+                  <a:srgbClr val="000000"/>
+                </a:solidFill>
+                <a:effectLst/>
+                <a:uFillTx/>
+                <a:latin typeface="Arial"/>
               </a:rPr>
               <a:t>Click to edit the outline text format</a:t>
             </a:r>
-            <a:endParaRPr lang="en-US" sz="2100" b="0" u="none" strike="noStrike">
-              <a:solidFill>
-                <a:schemeClr val="dk1"/>
-              </a:solidFill>
-              <a:effectLst/>
-              <a:uFillTx/>
-              <a:latin typeface="Calibri"/>
-            </a:endParaRPr>
-          </a:p>
-          <a:p>
-            <a:pPr marL="864000" lvl="1" indent="-324000" algn="l" defTabSz="685800">
-              <a:lnSpc>
-                <a:spcPct val="90000"/>
-              </a:lnSpc>
-              <a:spcBef>
-                <a:spcPts val="374"/>
+            <a:endParaRPr lang="en-US" sz="3200" b="0" u="none" strike="noStrike">
+              <a:solidFill>
+                <a:srgbClr val="000000"/>
+              </a:solidFill>
+              <a:effectLst/>
+              <a:uFillTx/>
+              <a:latin typeface="Arial"/>
+            </a:endParaRPr>
+          </a:p>
+          <a:p>
+            <a:pPr marL="864000" lvl="1" indent="-324000" algn="l">
+              <a:spcBef>
+                <a:spcPts val="1134"/>
               </a:spcBef>
               <a:buClr>
                 <a:srgbClr val="000000"/>
@@ -563,32 +556,29 @@
               <a:buChar char=""/>
             </a:pPr>
             <a:r>
-              <a:rPr lang="en-US" sz="1800" b="0" u="none" strike="noStrike">
-                <a:solidFill>
-                  <a:schemeClr val="dk1"/>
-                </a:solidFill>
-                <a:effectLst/>
-                <a:uFillTx/>
-                <a:latin typeface="Calibri"/>
+              <a:rPr lang="en-US" sz="2800" b="0" u="none" strike="noStrike">
+                <a:solidFill>
+                  <a:srgbClr val="000000"/>
+                </a:solidFill>
+                <a:effectLst/>
+                <a:uFillTx/>
+                <a:latin typeface="Arial"/>
               </a:rPr>
               <a:t>Second Outline Level</a:t>
             </a:r>
-            <a:endParaRPr lang="en-US" sz="1800" b="0" u="none" strike="noStrike">
-              <a:solidFill>
-                <a:schemeClr val="dk1"/>
-              </a:solidFill>
-              <a:effectLst/>
-              <a:uFillTx/>
-              <a:latin typeface="Calibri"/>
-            </a:endParaRPr>
-          </a:p>
-          <a:p>
-            <a:pPr marL="1296000" lvl="2" indent="-288000" algn="l" defTabSz="685800">
-              <a:lnSpc>
-                <a:spcPct val="90000"/>
-              </a:lnSpc>
-              <a:spcBef>
-                <a:spcPts val="374"/>
+            <a:endParaRPr lang="en-US" sz="2800" b="0" u="none" strike="noStrike">
+              <a:solidFill>
+                <a:srgbClr val="000000"/>
+              </a:solidFill>
+              <a:effectLst/>
+              <a:uFillTx/>
+              <a:latin typeface="Arial"/>
+            </a:endParaRPr>
+          </a:p>
+          <a:p>
+            <a:pPr marL="1296000" lvl="2" indent="-288000" algn="l">
+              <a:spcBef>
+                <a:spcPts val="850"/>
               </a:spcBef>
               <a:buClr>
                 <a:srgbClr val="000000"/>
@@ -598,32 +588,29 @@
               <a:buChar char=""/>
             </a:pPr>
             <a:r>
-              <a:rPr lang="en-US" sz="1500" b="0" u="none" strike="noStrike">
-                <a:solidFill>
-                  <a:schemeClr val="dk1"/>
-                </a:solidFill>
-                <a:effectLst/>
-                <a:uFillTx/>
-                <a:latin typeface="Calibri"/>
+              <a:rPr lang="en-US" sz="2400" b="0" u="none" strike="noStrike">
+                <a:solidFill>
+                  <a:srgbClr val="000000"/>
+                </a:solidFill>
+                <a:effectLst/>
+                <a:uFillTx/>
+                <a:latin typeface="Arial"/>
               </a:rPr>
               <a:t>Third Outline Level</a:t>
             </a:r>
-            <a:endParaRPr lang="en-US" sz="1500" b="0" u="none" strike="noStrike">
-              <a:solidFill>
-                <a:schemeClr val="dk1"/>
-              </a:solidFill>
-              <a:effectLst/>
-              <a:uFillTx/>
-              <a:latin typeface="Calibri"/>
-            </a:endParaRPr>
-          </a:p>
-          <a:p>
-            <a:pPr marL="1728000" lvl="3" indent="-216000" algn="l" defTabSz="685800">
-              <a:lnSpc>
-                <a:spcPct val="90000"/>
-              </a:lnSpc>
-              <a:spcBef>
-                <a:spcPts val="374"/>
+            <a:endParaRPr lang="en-US" sz="2400" b="0" u="none" strike="noStrike">
+              <a:solidFill>
+                <a:srgbClr val="000000"/>
+              </a:solidFill>
+              <a:effectLst/>
+              <a:uFillTx/>
+              <a:latin typeface="Arial"/>
+            </a:endParaRPr>
+          </a:p>
+          <a:p>
+            <a:pPr marL="1728000" lvl="3" indent="-216000" algn="l">
+              <a:spcBef>
+                <a:spcPts val="567"/>
               </a:spcBef>
               <a:buClr>
                 <a:srgbClr val="000000"/>
@@ -633,32 +620,29 @@
               <a:buChar char=""/>
             </a:pPr>
             <a:r>
-              <a:rPr lang="en-US" sz="1350" b="0" u="none" strike="noStrike">
-                <a:solidFill>
-                  <a:schemeClr val="dk1"/>
-                </a:solidFill>
-                <a:effectLst/>
-                <a:uFillTx/>
-                <a:latin typeface="Calibri"/>
+              <a:rPr lang="en-US" sz="2000" b="0" u="none" strike="noStrike">
+                <a:solidFill>
+                  <a:srgbClr val="000000"/>
+                </a:solidFill>
+                <a:effectLst/>
+                <a:uFillTx/>
+                <a:latin typeface="Arial"/>
               </a:rPr>
               <a:t>Fourth Outline Level</a:t>
             </a:r>
-            <a:endParaRPr lang="en-US" sz="1350" b="0" u="none" strike="noStrike">
-              <a:solidFill>
-                <a:schemeClr val="dk1"/>
-              </a:solidFill>
-              <a:effectLst/>
-              <a:uFillTx/>
-              <a:latin typeface="Calibri"/>
-            </a:endParaRPr>
-          </a:p>
-          <a:p>
-            <a:pPr marL="2160000" lvl="4" indent="-216000" algn="l" defTabSz="685800">
-              <a:lnSpc>
-                <a:spcPct val="90000"/>
-              </a:lnSpc>
-              <a:spcBef>
-                <a:spcPts val="374"/>
+            <a:endParaRPr lang="en-US" sz="2000" b="0" u="none" strike="noStrike">
+              <a:solidFill>
+                <a:srgbClr val="000000"/>
+              </a:solidFill>
+              <a:effectLst/>
+              <a:uFillTx/>
+              <a:latin typeface="Arial"/>
+            </a:endParaRPr>
+          </a:p>
+          <a:p>
+            <a:pPr marL="2160000" lvl="4" indent="-216000" algn="l">
+              <a:spcBef>
+                <a:spcPts val="283"/>
               </a:spcBef>
               <a:buClr>
                 <a:srgbClr val="000000"/>
@@ -668,30 +652,27 @@
               <a:buChar char=""/>
             </a:pPr>
             <a:r>
-              <a:rPr lang="en-US" sz="1350" b="0" u="none" strike="noStrike">
-                <a:solidFill>
-                  <a:schemeClr val="dk1"/>
-                </a:solidFill>
-                <a:effectLst/>
-                <a:uFillTx/>
-                <a:latin typeface="Calibri"/>
+              <a:rPr lang="en-US" sz="2000" b="0" u="none" strike="noStrike">
+                <a:solidFill>
+                  <a:srgbClr val="000000"/>
+                </a:solidFill>
+                <a:effectLst/>
+                <a:uFillTx/>
+                <a:latin typeface="Arial"/>
               </a:rPr>
               <a:t>Fifth Outline Level</a:t>
             </a:r>
-            <a:endParaRPr lang="en-US" sz="1350" b="0" u="none" strike="noStrike">
-              <a:solidFill>
-                <a:schemeClr val="dk1"/>
-              </a:solidFill>
-              <a:effectLst/>
-              <a:uFillTx/>
-              <a:latin typeface="Calibri"/>
-            </a:endParaRPr>
-          </a:p>
-          <a:p>
-            <a:pPr marL="2592000" lvl="5" indent="-216000" algn="l" defTabSz="685800">
-              <a:lnSpc>
-                <a:spcPct val="90000"/>
-              </a:lnSpc>
+            <a:endParaRPr lang="en-US" sz="2000" b="0" u="none" strike="noStrike">
+              <a:solidFill>
+                <a:srgbClr val="000000"/>
+              </a:solidFill>
+              <a:effectLst/>
+              <a:uFillTx/>
+              <a:latin typeface="Arial"/>
+            </a:endParaRPr>
+          </a:p>
+          <a:p>
+            <a:pPr marL="2592000" lvl="5" indent="-216000" algn="l">
               <a:spcBef>
                 <a:spcPts val="283"/>
               </a:spcBef>
@@ -705,28 +686,25 @@
             <a:r>
               <a:rPr lang="en-US" sz="2000" b="0" u="none" strike="noStrike">
                 <a:solidFill>
-                  <a:schemeClr val="dk1"/>
-                </a:solidFill>
-                <a:effectLst/>
-                <a:uFillTx/>
-                <a:latin typeface="Calibri"/>
+                  <a:srgbClr val="000000"/>
+                </a:solidFill>
+                <a:effectLst/>
+                <a:uFillTx/>
+                <a:latin typeface="Arial"/>
               </a:rPr>
               <a:t>Sixth Outline Level</a:t>
             </a:r>
             <a:endParaRPr lang="en-US" sz="2000" b="0" u="none" strike="noStrike">
               <a:solidFill>
-                <a:schemeClr val="dk1"/>
-              </a:solidFill>
-              <a:effectLst/>
-              <a:uFillTx/>
-              <a:latin typeface="Calibri"/>
-            </a:endParaRPr>
-          </a:p>
-          <a:p>
-            <a:pPr marL="3024000" lvl="6" indent="-216000" algn="l" defTabSz="685800">
-              <a:lnSpc>
-                <a:spcPct val="90000"/>
-              </a:lnSpc>
+                <a:srgbClr val="000000"/>
+              </a:solidFill>
+              <a:effectLst/>
+              <a:uFillTx/>
+              <a:latin typeface="Arial"/>
+            </a:endParaRPr>
+          </a:p>
+          <a:p>
+            <a:pPr marL="3024000" lvl="6" indent="-216000" algn="l">
               <a:spcBef>
                 <a:spcPts val="283"/>
               </a:spcBef>
@@ -740,21 +718,21 @@
             <a:r>
               <a:rPr lang="en-US" sz="2000" b="0" u="none" strike="noStrike">
                 <a:solidFill>
-                  <a:schemeClr val="dk1"/>
-                </a:solidFill>
-                <a:effectLst/>
-                <a:uFillTx/>
-                <a:latin typeface="Calibri"/>
+                  <a:srgbClr val="000000"/>
+                </a:solidFill>
+                <a:effectLst/>
+                <a:uFillTx/>
+                <a:latin typeface="Arial"/>
               </a:rPr>
               <a:t>Seventh Outline Level</a:t>
             </a:r>
             <a:endParaRPr lang="en-US" sz="2000" b="0" u="none" strike="noStrike">
               <a:solidFill>
-                <a:schemeClr val="dk1"/>
-              </a:solidFill>
-              <a:effectLst/>
-              <a:uFillTx/>
-              <a:latin typeface="Calibri"/>
+                <a:srgbClr val="000000"/>
+              </a:solidFill>
+              <a:effectLst/>
+              <a:uFillTx/>
+              <a:latin typeface="Arial"/>
             </a:endParaRPr>
           </a:p>
         </p:txBody>
@@ -769,7 +747,7 @@
 
 <file path=ppt/slideLayouts/slideLayout10.xml><?xml version="1.0" encoding="utf-8"?>
 <p:sldLayout xmlns:a="http://schemas.openxmlformats.org/drawingml/2006/main" xmlns:p="http://schemas.openxmlformats.org/presentationml/2006/main" xmlns:r="http://schemas.openxmlformats.org/officeDocument/2006/relationships" xmlns:p14="http://schemas.microsoft.com/office/powerpoint/2010/main" xmlns:p15="http://schemas.microsoft.com/office/powerpoint/2012/main" xmlns:mc="http://schemas.openxmlformats.org/markup-compatibility/2006" type="blank" preserve="1">
-  <p:cSld name="Content with Caption">
+  <p:cSld name="Comparison">
     <p:bg>
       <p:bgPr>
         <a:solidFill>
@@ -793,7 +771,7 @@
       </p:grpSpPr>
       <p:sp>
         <p:nvSpPr>
-          <p:cNvPr id="48" name="PlaceHolder 1"/>
+          <p:cNvPr id="50" name="PlaceHolder 1"/>
           <p:cNvSpPr>
             <a:spLocks noGrp="1"/>
           </p:cNvSpPr>
@@ -803,8 +781,86 @@
         </p:nvSpPr>
         <p:spPr>
           <a:xfrm>
-            <a:off x="630000" y="343080"/>
-            <a:ext cx="2948760" cy="1199880"/>
+            <a:off x="630000" y="273960"/>
+            <a:ext cx="7886160" cy="993600"/>
+          </a:xfrm>
+          <a:prstGeom prst="rect">
+            <a:avLst/>
+          </a:prstGeom>
+          <a:noFill/>
+          <a:ln w="0">
+            <a:noFill/>
+          </a:ln>
+        </p:spPr>
+        <p:txBody>
+          <a:bodyPr lIns="91440" tIns="45720" rIns="91440" bIns="45720" anchor="ctr">
+            <a:noAutofit/>
+          </a:bodyPr>
+          <a:lstStyle>
+            <a:lvl1pPr indent="0" algn="l" defTabSz="685800">
+              <a:lnSpc>
+                <a:spcPct val="90000"/>
+              </a:lnSpc>
+              <a:buNone/>
+              <a:tabLst>
+                <a:tab pos="0" algn="l"/>
+              </a:tabLst>
+              <a:defRPr lang="en-US" sz="3300" b="0" u="none" strike="noStrike">
+                <a:solidFill>
+                  <a:schemeClr val="dk1"/>
+                </a:solidFill>
+                <a:effectLst/>
+                <a:uFillTx/>
+                <a:latin typeface="Calibri Light"/>
+              </a:defRPr>
+            </a:lvl1pPr>
+          </a:lstStyle>
+          <a:p>
+            <a:pPr indent="0" algn="l" defTabSz="685800">
+              <a:lnSpc>
+                <a:spcPct val="90000"/>
+              </a:lnSpc>
+              <a:buNone/>
+              <a:tabLst>
+                <a:tab pos="0" algn="l"/>
+              </a:tabLst>
+            </a:pPr>
+            <a:r>
+              <a:rPr lang="en-US" sz="3300" b="0" u="none" strike="noStrike">
+                <a:solidFill>
+                  <a:schemeClr val="dk1"/>
+                </a:solidFill>
+                <a:effectLst/>
+                <a:uFillTx/>
+                <a:latin typeface="Calibri Light"/>
+              </a:rPr>
+              <a:t>Click to edit Master title style</a:t>
+            </a:r>
+            <a:endParaRPr lang="en-US" sz="3300" b="0" u="none" strike="noStrike">
+              <a:solidFill>
+                <a:schemeClr val="dk1"/>
+              </a:solidFill>
+              <a:effectLst/>
+              <a:uFillTx/>
+              <a:latin typeface="Calibri Light"/>
+            </a:endParaRPr>
+          </a:p>
+        </p:txBody>
+      </p:sp>
+      <p:sp>
+        <p:nvSpPr>
+          <p:cNvPr id="51" name="PlaceHolder 2"/>
+          <p:cNvSpPr>
+            <a:spLocks noGrp="1"/>
+          </p:cNvSpPr>
+          <p:nvPr>
+            <p:ph type="body"/>
+          </p:nvPr>
+        </p:nvSpPr>
+        <p:spPr>
+          <a:xfrm>
+            <a:off x="630000" y="1260720"/>
+            <a:ext cx="3867480" cy="617040"/>
           </a:xfrm>
           <a:prstGeom prst="rect">
             <a:avLst/>
@@ -823,14 +879,20 @@
               <a:lnSpc>
                 <a:spcPct val="90000"/>
               </a:lnSpc>
+              <a:spcBef>
+                <a:spcPts val="751"/>
+              </a:spcBef>
               <a:buNone/>
-              <a:defRPr lang="en-US" sz="2400" b="0" u="none" strike="noStrike">
-                <a:solidFill>
-                  <a:schemeClr val="dk1"/>
-                </a:solidFill>
-                <a:effectLst/>
-                <a:uFillTx/>
-                <a:latin typeface="Calibri Light"/>
+              <a:tabLst>
+                <a:tab pos="0" algn="l"/>
+              </a:tabLst>
+              <a:defRPr lang="en-US" sz="1800" b="1" u="none" strike="noStrike">
+                <a:solidFill>
+                  <a:schemeClr val="dk1"/>
+                </a:solidFill>
+                <a:effectLst/>
+                <a:uFillTx/>
+                <a:latin typeface="Calibri"/>
               </a:defRPr>
             </a:lvl1pPr>
           </a:lstStyle>
@@ -839,33 +901,39 @@
               <a:lnSpc>
                 <a:spcPct val="90000"/>
               </a:lnSpc>
+              <a:spcBef>
+                <a:spcPts val="751"/>
+              </a:spcBef>
               <a:buNone/>
-            </a:pPr>
-            <a:r>
-              <a:rPr lang="en-US" sz="2400" b="0" u="none" strike="noStrike">
-                <a:solidFill>
-                  <a:schemeClr val="dk1"/>
-                </a:solidFill>
-                <a:effectLst/>
-                <a:uFillTx/>
-                <a:latin typeface="Calibri Light"/>
-              </a:rPr>
-              <a:t>Click to edit Master title style</a:t>
-            </a:r>
-            <a:endParaRPr lang="en-US" sz="2400" b="0" u="none" strike="noStrike">
+              <a:tabLst>
+                <a:tab pos="0" algn="l"/>
+              </a:tabLst>
+            </a:pPr>
+            <a:r>
+              <a:rPr lang="en-US" sz="1800" b="1" u="none" strike="noStrike">
+                <a:solidFill>
+                  <a:schemeClr val="dk1"/>
+                </a:solidFill>
+                <a:effectLst/>
+                <a:uFillTx/>
+                <a:latin typeface="Calibri"/>
+              </a:rPr>
+              <a:t>Edit Master text styles</a:t>
+            </a:r>
+            <a:endParaRPr lang="en-US" sz="1800" b="0" u="none" strike="noStrike">
               <a:solidFill>
                 <a:schemeClr val="dk1"/>
               </a:solidFill>
               <a:effectLst/>
               <a:uFillTx/>
-              <a:latin typeface="Calibri Light"/>
+              <a:latin typeface="Calibri"/>
             </a:endParaRPr>
           </a:p>
         </p:txBody>
       </p:sp>
       <p:sp>
         <p:nvSpPr>
-          <p:cNvPr id="49" name="PlaceHolder 2"/>
+          <p:cNvPr id="52" name="PlaceHolder 3"/>
           <p:cNvSpPr>
             <a:spLocks noGrp="1"/>
           </p:cNvSpPr>
@@ -875,8 +943,8 @@
         </p:nvSpPr>
         <p:spPr>
           <a:xfrm>
-            <a:off x="3887280" y="740520"/>
-            <a:ext cx="4628880" cy="3654720"/>
+            <a:off x="630000" y="1878840"/>
+            <a:ext cx="3867480" cy="2762640"/>
           </a:xfrm>
           <a:prstGeom prst="rect">
             <a:avLst/>
@@ -903,7 +971,10 @@
               </a:buClr>
               <a:buFont typeface="Arial"/>
               <a:buChar char="•"/>
-              <a:defRPr lang="en-US" sz="2400" b="0" u="none" strike="noStrike">
+              <a:tabLst>
+                <a:tab pos="0" algn="l"/>
+              </a:tabLst>
+              <a:defRPr lang="en-US" sz="2100" b="0" u="none" strike="noStrike">
                 <a:solidFill>
                   <a:schemeClr val="dk1"/>
                 </a:solidFill>
@@ -924,7 +995,10 @@
               </a:buClr>
               <a:buFont typeface="Arial"/>
               <a:buChar char="•"/>
-              <a:defRPr lang="en-US" sz="2100" b="0" u="none" strike="noStrike">
+              <a:tabLst>
+                <a:tab pos="0" algn="l"/>
+              </a:tabLst>
+              <a:defRPr lang="en-US" sz="1800" b="0" u="none" strike="noStrike">
                 <a:solidFill>
                   <a:schemeClr val="dk1"/>
                 </a:solidFill>
@@ -945,7 +1019,10 @@
               </a:buClr>
               <a:buFont typeface="Arial"/>
               <a:buChar char="•"/>
-              <a:defRPr lang="en-US" sz="1800" b="0" u="none" strike="noStrike">
+              <a:tabLst>
+                <a:tab pos="0" algn="l"/>
+              </a:tabLst>
+              <a:defRPr lang="en-US" sz="1500" b="0" u="none" strike="noStrike">
                 <a:solidFill>
                   <a:schemeClr val="dk1"/>
                 </a:solidFill>
@@ -966,7 +1043,10 @@
               </a:buClr>
               <a:buFont typeface="Arial"/>
               <a:buChar char="•"/>
-              <a:defRPr lang="en-US" sz="1500" b="0" u="none" strike="noStrike">
+              <a:tabLst>
+                <a:tab pos="0" algn="l"/>
+              </a:tabLst>
+              <a:defRPr lang="en-US" sz="1350" b="0" u="none" strike="noStrike">
                 <a:solidFill>
                   <a:schemeClr val="dk1"/>
                 </a:solidFill>
@@ -987,7 +1067,10 @@
               </a:buClr>
               <a:buFont typeface="Arial"/>
               <a:buChar char="•"/>
-              <a:defRPr lang="en-US" sz="1500" b="0" u="none" strike="noStrike">
+              <a:tabLst>
+                <a:tab pos="0" algn="l"/>
+              </a:tabLst>
+              <a:defRPr lang="en-US" sz="1350" b="0" u="none" strike="noStrike">
                 <a:solidFill>
                   <a:schemeClr val="dk1"/>
                 </a:solidFill>
@@ -1010,9 +1093,12 @@
               </a:buClr>
               <a:buFont typeface="Arial"/>
               <a:buChar char="•"/>
-            </a:pPr>
-            <a:r>
-              <a:rPr lang="en-US" sz="2400" b="0" u="none" strike="noStrike">
+              <a:tabLst>
+                <a:tab pos="0" algn="l"/>
+              </a:tabLst>
+            </a:pPr>
+            <a:r>
+              <a:rPr lang="en-US" sz="2100" b="0" u="none" strike="noStrike">
                 <a:solidFill>
                   <a:schemeClr val="dk1"/>
                 </a:solidFill>
@@ -1022,7 +1108,7 @@
               </a:rPr>
               <a:t>Edit Master text styles</a:t>
             </a:r>
-            <a:endParaRPr lang="en-US" sz="2400" b="0" u="none" strike="noStrike">
+            <a:endParaRPr lang="en-US" sz="2100" b="0" u="none" strike="noStrike">
               <a:solidFill>
                 <a:schemeClr val="dk1"/>
               </a:solidFill>
@@ -1044,9 +1130,12 @@
               </a:buClr>
               <a:buFont typeface="Arial"/>
               <a:buChar char="•"/>
-            </a:pPr>
-            <a:r>
-              <a:rPr lang="en-US" sz="2100" b="0" u="none" strike="noStrike">
+              <a:tabLst>
+                <a:tab pos="0" algn="l"/>
+              </a:tabLst>
+            </a:pPr>
+            <a:r>
+              <a:rPr lang="en-US" sz="1800" b="0" u="none" strike="noStrike">
                 <a:solidFill>
                   <a:schemeClr val="dk1"/>
                 </a:solidFill>
@@ -1056,7 +1145,7 @@
               </a:rPr>
               <a:t>Second level</a:t>
             </a:r>
-            <a:endParaRPr lang="en-US" sz="2100" b="0" u="none" strike="noStrike">
+            <a:endParaRPr lang="en-US" sz="1800" b="0" u="none" strike="noStrike">
               <a:solidFill>
                 <a:schemeClr val="dk1"/>
               </a:solidFill>
@@ -1078,9 +1167,12 @@
               </a:buClr>
               <a:buFont typeface="Arial"/>
               <a:buChar char="•"/>
-            </a:pPr>
-            <a:r>
-              <a:rPr lang="en-US" sz="1800" b="0" u="none" strike="noStrike">
+              <a:tabLst>
+                <a:tab pos="0" algn="l"/>
+              </a:tabLst>
+            </a:pPr>
+            <a:r>
+              <a:rPr lang="en-US" sz="1500" b="0" u="none" strike="noStrike">
                 <a:solidFill>
                   <a:schemeClr val="dk1"/>
                 </a:solidFill>
@@ -1090,7 +1182,7 @@
               </a:rPr>
               <a:t>Third level</a:t>
             </a:r>
-            <a:endParaRPr lang="en-US" sz="1800" b="0" u="none" strike="noStrike">
+            <a:endParaRPr lang="en-US" sz="1500" b="0" u="none" strike="noStrike">
               <a:solidFill>
                 <a:schemeClr val="dk1"/>
               </a:solidFill>
@@ -1112,9 +1204,12 @@
               </a:buClr>
               <a:buFont typeface="Arial"/>
               <a:buChar char="•"/>
-            </a:pPr>
-            <a:r>
-              <a:rPr lang="en-US" sz="1500" b="0" u="none" strike="noStrike">
+              <a:tabLst>
+                <a:tab pos="0" algn="l"/>
+              </a:tabLst>
+            </a:pPr>
+            <a:r>
+              <a:rPr lang="en-US" sz="1350" b="0" u="none" strike="noStrike">
                 <a:solidFill>
                   <a:schemeClr val="dk1"/>
                 </a:solidFill>
@@ -1124,7 +1219,7 @@
               </a:rPr>
               <a:t>Fourth level</a:t>
             </a:r>
-            <a:endParaRPr lang="en-US" sz="1500" b="0" u="none" strike="noStrike">
+            <a:endParaRPr lang="en-US" sz="1350" b="0" u="none" strike="noStrike">
               <a:solidFill>
                 <a:schemeClr val="dk1"/>
               </a:solidFill>
@@ -1146,9 +1241,12 @@
               </a:buClr>
               <a:buFont typeface="Arial"/>
               <a:buChar char="•"/>
-            </a:pPr>
-            <a:r>
-              <a:rPr lang="en-US" sz="1500" b="0" u="none" strike="noStrike">
+              <a:tabLst>
+                <a:tab pos="0" algn="l"/>
+              </a:tabLst>
+            </a:pPr>
+            <a:r>
+              <a:rPr lang="en-US" sz="1350" b="0" u="none" strike="noStrike">
                 <a:solidFill>
                   <a:schemeClr val="dk1"/>
                 </a:solidFill>
@@ -1158,7 +1256,7 @@
               </a:rPr>
               <a:t>Fifth level</a:t>
             </a:r>
-            <a:endParaRPr lang="en-US" sz="1500" b="0" u="none" strike="noStrike">
+            <a:endParaRPr lang="en-US" sz="1350" b="0" u="none" strike="noStrike">
               <a:solidFill>
                 <a:schemeClr val="dk1"/>
               </a:solidFill>
@@ -1171,7 +1269,7 @@
       </p:sp>
       <p:sp>
         <p:nvSpPr>
-          <p:cNvPr id="50" name="PlaceHolder 3"/>
+          <p:cNvPr id="53" name="PlaceHolder 4"/>
           <p:cNvSpPr>
             <a:spLocks noGrp="1"/>
           </p:cNvSpPr>
@@ -1181,8 +1279,92 @@
         </p:nvSpPr>
         <p:spPr>
           <a:xfrm>
-            <a:off x="630000" y="1542960"/>
-            <a:ext cx="2948760" cy="2858400"/>
+            <a:off x="4629240" y="1260720"/>
+            <a:ext cx="3886560" cy="617040"/>
+          </a:xfrm>
+          <a:prstGeom prst="rect">
+            <a:avLst/>
+          </a:prstGeom>
+          <a:noFill/>
+          <a:ln w="0">
+            <a:noFill/>
+          </a:ln>
+        </p:spPr>
+        <p:txBody>
+          <a:bodyPr lIns="91440" tIns="45720" rIns="91440" bIns="45720" anchor="b">
+            <a:noAutofit/>
+          </a:bodyPr>
+          <a:lstStyle>
+            <a:lvl1pPr indent="0" algn="l" defTabSz="685800">
+              <a:lnSpc>
+                <a:spcPct val="90000"/>
+              </a:lnSpc>
+              <a:spcBef>
+                <a:spcPts val="751"/>
+              </a:spcBef>
+              <a:buNone/>
+              <a:tabLst>
+                <a:tab pos="0" algn="l"/>
+              </a:tabLst>
+              <a:defRPr lang="en-US" sz="1800" b="1" u="none" strike="noStrike">
+                <a:solidFill>
+                  <a:schemeClr val="dk1"/>
+                </a:solidFill>
+                <a:effectLst/>
+                <a:uFillTx/>
+                <a:latin typeface="Calibri"/>
+              </a:defRPr>
+            </a:lvl1pPr>
+          </a:lstStyle>
+          <a:p>
+            <a:pPr indent="0" algn="l" defTabSz="685800">
+              <a:lnSpc>
+                <a:spcPct val="90000"/>
+              </a:lnSpc>
+              <a:spcBef>
+                <a:spcPts val="751"/>
+              </a:spcBef>
+              <a:buNone/>
+              <a:tabLst>
+                <a:tab pos="0" algn="l"/>
+              </a:tabLst>
+            </a:pPr>
+            <a:r>
+              <a:rPr lang="en-US" sz="1800" b="1" u="none" strike="noStrike">
+                <a:solidFill>
+                  <a:schemeClr val="dk1"/>
+                </a:solidFill>
+                <a:effectLst/>
+                <a:uFillTx/>
+                <a:latin typeface="Calibri"/>
+              </a:rPr>
+              <a:t>Edit Master text styles</a:t>
+            </a:r>
+            <a:endParaRPr lang="en-US" sz="1800" b="0" u="none" strike="noStrike">
+              <a:solidFill>
+                <a:schemeClr val="dk1"/>
+              </a:solidFill>
+              <a:effectLst/>
+              <a:uFillTx/>
+              <a:latin typeface="Calibri"/>
+            </a:endParaRPr>
+          </a:p>
+        </p:txBody>
+      </p:sp>
+      <p:sp>
+        <p:nvSpPr>
+          <p:cNvPr id="54" name="PlaceHolder 5"/>
+          <p:cNvSpPr>
+            <a:spLocks noGrp="1"/>
+          </p:cNvSpPr>
+          <p:nvPr>
+            <p:ph type="body"/>
+          </p:nvPr>
+        </p:nvSpPr>
+        <p:spPr>
+          <a:xfrm>
+            <a:off x="4629240" y="1878840"/>
+            <a:ext cx="3886560" cy="2762640"/>
           </a:xfrm>
           <a:prstGeom prst="rect">
             <a:avLst/>
@@ -1197,18 +1379,22 @@
             <a:noAutofit/>
           </a:bodyPr>
           <a:lstStyle>
-            <a:lvl1pPr indent="0" algn="l" defTabSz="685800">
+            <a:lvl1pPr algn="l" defTabSz="685800">
               <a:lnSpc>
                 <a:spcPct val="90000"/>
               </a:lnSpc>
               <a:spcBef>
                 <a:spcPts val="751"/>
               </a:spcBef>
-              <a:buNone/>
-              <a:tabLst>
-                <a:tab pos="0" algn="l"/>
-              </a:tabLst>
-              <a:defRPr lang="en-US" sz="1200" b="0" u="none" strike="noStrike">
+              <a:buClr>
+                <a:srgbClr val="000000"/>
+              </a:buClr>
+              <a:buFont typeface="Arial"/>
+              <a:buChar char="•"/>
+              <a:tabLst>
+                <a:tab pos="0" algn="l"/>
+              </a:tabLst>
+              <a:defRPr lang="en-US" sz="2100" b="0" u="none" strike="noStrike">
                 <a:solidFill>
                   <a:schemeClr val="dk1"/>
                 </a:solidFill>
@@ -1217,22 +1403,122 @@
                 <a:latin typeface="Calibri"/>
               </a:defRPr>
             </a:lvl1pPr>
+            <a:lvl2pPr lvl="1" algn="l" defTabSz="685800">
+              <a:lnSpc>
+                <a:spcPct val="90000"/>
+              </a:lnSpc>
+              <a:spcBef>
+                <a:spcPts val="374"/>
+              </a:spcBef>
+              <a:buClr>
+                <a:srgbClr val="000000"/>
+              </a:buClr>
+              <a:buFont typeface="Arial"/>
+              <a:buChar char="•"/>
+              <a:tabLst>
+                <a:tab pos="0" algn="l"/>
+              </a:tabLst>
+              <a:defRPr lang="en-US" sz="1800" b="0" u="none" strike="noStrike">
+                <a:solidFill>
+                  <a:schemeClr val="dk1"/>
+                </a:solidFill>
+                <a:effectLst/>
+                <a:uFillTx/>
+                <a:latin typeface="Calibri"/>
+              </a:defRPr>
+            </a:lvl2pPr>
+            <a:lvl3pPr lvl="2" algn="l" defTabSz="685800">
+              <a:lnSpc>
+                <a:spcPct val="90000"/>
+              </a:lnSpc>
+              <a:spcBef>
+                <a:spcPts val="374"/>
+              </a:spcBef>
+              <a:buClr>
+                <a:srgbClr val="000000"/>
+              </a:buClr>
+              <a:buFont typeface="Arial"/>
+              <a:buChar char="•"/>
+              <a:tabLst>
+                <a:tab pos="0" algn="l"/>
+              </a:tabLst>
+              <a:defRPr lang="en-US" sz="1500" b="0" u="none" strike="noStrike">
+                <a:solidFill>
+                  <a:schemeClr val="dk1"/>
+                </a:solidFill>
+                <a:effectLst/>
+                <a:uFillTx/>
+                <a:latin typeface="Calibri"/>
+              </a:defRPr>
+            </a:lvl3pPr>
+            <a:lvl4pPr lvl="3" algn="l" defTabSz="685800">
+              <a:lnSpc>
+                <a:spcPct val="90000"/>
+              </a:lnSpc>
+              <a:spcBef>
+                <a:spcPts val="374"/>
+              </a:spcBef>
+              <a:buClr>
+                <a:srgbClr val="000000"/>
+              </a:buClr>
+              <a:buFont typeface="Arial"/>
+              <a:buChar char="•"/>
+              <a:tabLst>
+                <a:tab pos="0" algn="l"/>
+              </a:tabLst>
+              <a:defRPr lang="en-US" sz="1350" b="0" u="none" strike="noStrike">
+                <a:solidFill>
+                  <a:schemeClr val="dk1"/>
+                </a:solidFill>
+                <a:effectLst/>
+                <a:uFillTx/>
+                <a:latin typeface="Calibri"/>
+              </a:defRPr>
+            </a:lvl4pPr>
+            <a:lvl5pPr lvl="4" algn="l" defTabSz="685800">
+              <a:lnSpc>
+                <a:spcPct val="90000"/>
+              </a:lnSpc>
+              <a:spcBef>
+                <a:spcPts val="374"/>
+              </a:spcBef>
+              <a:buClr>
+                <a:srgbClr val="000000"/>
+              </a:buClr>
+              <a:buFont typeface="Arial"/>
+              <a:buChar char="•"/>
+              <a:tabLst>
+                <a:tab pos="0" algn="l"/>
+              </a:tabLst>
+              <a:defRPr lang="en-US" sz="1350" b="0" u="none" strike="noStrike">
+                <a:solidFill>
+                  <a:schemeClr val="dk1"/>
+                </a:solidFill>
+                <a:effectLst/>
+                <a:uFillTx/>
+                <a:latin typeface="Calibri"/>
+              </a:defRPr>
+            </a:lvl5pPr>
           </a:lstStyle>
           <a:p>
-            <a:pPr indent="0" algn="l" defTabSz="685800">
+            <a:pPr marL="171360" indent="-171360" algn="l" defTabSz="685800">
               <a:lnSpc>
                 <a:spcPct val="90000"/>
               </a:lnSpc>
               <a:spcBef>
                 <a:spcPts val="751"/>
               </a:spcBef>
-              <a:buNone/>
-              <a:tabLst>
-                <a:tab pos="0" algn="l"/>
-              </a:tabLst>
-            </a:pPr>
-            <a:r>
-              <a:rPr lang="en-US" sz="1200" b="0" u="none" strike="noStrike">
+              <a:buClr>
+                <a:srgbClr val="000000"/>
+              </a:buClr>
+              <a:buFont typeface="Arial"/>
+              <a:buChar char="•"/>
+              <a:tabLst>
+                <a:tab pos="0" algn="l"/>
+              </a:tabLst>
+            </a:pPr>
+            <a:r>
+              <a:rPr lang="en-US" sz="2100" b="0" u="none" strike="noStrike">
                 <a:solidFill>
                   <a:schemeClr val="dk1"/>
                 </a:solidFill>
@@ -1242,7 +1528,155 @@
               </a:rPr>
               <a:t>Edit Master text styles</a:t>
             </a:r>
-            <a:endParaRPr lang="en-US" sz="1200" b="0" u="none" strike="noStrike">
+            <a:endParaRPr lang="en-US" sz="2100" b="0" u="none" strike="noStrike">
+              <a:solidFill>
+                <a:schemeClr val="dk1"/>
+              </a:solidFill>
+              <a:effectLst/>
+              <a:uFillTx/>
+              <a:latin typeface="Calibri"/>
+            </a:endParaRPr>
+          </a:p>
+          <a:p>
+            <a:pPr marL="514440" lvl="1" indent="-171360" algn="l" defTabSz="685800">
+              <a:lnSpc>
+                <a:spcPct val="90000"/>
+              </a:lnSpc>
+              <a:spcBef>
+                <a:spcPts val="374"/>
+              </a:spcBef>
+              <a:buClr>
+                <a:srgbClr val="000000"/>
+              </a:buClr>
+              <a:buFont typeface="Arial"/>
+              <a:buChar char="•"/>
+              <a:tabLst>
+                <a:tab pos="0" algn="l"/>
+              </a:tabLst>
+            </a:pPr>
+            <a:r>
+              <a:rPr lang="en-US" sz="1800" b="0" u="none" strike="noStrike">
+                <a:solidFill>
+                  <a:schemeClr val="dk1"/>
+                </a:solidFill>
+                <a:effectLst/>
+                <a:uFillTx/>
+                <a:latin typeface="Calibri"/>
+              </a:rPr>
+              <a:t>Second level</a:t>
+            </a:r>
+            <a:endParaRPr lang="en-US" sz="1800" b="0" u="none" strike="noStrike">
+              <a:solidFill>
+                <a:schemeClr val="dk1"/>
+              </a:solidFill>
+              <a:effectLst/>
+              <a:uFillTx/>
+              <a:latin typeface="Calibri"/>
+            </a:endParaRPr>
+          </a:p>
+          <a:p>
+            <a:pPr marL="857160" lvl="2" indent="-171360" algn="l" defTabSz="685800">
+              <a:lnSpc>
+                <a:spcPct val="90000"/>
+              </a:lnSpc>
+              <a:spcBef>
+                <a:spcPts val="374"/>
+              </a:spcBef>
+              <a:buClr>
+                <a:srgbClr val="000000"/>
+              </a:buClr>
+              <a:buFont typeface="Arial"/>
+              <a:buChar char="•"/>
+              <a:tabLst>
+                <a:tab pos="0" algn="l"/>
+              </a:tabLst>
+            </a:pPr>
+            <a:r>
+              <a:rPr lang="en-US" sz="1500" b="0" u="none" strike="noStrike">
+                <a:solidFill>
+                  <a:schemeClr val="dk1"/>
+                </a:solidFill>
+                <a:effectLst/>
+                <a:uFillTx/>
+                <a:latin typeface="Calibri"/>
+              </a:rPr>
+              <a:t>Third level</a:t>
+            </a:r>
+            <a:endParaRPr lang="en-US" sz="1500" b="0" u="none" strike="noStrike">
+              <a:solidFill>
+                <a:schemeClr val="dk1"/>
+              </a:solidFill>
+              <a:effectLst/>
+              <a:uFillTx/>
+              <a:latin typeface="Calibri"/>
+            </a:endParaRPr>
+          </a:p>
+          <a:p>
+            <a:pPr marL="1200240" lvl="3" indent="-171360" algn="l" defTabSz="685800">
+              <a:lnSpc>
+                <a:spcPct val="90000"/>
+              </a:lnSpc>
+              <a:spcBef>
+                <a:spcPts val="374"/>
+              </a:spcBef>
+              <a:buClr>
+                <a:srgbClr val="000000"/>
+              </a:buClr>
+              <a:buFont typeface="Arial"/>
+              <a:buChar char="•"/>
+              <a:tabLst>
+                <a:tab pos="0" algn="l"/>
+              </a:tabLst>
+            </a:pPr>
+            <a:r>
+              <a:rPr lang="en-US" sz="1350" b="0" u="none" strike="noStrike">
+                <a:solidFill>
+                  <a:schemeClr val="dk1"/>
+                </a:solidFill>
+                <a:effectLst/>
+                <a:uFillTx/>
+                <a:latin typeface="Calibri"/>
+              </a:rPr>
+              <a:t>Fourth level</a:t>
+            </a:r>
+            <a:endParaRPr lang="en-US" sz="1350" b="0" u="none" strike="noStrike">
+              <a:solidFill>
+                <a:schemeClr val="dk1"/>
+              </a:solidFill>
+              <a:effectLst/>
+              <a:uFillTx/>
+              <a:latin typeface="Calibri"/>
+            </a:endParaRPr>
+          </a:p>
+          <a:p>
+            <a:pPr marL="1542960" lvl="4" indent="-171360" algn="l" defTabSz="685800">
+              <a:lnSpc>
+                <a:spcPct val="90000"/>
+              </a:lnSpc>
+              <a:spcBef>
+                <a:spcPts val="374"/>
+              </a:spcBef>
+              <a:buClr>
+                <a:srgbClr val="000000"/>
+              </a:buClr>
+              <a:buFont typeface="Arial"/>
+              <a:buChar char="•"/>
+              <a:tabLst>
+                <a:tab pos="0" algn="l"/>
+              </a:tabLst>
+            </a:pPr>
+            <a:r>
+              <a:rPr lang="en-US" sz="1350" b="0" u="none" strike="noStrike">
+                <a:solidFill>
+                  <a:schemeClr val="dk1"/>
+                </a:solidFill>
+                <a:effectLst/>
+                <a:uFillTx/>
+                <a:latin typeface="Calibri"/>
+              </a:rPr>
+              <a:t>Fifth level</a:t>
+            </a:r>
+            <a:endParaRPr lang="en-US" sz="1350" b="0" u="none" strike="noStrike">
               <a:solidFill>
                 <a:schemeClr val="dk1"/>
               </a:solidFill>
@@ -1255,7 +1689,7 @@
       </p:sp>
       <p:sp>
         <p:nvSpPr>
-          <p:cNvPr id="51" name="PlaceHolder 4"/>
+          <p:cNvPr id="55" name="PlaceHolder 6"/>
           <p:cNvSpPr>
             <a:spLocks noGrp="1"/>
           </p:cNvSpPr>
@@ -1266,7 +1700,7 @@
         <p:spPr>
           <a:xfrm>
             <a:off x="628560" y="4767120"/>
-            <a:ext cx="2057040" cy="273600"/>
+            <a:ext cx="2056680" cy="273240"/>
           </a:xfrm>
           <a:prstGeom prst="rect">
             <a:avLst/>
@@ -1286,6 +1720,9 @@
                 <a:spcPct val="100000"/>
               </a:lnSpc>
               <a:buNone/>
+              <a:tabLst>
+                <a:tab pos="0" algn="l"/>
+              </a:tabLst>
               <a:defRPr lang="en-IN" sz="900" b="0" u="none" strike="noStrike">
                 <a:solidFill>
                   <a:schemeClr val="dk1">
@@ -1304,6 +1741,9 @@
                 <a:spcPct val="100000"/>
               </a:lnSpc>
               <a:buNone/>
+              <a:tabLst>
+                <a:tab pos="0" algn="l"/>
+              </a:tabLst>
             </a:pPr>
             <a:r>
               <a:rPr lang="en-IN" sz="900" b="0" u="none" strike="noStrike">
@@ -1331,7 +1771,7 @@
       </p:sp>
       <p:sp>
         <p:nvSpPr>
-          <p:cNvPr id="52" name="PlaceHolder 5"/>
+          <p:cNvPr id="56" name="PlaceHolder 7"/>
           <p:cNvSpPr>
             <a:spLocks noGrp="1"/>
           </p:cNvSpPr>
@@ -1342,7 +1782,7 @@
         <p:spPr>
           <a:xfrm>
             <a:off x="3029040" y="4767120"/>
-            <a:ext cx="3085920" cy="273600"/>
+            <a:ext cx="3085560" cy="273240"/>
           </a:xfrm>
           <a:prstGeom prst="rect">
             <a:avLst/>
@@ -1358,7 +1798,13 @@
           </a:bodyPr>
           <a:lstStyle>
             <a:lvl1pPr indent="0" algn="ctr">
+              <a:lnSpc>
+                <a:spcPct val="100000"/>
+              </a:lnSpc>
               <a:buNone/>
+              <a:tabLst>
+                <a:tab pos="0" algn="l"/>
+              </a:tabLst>
               <a:defRPr lang="en-US" sz="1400" b="0" u="none" strike="noStrike">
                 <a:solidFill>
                   <a:srgbClr val="000000"/>
@@ -1371,7 +1817,13 @@
           </a:lstStyle>
           <a:p>
             <a:pPr indent="0" algn="ctr">
+              <a:lnSpc>
+                <a:spcPct val="100000"/>
+              </a:lnSpc>
               <a:buNone/>
+              <a:tabLst>
+                <a:tab pos="0" algn="l"/>
+              </a:tabLst>
             </a:pPr>
             <a:r>
               <a:rPr lang="en-US" sz="1400" b="0" u="none" strike="noStrike">
@@ -1397,7 +1849,7 @@
       </p:sp>
       <p:sp>
         <p:nvSpPr>
-          <p:cNvPr id="53" name="PlaceHolder 6"/>
+          <p:cNvPr id="57" name="PlaceHolder 8"/>
           <p:cNvSpPr>
             <a:spLocks noGrp="1"/>
           </p:cNvSpPr>
@@ -1408,7 +1860,7 @@
         <p:spPr>
           <a:xfrm>
             <a:off x="6458040" y="4767120"/>
-            <a:ext cx="2057040" cy="273600"/>
+            <a:ext cx="2056680" cy="273240"/>
           </a:xfrm>
           <a:prstGeom prst="rect">
             <a:avLst/>
@@ -1428,6 +1880,9 @@
                 <a:spcPct val="100000"/>
               </a:lnSpc>
               <a:buNone/>
+              <a:tabLst>
+                <a:tab pos="0" algn="l"/>
+              </a:tabLst>
               <a:defRPr lang="en-IN" sz="900" b="0" u="none" strike="noStrike">
                 <a:solidFill>
                   <a:schemeClr val="dk1">
@@ -1446,8 +1901,11 @@
                 <a:spcPct val="100000"/>
               </a:lnSpc>
               <a:buNone/>
-            </a:pPr>
-            <a:fld id="{D95FF455-A68D-46E7-86C6-6A8AFF4F11C8}" type="slidenum">
+              <a:tabLst>
+                <a:tab pos="0" algn="l"/>
+              </a:tabLst>
+            </a:pPr>
+            <a:fld id="{70BBA273-12D9-4F97-A146-8A4F069D2390}" type="slidenum">
               <a:rPr lang="en-IN" sz="900" b="0" u="none" strike="noStrike">
                 <a:solidFill>
                   <a:schemeClr val="dk1">
@@ -1480,8 +1938,8 @@
 </file>
 
 <file path=ppt/slideLayouts/slideLayout11.xml><?xml version="1.0" encoding="utf-8"?>
-<p:sldLayout xmlns:a="http://schemas.openxmlformats.org/drawingml/2006/main" xmlns:p="http://schemas.openxmlformats.org/presentationml/2006/main" xmlns:r="http://schemas.openxmlformats.org/officeDocument/2006/relationships" xmlns:p14="http://schemas.microsoft.com/office/powerpoint/2010/main" xmlns:p15="http://schemas.microsoft.com/office/powerpoint/2012/main" xmlns:mc="http://schemas.openxmlformats.org/markup-compatibility/2006" type="blank" preserve="1">
-  <p:cSld name="Picture with Caption">
+<p:sldLayout xmlns:a="http://schemas.openxmlformats.org/drawingml/2006/main" xmlns:p="http://schemas.openxmlformats.org/presentationml/2006/main" xmlns:r="http://schemas.openxmlformats.org/officeDocument/2006/relationships" xmlns:p14="http://schemas.microsoft.com/office/powerpoint/2010/main" xmlns:p15="http://schemas.microsoft.com/office/powerpoint/2012/main" xmlns:mc="http://schemas.openxmlformats.org/markup-compatibility/2006" type="titleOnly" preserve="1">
+  <p:cSld name="Title Only">
     <p:bg>
       <p:bgPr>
         <a:solidFill>
@@ -1505,7 +1963,7 @@
       </p:grpSpPr>
       <p:sp>
         <p:nvSpPr>
-          <p:cNvPr id="54" name="PlaceHolder 1"/>
+          <p:cNvPr id="58" name="PlaceHolder 1"/>
           <p:cNvSpPr>
             <a:spLocks noGrp="1"/>
           </p:cNvSpPr>
@@ -1515,8 +1973,8 @@
         </p:nvSpPr>
         <p:spPr>
           <a:xfrm>
-            <a:off x="630000" y="343080"/>
-            <a:ext cx="2948760" cy="1199880"/>
+            <a:off x="628560" y="273960"/>
+            <a:ext cx="7886160" cy="993600"/>
           </a:xfrm>
           <a:prstGeom prst="rect">
             <a:avLst/>
@@ -1527,7 +1985,7 @@
           </a:ln>
         </p:spPr>
         <p:txBody>
-          <a:bodyPr lIns="91440" tIns="45720" rIns="91440" bIns="45720" anchor="b">
+          <a:bodyPr lIns="91440" tIns="45720" rIns="91440" bIns="45720" anchor="ctr">
             <a:noAutofit/>
           </a:bodyPr>
           <a:lstStyle>
@@ -1536,7 +1994,10 @@
                 <a:spcPct val="90000"/>
               </a:lnSpc>
               <a:buNone/>
-              <a:defRPr lang="en-US" sz="2400" b="0" u="none" strike="noStrike">
+              <a:tabLst>
+                <a:tab pos="0" algn="l"/>
+              </a:tabLst>
+              <a:defRPr lang="en-US" sz="3300" b="0" u="none" strike="noStrike">
                 <a:solidFill>
                   <a:schemeClr val="dk1"/>
                 </a:solidFill>
@@ -1552,9 +2013,12 @@
                 <a:spcPct val="90000"/>
               </a:lnSpc>
               <a:buNone/>
-            </a:pPr>
-            <a:r>
-              <a:rPr lang="en-US" sz="2400" b="0" u="none" strike="noStrike">
+              <a:tabLst>
+                <a:tab pos="0" algn="l"/>
+              </a:tabLst>
+            </a:pPr>
+            <a:r>
+              <a:rPr lang="en-US" sz="3300" b="0" u="none" strike="noStrike">
                 <a:solidFill>
                   <a:schemeClr val="dk1"/>
                 </a:solidFill>
@@ -1564,7 +2028,7 @@
               </a:rPr>
               <a:t>Click to edit Master title style</a:t>
             </a:r>
-            <a:endParaRPr lang="en-US" sz="2400" b="0" u="none" strike="noStrike">
+            <a:endParaRPr lang="en-US" sz="3300" b="0" u="none" strike="noStrike">
               <a:solidFill>
                 <a:schemeClr val="dk1"/>
               </a:solidFill>
@@ -1577,144 +2041,7 @@
       </p:sp>
       <p:sp>
         <p:nvSpPr>
-          <p:cNvPr id="55" name="PlaceHolder 2"/>
-          <p:cNvSpPr>
-            <a:spLocks noGrp="1"/>
-          </p:cNvSpPr>
-          <p:nvPr>
-            <p:ph type="pic"/>
-          </p:nvPr>
-        </p:nvSpPr>
-        <p:spPr>
-          <a:xfrm>
-            <a:off x="3887280" y="740520"/>
-            <a:ext cx="4628880" cy="3654720"/>
-          </a:xfrm>
-          <a:prstGeom prst="rect">
-            <a:avLst/>
-          </a:prstGeom>
-          <a:noFill/>
-          <a:ln w="0">
-            <a:noFill/>
-          </a:ln>
-        </p:spPr>
-        <p:txBody>
-          <a:bodyPr lIns="90000" tIns="45000" rIns="90000" bIns="45000" anchor="t">
-            <a:noAutofit/>
-          </a:bodyPr>
-          <a:p>
-            <a:pPr indent="0" algn="l">
-              <a:buNone/>
-            </a:pPr>
-            <a:r>
-              <a:rPr lang="en-US" sz="2400" b="0" u="none" strike="noStrike">
-                <a:solidFill>
-                  <a:srgbClr val="000000"/>
-                </a:solidFill>
-                <a:effectLst/>
-                <a:uFillTx/>
-                <a:latin typeface="Arial"/>
-              </a:rPr>
-              <a:t>Double-click to add an Image</a:t>
-            </a:r>
-            <a:endParaRPr lang="en-US" sz="2400" b="0" u="none" strike="noStrike">
-              <a:solidFill>
-                <a:srgbClr val="000000"/>
-              </a:solidFill>
-              <a:effectLst/>
-              <a:uFillTx/>
-              <a:latin typeface="Arial"/>
-            </a:endParaRPr>
-          </a:p>
-        </p:txBody>
-      </p:sp>
-      <p:sp>
-        <p:nvSpPr>
-          <p:cNvPr id="56" name="PlaceHolder 3"/>
-          <p:cNvSpPr>
-            <a:spLocks noGrp="1"/>
-          </p:cNvSpPr>
-          <p:nvPr>
-            <p:ph type="body"/>
-          </p:nvPr>
-        </p:nvSpPr>
-        <p:spPr>
-          <a:xfrm>
-            <a:off x="630000" y="1542960"/>
-            <a:ext cx="2948760" cy="2858400"/>
-          </a:xfrm>
-          <a:prstGeom prst="rect">
-            <a:avLst/>
-          </a:prstGeom>
-          <a:noFill/>
-          <a:ln w="0">
-            <a:noFill/>
-          </a:ln>
-        </p:spPr>
-        <p:txBody>
-          <a:bodyPr lIns="91440" tIns="45720" rIns="91440" bIns="45720" anchor="t">
-            <a:noAutofit/>
-          </a:bodyPr>
-          <a:lstStyle>
-            <a:lvl1pPr indent="0" algn="l" defTabSz="685800">
-              <a:lnSpc>
-                <a:spcPct val="90000"/>
-              </a:lnSpc>
-              <a:spcBef>
-                <a:spcPts val="751"/>
-              </a:spcBef>
-              <a:buNone/>
-              <a:tabLst>
-                <a:tab pos="0" algn="l"/>
-              </a:tabLst>
-              <a:defRPr lang="en-US" sz="1200" b="0" u="none" strike="noStrike">
-                <a:solidFill>
-                  <a:schemeClr val="dk1"/>
-                </a:solidFill>
-                <a:effectLst/>
-                <a:uFillTx/>
-                <a:latin typeface="Calibri"/>
-              </a:defRPr>
-            </a:lvl1pPr>
-          </a:lstStyle>
-          <a:p>
-            <a:pPr indent="0" algn="l" defTabSz="685800">
-              <a:lnSpc>
-                <a:spcPct val="90000"/>
-              </a:lnSpc>
-              <a:spcBef>
-                <a:spcPts val="751"/>
-              </a:spcBef>
-              <a:buNone/>
-              <a:tabLst>
-                <a:tab pos="0" algn="l"/>
-              </a:tabLst>
-            </a:pPr>
-            <a:r>
-              <a:rPr lang="en-US" sz="1200" b="0" u="none" strike="noStrike">
-                <a:solidFill>
-                  <a:schemeClr val="dk1"/>
-                </a:solidFill>
-                <a:effectLst/>
-                <a:uFillTx/>
-                <a:latin typeface="Calibri"/>
-              </a:rPr>
-              <a:t>Edit Master text styles</a:t>
-            </a:r>
-            <a:endParaRPr lang="en-US" sz="1200" b="0" u="none" strike="noStrike">
-              <a:solidFill>
-                <a:schemeClr val="dk1"/>
-              </a:solidFill>
-              <a:effectLst/>
-              <a:uFillTx/>
-              <a:latin typeface="Calibri"/>
-            </a:endParaRPr>
-          </a:p>
-        </p:txBody>
-      </p:sp>
-      <p:sp>
-        <p:nvSpPr>
-          <p:cNvPr id="57" name="PlaceHolder 4"/>
+          <p:cNvPr id="59" name="PlaceHolder 2"/>
           <p:cNvSpPr>
             <a:spLocks noGrp="1"/>
           </p:cNvSpPr>
@@ -1725,7 +2052,7 @@
         <p:spPr>
           <a:xfrm>
             <a:off x="628560" y="4767120"/>
-            <a:ext cx="2057040" cy="273600"/>
+            <a:ext cx="2056680" cy="273240"/>
           </a:xfrm>
           <a:prstGeom prst="rect">
             <a:avLst/>
@@ -1745,6 +2072,9 @@
                 <a:spcPct val="100000"/>
               </a:lnSpc>
               <a:buNone/>
+              <a:tabLst>
+                <a:tab pos="0" algn="l"/>
+              </a:tabLst>
               <a:defRPr lang="en-IN" sz="900" b="0" u="none" strike="noStrike">
                 <a:solidFill>
                   <a:schemeClr val="dk1">
@@ -1763,6 +2093,9 @@
                 <a:spcPct val="100000"/>
               </a:lnSpc>
               <a:buNone/>
+              <a:tabLst>
+                <a:tab pos="0" algn="l"/>
+              </a:tabLst>
             </a:pPr>
             <a:r>
               <a:rPr lang="en-IN" sz="900" b="0" u="none" strike="noStrike">
@@ -1790,7 +2123,7 @@
       </p:sp>
       <p:sp>
         <p:nvSpPr>
-          <p:cNvPr id="58" name="PlaceHolder 5"/>
+          <p:cNvPr id="60" name="PlaceHolder 3"/>
           <p:cNvSpPr>
             <a:spLocks noGrp="1"/>
           </p:cNvSpPr>
@@ -1801,7 +2134,7 @@
         <p:spPr>
           <a:xfrm>
             <a:off x="3029040" y="4767120"/>
-            <a:ext cx="3085920" cy="273600"/>
+            <a:ext cx="3085560" cy="273240"/>
           </a:xfrm>
           <a:prstGeom prst="rect">
             <a:avLst/>
@@ -1817,7 +2150,13 @@
           </a:bodyPr>
           <a:lstStyle>
             <a:lvl1pPr indent="0" algn="ctr">
+              <a:lnSpc>
+                <a:spcPct val="100000"/>
+              </a:lnSpc>
               <a:buNone/>
+              <a:tabLst>
+                <a:tab pos="0" algn="l"/>
+              </a:tabLst>
               <a:defRPr lang="en-US" sz="1400" b="0" u="none" strike="noStrike">
                 <a:solidFill>
                   <a:srgbClr val="000000"/>
@@ -1830,7 +2169,13 @@
           </a:lstStyle>
           <a:p>
             <a:pPr indent="0" algn="ctr">
+              <a:lnSpc>
+                <a:spcPct val="100000"/>
+              </a:lnSpc>
               <a:buNone/>
+              <a:tabLst>
+                <a:tab pos="0" algn="l"/>
+              </a:tabLst>
             </a:pPr>
             <a:r>
               <a:rPr lang="en-US" sz="1400" b="0" u="none" strike="noStrike">
@@ -1856,7 +2201,7 @@
       </p:sp>
       <p:sp>
         <p:nvSpPr>
-          <p:cNvPr id="59" name="PlaceHolder 6"/>
+          <p:cNvPr id="61" name="PlaceHolder 4"/>
           <p:cNvSpPr>
             <a:spLocks noGrp="1"/>
           </p:cNvSpPr>
@@ -1867,7 +2212,7 @@
         <p:spPr>
           <a:xfrm>
             <a:off x="6458040" y="4767120"/>
-            <a:ext cx="2057040" cy="273600"/>
+            <a:ext cx="2056680" cy="273240"/>
           </a:xfrm>
           <a:prstGeom prst="rect">
             <a:avLst/>
@@ -1887,6 +2232,9 @@
                 <a:spcPct val="100000"/>
               </a:lnSpc>
               <a:buNone/>
+              <a:tabLst>
+                <a:tab pos="0" algn="l"/>
+              </a:tabLst>
               <a:defRPr lang="en-IN" sz="900" b="0" u="none" strike="noStrike">
                 <a:solidFill>
                   <a:schemeClr val="dk1">
@@ -1905,8 +2253,11 @@
                 <a:spcPct val="100000"/>
               </a:lnSpc>
               <a:buNone/>
-            </a:pPr>
-            <a:fld id="{7D61B353-0F52-435D-93DA-854D986ADDCD}" type="slidenum">
+              <a:tabLst>
+                <a:tab pos="0" algn="l"/>
+              </a:tabLst>
+            </a:pPr>
+            <a:fld id="{F1741F59-4C35-48F5-93C5-CFFE04B2F5A2}" type="slidenum">
               <a:rPr lang="en-IN" sz="900" b="0" u="none" strike="noStrike">
                 <a:solidFill>
                   <a:schemeClr val="dk1">
@@ -1926,6 +2277,394 @@
               <a:effectLst/>
               <a:uFillTx/>
               <a:latin typeface="Times New Roman"/>
+            </a:endParaRPr>
+          </a:p>
+        </p:txBody>
+      </p:sp>
+      <p:sp>
+        <p:nvSpPr>
+          <p:cNvPr id="62" name="PlaceHolder 5"/>
+          <p:cNvSpPr>
+            <a:spLocks noGrp="1"/>
+          </p:cNvSpPr>
+          <p:nvPr>
+            <p:ph type="body"/>
+          </p:nvPr>
+        </p:nvSpPr>
+        <p:spPr>
+          <a:xfrm>
+            <a:off x="457200" y="1203480"/>
+            <a:ext cx="8229240" cy="2982960"/>
+          </a:xfrm>
+          <a:prstGeom prst="rect">
+            <a:avLst/>
+          </a:prstGeom>
+          <a:noFill/>
+          <a:ln w="0">
+            <a:noFill/>
+          </a:ln>
+        </p:spPr>
+        <p:txBody>
+          <a:bodyPr lIns="0" tIns="0" rIns="0" bIns="0" anchor="t">
+            <a:normAutofit/>
+          </a:bodyPr>
+          <a:lstStyle>
+            <a:lvl1pPr algn="l">
+              <a:spcBef>
+                <a:spcPts val="1417"/>
+              </a:spcBef>
+              <a:buClr>
+                <a:srgbClr val="000000"/>
+              </a:buClr>
+              <a:buSzPct val="45000"/>
+              <a:buFont typeface="Wingdings" charset="2"/>
+              <a:buChar char=""/>
+              <a:defRPr lang="en-US" sz="3200" b="0" u="none" strike="noStrike">
+                <a:solidFill>
+                  <a:srgbClr val="000000"/>
+                </a:solidFill>
+                <a:effectLst/>
+                <a:uFillTx/>
+                <a:latin typeface="Arial"/>
+              </a:defRPr>
+            </a:lvl1pPr>
+            <a:lvl2pPr lvl="1" algn="l">
+              <a:spcBef>
+                <a:spcPts val="1134"/>
+              </a:spcBef>
+              <a:buClr>
+                <a:srgbClr val="000000"/>
+              </a:buClr>
+              <a:buSzPct val="75000"/>
+              <a:buFont typeface="Symbol" charset="2"/>
+              <a:buChar char=""/>
+              <a:defRPr lang="en-US" sz="2800" b="0" u="none" strike="noStrike">
+                <a:solidFill>
+                  <a:srgbClr val="000000"/>
+                </a:solidFill>
+                <a:effectLst/>
+                <a:uFillTx/>
+                <a:latin typeface="Arial"/>
+              </a:defRPr>
+            </a:lvl2pPr>
+            <a:lvl3pPr lvl="2" algn="l">
+              <a:spcBef>
+                <a:spcPts val="850"/>
+              </a:spcBef>
+              <a:buClr>
+                <a:srgbClr val="000000"/>
+              </a:buClr>
+              <a:buSzPct val="45000"/>
+              <a:buFont typeface="Wingdings" charset="2"/>
+              <a:buChar char=""/>
+              <a:defRPr lang="en-US" sz="2400" b="0" u="none" strike="noStrike">
+                <a:solidFill>
+                  <a:srgbClr val="000000"/>
+                </a:solidFill>
+                <a:effectLst/>
+                <a:uFillTx/>
+                <a:latin typeface="Arial"/>
+              </a:defRPr>
+            </a:lvl3pPr>
+            <a:lvl4pPr lvl="3" algn="l">
+              <a:spcBef>
+                <a:spcPts val="567"/>
+              </a:spcBef>
+              <a:buClr>
+                <a:srgbClr val="000000"/>
+              </a:buClr>
+              <a:buSzPct val="75000"/>
+              <a:buFont typeface="Symbol" charset="2"/>
+              <a:buChar char=""/>
+              <a:defRPr lang="en-US" sz="2000" b="0" u="none" strike="noStrike">
+                <a:solidFill>
+                  <a:srgbClr val="000000"/>
+                </a:solidFill>
+                <a:effectLst/>
+                <a:uFillTx/>
+                <a:latin typeface="Arial"/>
+              </a:defRPr>
+            </a:lvl4pPr>
+            <a:lvl5pPr lvl="4" algn="l">
+              <a:spcBef>
+                <a:spcPts val="283"/>
+              </a:spcBef>
+              <a:buClr>
+                <a:srgbClr val="000000"/>
+              </a:buClr>
+              <a:buSzPct val="45000"/>
+              <a:buFont typeface="Wingdings" charset="2"/>
+              <a:buChar char=""/>
+              <a:defRPr lang="en-US" sz="2000" b="0" u="none" strike="noStrike">
+                <a:solidFill>
+                  <a:srgbClr val="000000"/>
+                </a:solidFill>
+                <a:effectLst/>
+                <a:uFillTx/>
+                <a:latin typeface="Arial"/>
+              </a:defRPr>
+            </a:lvl5pPr>
+            <a:lvl6pPr lvl="5" algn="l">
+              <a:spcBef>
+                <a:spcPts val="283"/>
+              </a:spcBef>
+              <a:buClr>
+                <a:srgbClr val="000000"/>
+              </a:buClr>
+              <a:buSzPct val="45000"/>
+              <a:buFont typeface="Wingdings" charset="2"/>
+              <a:buChar char=""/>
+              <a:defRPr lang="en-US" sz="2000" b="0" u="none" strike="noStrike">
+                <a:solidFill>
+                  <a:srgbClr val="000000"/>
+                </a:solidFill>
+                <a:effectLst/>
+                <a:uFillTx/>
+                <a:latin typeface="Arial"/>
+              </a:defRPr>
+            </a:lvl6pPr>
+            <a:lvl7pPr lvl="6" algn="l">
+              <a:spcBef>
+                <a:spcPts val="283"/>
+              </a:spcBef>
+              <a:buClr>
+                <a:srgbClr val="000000"/>
+              </a:buClr>
+              <a:buSzPct val="45000"/>
+              <a:buFont typeface="Wingdings" charset="2"/>
+              <a:buChar char=""/>
+              <a:defRPr lang="en-US" sz="2000" b="0" u="none" strike="noStrike">
+                <a:solidFill>
+                  <a:srgbClr val="000000"/>
+                </a:solidFill>
+                <a:effectLst/>
+                <a:uFillTx/>
+                <a:latin typeface="Arial"/>
+              </a:defRPr>
+            </a:lvl7pPr>
+          </a:lstStyle>
+          <a:p>
+            <a:pPr marL="432000" indent="-324000" algn="l">
+              <a:spcBef>
+                <a:spcPts val="1417"/>
+              </a:spcBef>
+              <a:buClr>
+                <a:srgbClr val="000000"/>
+              </a:buClr>
+              <a:buSzPct val="45000"/>
+              <a:buFont typeface="Wingdings" charset="2"/>
+              <a:buChar char=""/>
+            </a:pPr>
+            <a:r>
+              <a:rPr lang="en-US" sz="3200" b="0" u="none" strike="noStrike">
+                <a:solidFill>
+                  <a:srgbClr val="000000"/>
+                </a:solidFill>
+                <a:effectLst/>
+                <a:uFillTx/>
+                <a:latin typeface="Arial"/>
+              </a:rPr>
+              <a:t>Click to edit the outline text format</a:t>
+            </a:r>
+            <a:endParaRPr lang="en-US" sz="3200" b="0" u="none" strike="noStrike">
+              <a:solidFill>
+                <a:srgbClr val="000000"/>
+              </a:solidFill>
+              <a:effectLst/>
+              <a:uFillTx/>
+              <a:latin typeface="Arial"/>
+            </a:endParaRPr>
+          </a:p>
+          <a:p>
+            <a:pPr marL="864000" lvl="1" indent="-324000" algn="l">
+              <a:spcBef>
+                <a:spcPts val="1134"/>
+              </a:spcBef>
+              <a:buClr>
+                <a:srgbClr val="000000"/>
+              </a:buClr>
+              <a:buSzPct val="75000"/>
+              <a:buFont typeface="Symbol" charset="2"/>
+              <a:buChar char=""/>
+            </a:pPr>
+            <a:r>
+              <a:rPr lang="en-US" sz="2800" b="0" u="none" strike="noStrike">
+                <a:solidFill>
+                  <a:srgbClr val="000000"/>
+                </a:solidFill>
+                <a:effectLst/>
+                <a:uFillTx/>
+                <a:latin typeface="Arial"/>
+              </a:rPr>
+              <a:t>Second Outline Level</a:t>
+            </a:r>
+            <a:endParaRPr lang="en-US" sz="2800" b="0" u="none" strike="noStrike">
+              <a:solidFill>
+                <a:srgbClr val="000000"/>
+              </a:solidFill>
+              <a:effectLst/>
+              <a:uFillTx/>
+              <a:latin typeface="Arial"/>
+            </a:endParaRPr>
+          </a:p>
+          <a:p>
+            <a:pPr marL="1296000" lvl="2" indent="-288000" algn="l">
+              <a:spcBef>
+                <a:spcPts val="850"/>
+              </a:spcBef>
+              <a:buClr>
+                <a:srgbClr val="000000"/>
+              </a:buClr>
+              <a:buSzPct val="45000"/>
+              <a:buFont typeface="Wingdings" charset="2"/>
+              <a:buChar char=""/>
+            </a:pPr>
+            <a:r>
+              <a:rPr lang="en-US" sz="2400" b="0" u="none" strike="noStrike">
+                <a:solidFill>
+                  <a:srgbClr val="000000"/>
+                </a:solidFill>
+                <a:effectLst/>
+                <a:uFillTx/>
+                <a:latin typeface="Arial"/>
+              </a:rPr>
+              <a:t>Third Outline Level</a:t>
+            </a:r>
+            <a:endParaRPr lang="en-US" sz="2400" b="0" u="none" strike="noStrike">
+              <a:solidFill>
+                <a:srgbClr val="000000"/>
+              </a:solidFill>
+              <a:effectLst/>
+              <a:uFillTx/>
+              <a:latin typeface="Arial"/>
+            </a:endParaRPr>
+          </a:p>
+          <a:p>
+            <a:pPr marL="1728000" lvl="3" indent="-216000" algn="l">
+              <a:spcBef>
+                <a:spcPts val="567"/>
+              </a:spcBef>
+              <a:buClr>
+                <a:srgbClr val="000000"/>
+              </a:buClr>
+              <a:buSzPct val="75000"/>
+              <a:buFont typeface="Symbol" charset="2"/>
+              <a:buChar char=""/>
+            </a:pPr>
+            <a:r>
+              <a:rPr lang="en-US" sz="2000" b="0" u="none" strike="noStrike">
+                <a:solidFill>
+                  <a:srgbClr val="000000"/>
+                </a:solidFill>
+                <a:effectLst/>
+                <a:uFillTx/>
+                <a:latin typeface="Arial"/>
+              </a:rPr>
+              <a:t>Fourth Outline Level</a:t>
+            </a:r>
+            <a:endParaRPr lang="en-US" sz="2000" b="0" u="none" strike="noStrike">
+              <a:solidFill>
+                <a:srgbClr val="000000"/>
+              </a:solidFill>
+              <a:effectLst/>
+              <a:uFillTx/>
+              <a:latin typeface="Arial"/>
+            </a:endParaRPr>
+          </a:p>
+          <a:p>
+            <a:pPr marL="2160000" lvl="4" indent="-216000" algn="l">
+              <a:spcBef>
+                <a:spcPts val="283"/>
+              </a:spcBef>
+              <a:buClr>
+                <a:srgbClr val="000000"/>
+              </a:buClr>
+              <a:buSzPct val="45000"/>
+              <a:buFont typeface="Wingdings" charset="2"/>
+              <a:buChar char=""/>
+            </a:pPr>
+            <a:r>
+              <a:rPr lang="en-US" sz="2000" b="0" u="none" strike="noStrike">
+                <a:solidFill>
+                  <a:srgbClr val="000000"/>
+                </a:solidFill>
+                <a:effectLst/>
+                <a:uFillTx/>
+                <a:latin typeface="Arial"/>
+              </a:rPr>
+              <a:t>Fifth Outline Level</a:t>
+            </a:r>
+            <a:endParaRPr lang="en-US" sz="2000" b="0" u="none" strike="noStrike">
+              <a:solidFill>
+                <a:srgbClr val="000000"/>
+              </a:solidFill>
+              <a:effectLst/>
+              <a:uFillTx/>
+              <a:latin typeface="Arial"/>
+            </a:endParaRPr>
+          </a:p>
+          <a:p>
+            <a:pPr marL="2592000" lvl="5" indent="-216000" algn="l">
+              <a:spcBef>
+                <a:spcPts val="283"/>
+              </a:spcBef>
+              <a:buClr>
+                <a:srgbClr val="000000"/>
+              </a:buClr>
+              <a:buSzPct val="45000"/>
+              <a:buFont typeface="Wingdings" charset="2"/>
+              <a:buChar char=""/>
+            </a:pPr>
+            <a:r>
+              <a:rPr lang="en-US" sz="2000" b="0" u="none" strike="noStrike">
+                <a:solidFill>
+                  <a:srgbClr val="000000"/>
+                </a:solidFill>
+                <a:effectLst/>
+                <a:uFillTx/>
+                <a:latin typeface="Arial"/>
+              </a:rPr>
+              <a:t>Sixth Outline Level</a:t>
+            </a:r>
+            <a:endParaRPr lang="en-US" sz="2000" b="0" u="none" strike="noStrike">
+              <a:solidFill>
+                <a:srgbClr val="000000"/>
+              </a:solidFill>
+              <a:effectLst/>
+              <a:uFillTx/>
+              <a:latin typeface="Arial"/>
+            </a:endParaRPr>
+          </a:p>
+          <a:p>
+            <a:pPr marL="3024000" lvl="6" indent="-216000" algn="l">
+              <a:spcBef>
+                <a:spcPts val="283"/>
+              </a:spcBef>
+              <a:buClr>
+                <a:srgbClr val="000000"/>
+              </a:buClr>
+              <a:buSzPct val="45000"/>
+              <a:buFont typeface="Wingdings" charset="2"/>
+              <a:buChar char=""/>
+            </a:pPr>
+            <a:r>
+              <a:rPr lang="en-US" sz="2000" b="0" u="none" strike="noStrike">
+                <a:solidFill>
+                  <a:srgbClr val="000000"/>
+                </a:solidFill>
+                <a:effectLst/>
+                <a:uFillTx/>
+                <a:latin typeface="Arial"/>
+              </a:rPr>
+              <a:t>Seventh Outline Level</a:t>
+            </a:r>
+            <a:endParaRPr lang="en-US" sz="2000" b="0" u="none" strike="noStrike">
+              <a:solidFill>
+                <a:srgbClr val="000000"/>
+              </a:solidFill>
+              <a:effectLst/>
+              <a:uFillTx/>
+              <a:latin typeface="Arial"/>
             </a:endParaRPr>
           </a:p>
         </p:txBody>
@@ -1939,8 +2678,8 @@
 </file>
 
 <file path=ppt/slideLayouts/slideLayout2.xml><?xml version="1.0" encoding="utf-8"?>
-<p:sldLayout xmlns:a="http://schemas.openxmlformats.org/drawingml/2006/main" xmlns:p="http://schemas.openxmlformats.org/presentationml/2006/main" xmlns:r="http://schemas.openxmlformats.org/officeDocument/2006/relationships" xmlns:p14="http://schemas.microsoft.com/office/powerpoint/2010/main" xmlns:p15="http://schemas.microsoft.com/office/powerpoint/2012/main" xmlns:mc="http://schemas.openxmlformats.org/markup-compatibility/2006" type="vertTx" preserve="1">
-  <p:cSld name="Title and Vertical Text">
+<p:sldLayout xmlns:a="http://schemas.openxmlformats.org/drawingml/2006/main" xmlns:p="http://schemas.openxmlformats.org/presentationml/2006/main" xmlns:r="http://schemas.openxmlformats.org/officeDocument/2006/relationships" xmlns:p14="http://schemas.microsoft.com/office/powerpoint/2010/main" xmlns:p15="http://schemas.microsoft.com/office/powerpoint/2012/main" xmlns:mc="http://schemas.openxmlformats.org/markup-compatibility/2006" type="blank" preserve="1">
+  <p:cSld name="Content with Caption">
     <p:bg>
       <p:bgPr>
         <a:solidFill>
@@ -1974,8 +2713,2019 @@
         </p:nvSpPr>
         <p:spPr>
           <a:xfrm>
+            <a:off x="630000" y="343080"/>
+            <a:ext cx="2948400" cy="1199520"/>
+          </a:xfrm>
+          <a:prstGeom prst="rect">
+            <a:avLst/>
+          </a:prstGeom>
+          <a:noFill/>
+          <a:ln w="0">
+            <a:noFill/>
+          </a:ln>
+        </p:spPr>
+        <p:txBody>
+          <a:bodyPr lIns="91440" tIns="45720" rIns="91440" bIns="45720" anchor="b">
+            <a:noAutofit/>
+          </a:bodyPr>
+          <a:lstStyle>
+            <a:lvl1pPr indent="0" algn="l" defTabSz="685800">
+              <a:lnSpc>
+                <a:spcPct val="90000"/>
+              </a:lnSpc>
+              <a:buNone/>
+              <a:tabLst>
+                <a:tab pos="0" algn="l"/>
+              </a:tabLst>
+              <a:defRPr lang="en-US" sz="2400" b="0" u="none" strike="noStrike">
+                <a:solidFill>
+                  <a:schemeClr val="dk1"/>
+                </a:solidFill>
+                <a:effectLst/>
+                <a:uFillTx/>
+                <a:latin typeface="Calibri Light"/>
+              </a:defRPr>
+            </a:lvl1pPr>
+          </a:lstStyle>
+          <a:p>
+            <a:pPr indent="0" algn="l" defTabSz="685800">
+              <a:lnSpc>
+                <a:spcPct val="90000"/>
+              </a:lnSpc>
+              <a:buNone/>
+              <a:tabLst>
+                <a:tab pos="0" algn="l"/>
+              </a:tabLst>
+            </a:pPr>
+            <a:r>
+              <a:rPr lang="en-US" sz="2400" b="0" u="none" strike="noStrike">
+                <a:solidFill>
+                  <a:schemeClr val="dk1"/>
+                </a:solidFill>
+                <a:effectLst/>
+                <a:uFillTx/>
+                <a:latin typeface="Calibri Light"/>
+              </a:rPr>
+              <a:t>Click to edit Master title style</a:t>
+            </a:r>
+            <a:endParaRPr lang="en-US" sz="2400" b="0" u="none" strike="noStrike">
+              <a:solidFill>
+                <a:schemeClr val="dk1"/>
+              </a:solidFill>
+              <a:effectLst/>
+              <a:uFillTx/>
+              <a:latin typeface="Calibri Light"/>
+            </a:endParaRPr>
+          </a:p>
+        </p:txBody>
+      </p:sp>
+      <p:sp>
+        <p:nvSpPr>
+          <p:cNvPr id="8" name="PlaceHolder 2"/>
+          <p:cNvSpPr>
+            <a:spLocks noGrp="1"/>
+          </p:cNvSpPr>
+          <p:nvPr>
+            <p:ph type="body"/>
+          </p:nvPr>
+        </p:nvSpPr>
+        <p:spPr>
+          <a:xfrm>
+            <a:off x="3887280" y="740520"/>
+            <a:ext cx="4628520" cy="3654360"/>
+          </a:xfrm>
+          <a:prstGeom prst="rect">
+            <a:avLst/>
+          </a:prstGeom>
+          <a:noFill/>
+          <a:ln w="0">
+            <a:noFill/>
+          </a:ln>
+        </p:spPr>
+        <p:txBody>
+          <a:bodyPr lIns="91440" tIns="45720" rIns="91440" bIns="45720" anchor="t">
+            <a:noAutofit/>
+          </a:bodyPr>
+          <a:lstStyle>
+            <a:lvl1pPr algn="l" defTabSz="685800">
+              <a:lnSpc>
+                <a:spcPct val="90000"/>
+              </a:lnSpc>
+              <a:spcBef>
+                <a:spcPts val="751"/>
+              </a:spcBef>
+              <a:buClr>
+                <a:srgbClr val="000000"/>
+              </a:buClr>
+              <a:buFont typeface="Arial"/>
+              <a:buChar char="•"/>
+              <a:defRPr lang="en-US" sz="2400" b="0" u="none" strike="noStrike">
+                <a:solidFill>
+                  <a:schemeClr val="dk1"/>
+                </a:solidFill>
+                <a:effectLst/>
+                <a:uFillTx/>
+                <a:latin typeface="Calibri"/>
+              </a:defRPr>
+            </a:lvl1pPr>
+            <a:lvl2pPr lvl="1" algn="l" defTabSz="685800">
+              <a:lnSpc>
+                <a:spcPct val="90000"/>
+              </a:lnSpc>
+              <a:spcBef>
+                <a:spcPts val="374"/>
+              </a:spcBef>
+              <a:buClr>
+                <a:srgbClr val="000000"/>
+              </a:buClr>
+              <a:buFont typeface="Arial"/>
+              <a:buChar char="•"/>
+              <a:defRPr lang="en-US" sz="2100" b="0" u="none" strike="noStrike">
+                <a:solidFill>
+                  <a:schemeClr val="dk1"/>
+                </a:solidFill>
+                <a:effectLst/>
+                <a:uFillTx/>
+                <a:latin typeface="Calibri"/>
+              </a:defRPr>
+            </a:lvl2pPr>
+            <a:lvl3pPr lvl="2" algn="l" defTabSz="685800">
+              <a:lnSpc>
+                <a:spcPct val="90000"/>
+              </a:lnSpc>
+              <a:spcBef>
+                <a:spcPts val="374"/>
+              </a:spcBef>
+              <a:buClr>
+                <a:srgbClr val="000000"/>
+              </a:buClr>
+              <a:buFont typeface="Arial"/>
+              <a:buChar char="•"/>
+              <a:defRPr lang="en-US" sz="1800" b="0" u="none" strike="noStrike">
+                <a:solidFill>
+                  <a:schemeClr val="dk1"/>
+                </a:solidFill>
+                <a:effectLst/>
+                <a:uFillTx/>
+                <a:latin typeface="Calibri"/>
+              </a:defRPr>
+            </a:lvl3pPr>
+            <a:lvl4pPr lvl="3" algn="l" defTabSz="685800">
+              <a:lnSpc>
+                <a:spcPct val="90000"/>
+              </a:lnSpc>
+              <a:spcBef>
+                <a:spcPts val="374"/>
+              </a:spcBef>
+              <a:buClr>
+                <a:srgbClr val="000000"/>
+              </a:buClr>
+              <a:buFont typeface="Arial"/>
+              <a:buChar char="•"/>
+              <a:defRPr lang="en-US" sz="1500" b="0" u="none" strike="noStrike">
+                <a:solidFill>
+                  <a:schemeClr val="dk1"/>
+                </a:solidFill>
+                <a:effectLst/>
+                <a:uFillTx/>
+                <a:latin typeface="Calibri"/>
+              </a:defRPr>
+            </a:lvl4pPr>
+            <a:lvl5pPr lvl="4" algn="l" defTabSz="685800">
+              <a:lnSpc>
+                <a:spcPct val="90000"/>
+              </a:lnSpc>
+              <a:spcBef>
+                <a:spcPts val="374"/>
+              </a:spcBef>
+              <a:buClr>
+                <a:srgbClr val="000000"/>
+              </a:buClr>
+              <a:buFont typeface="Arial"/>
+              <a:buChar char="•"/>
+              <a:defRPr lang="en-US" sz="1500" b="0" u="none" strike="noStrike">
+                <a:solidFill>
+                  <a:schemeClr val="dk1"/>
+                </a:solidFill>
+                <a:effectLst/>
+                <a:uFillTx/>
+                <a:latin typeface="Calibri"/>
+              </a:defRPr>
+            </a:lvl5pPr>
+          </a:lstStyle>
+          <a:p>
+            <a:pPr marL="171360" indent="-171360" algn="l" defTabSz="685800">
+              <a:lnSpc>
+                <a:spcPct val="90000"/>
+              </a:lnSpc>
+              <a:spcBef>
+                <a:spcPts val="751"/>
+              </a:spcBef>
+              <a:buClr>
+                <a:srgbClr val="000000"/>
+              </a:buClr>
+              <a:buFont typeface="Arial"/>
+              <a:buChar char="•"/>
+            </a:pPr>
+            <a:r>
+              <a:rPr lang="en-US" sz="2400" b="0" u="none" strike="noStrike">
+                <a:solidFill>
+                  <a:schemeClr val="dk1"/>
+                </a:solidFill>
+                <a:effectLst/>
+                <a:uFillTx/>
+                <a:latin typeface="Calibri"/>
+              </a:rPr>
+              <a:t>Edit Master text styles</a:t>
+            </a:r>
+            <a:endParaRPr lang="en-US" sz="2400" b="0" u="none" strike="noStrike">
+              <a:solidFill>
+                <a:schemeClr val="dk1"/>
+              </a:solidFill>
+              <a:effectLst/>
+              <a:uFillTx/>
+              <a:latin typeface="Calibri"/>
+            </a:endParaRPr>
+          </a:p>
+          <a:p>
+            <a:pPr marL="514440" lvl="1" indent="-171360" algn="l" defTabSz="685800">
+              <a:lnSpc>
+                <a:spcPct val="90000"/>
+              </a:lnSpc>
+              <a:spcBef>
+                <a:spcPts val="374"/>
+              </a:spcBef>
+              <a:buClr>
+                <a:srgbClr val="000000"/>
+              </a:buClr>
+              <a:buFont typeface="Arial"/>
+              <a:buChar char="•"/>
+            </a:pPr>
+            <a:r>
+              <a:rPr lang="en-US" sz="2100" b="0" u="none" strike="noStrike">
+                <a:solidFill>
+                  <a:schemeClr val="dk1"/>
+                </a:solidFill>
+                <a:effectLst/>
+                <a:uFillTx/>
+                <a:latin typeface="Calibri"/>
+              </a:rPr>
+              <a:t>Second level</a:t>
+            </a:r>
+            <a:endParaRPr lang="en-US" sz="2100" b="0" u="none" strike="noStrike">
+              <a:solidFill>
+                <a:schemeClr val="dk1"/>
+              </a:solidFill>
+              <a:effectLst/>
+              <a:uFillTx/>
+              <a:latin typeface="Calibri"/>
+            </a:endParaRPr>
+          </a:p>
+          <a:p>
+            <a:pPr marL="857160" lvl="2" indent="-171360" algn="l" defTabSz="685800">
+              <a:lnSpc>
+                <a:spcPct val="90000"/>
+              </a:lnSpc>
+              <a:spcBef>
+                <a:spcPts val="374"/>
+              </a:spcBef>
+              <a:buClr>
+                <a:srgbClr val="000000"/>
+              </a:buClr>
+              <a:buFont typeface="Arial"/>
+              <a:buChar char="•"/>
+            </a:pPr>
+            <a:r>
+              <a:rPr lang="en-US" sz="1800" b="0" u="none" strike="noStrike">
+                <a:solidFill>
+                  <a:schemeClr val="dk1"/>
+                </a:solidFill>
+                <a:effectLst/>
+                <a:uFillTx/>
+                <a:latin typeface="Calibri"/>
+              </a:rPr>
+              <a:t>Third level</a:t>
+            </a:r>
+            <a:endParaRPr lang="en-US" sz="1800" b="0" u="none" strike="noStrike">
+              <a:solidFill>
+                <a:schemeClr val="dk1"/>
+              </a:solidFill>
+              <a:effectLst/>
+              <a:uFillTx/>
+              <a:latin typeface="Calibri"/>
+            </a:endParaRPr>
+          </a:p>
+          <a:p>
+            <a:pPr marL="1200240" lvl="3" indent="-171360" algn="l" defTabSz="685800">
+              <a:lnSpc>
+                <a:spcPct val="90000"/>
+              </a:lnSpc>
+              <a:spcBef>
+                <a:spcPts val="374"/>
+              </a:spcBef>
+              <a:buClr>
+                <a:srgbClr val="000000"/>
+              </a:buClr>
+              <a:buFont typeface="Arial"/>
+              <a:buChar char="•"/>
+            </a:pPr>
+            <a:r>
+              <a:rPr lang="en-US" sz="1500" b="0" u="none" strike="noStrike">
+                <a:solidFill>
+                  <a:schemeClr val="dk1"/>
+                </a:solidFill>
+                <a:effectLst/>
+                <a:uFillTx/>
+                <a:latin typeface="Calibri"/>
+              </a:rPr>
+              <a:t>Fourth level</a:t>
+            </a:r>
+            <a:endParaRPr lang="en-US" sz="1500" b="0" u="none" strike="noStrike">
+              <a:solidFill>
+                <a:schemeClr val="dk1"/>
+              </a:solidFill>
+              <a:effectLst/>
+              <a:uFillTx/>
+              <a:latin typeface="Calibri"/>
+            </a:endParaRPr>
+          </a:p>
+          <a:p>
+            <a:pPr marL="1542960" lvl="4" indent="-171360" algn="l" defTabSz="685800">
+              <a:lnSpc>
+                <a:spcPct val="90000"/>
+              </a:lnSpc>
+              <a:spcBef>
+                <a:spcPts val="374"/>
+              </a:spcBef>
+              <a:buClr>
+                <a:srgbClr val="000000"/>
+              </a:buClr>
+              <a:buFont typeface="Arial"/>
+              <a:buChar char="•"/>
+            </a:pPr>
+            <a:r>
+              <a:rPr lang="en-US" sz="1500" b="0" u="none" strike="noStrike">
+                <a:solidFill>
+                  <a:schemeClr val="dk1"/>
+                </a:solidFill>
+                <a:effectLst/>
+                <a:uFillTx/>
+                <a:latin typeface="Calibri"/>
+              </a:rPr>
+              <a:t>Fifth level</a:t>
+            </a:r>
+            <a:endParaRPr lang="en-US" sz="1500" b="0" u="none" strike="noStrike">
+              <a:solidFill>
+                <a:schemeClr val="dk1"/>
+              </a:solidFill>
+              <a:effectLst/>
+              <a:uFillTx/>
+              <a:latin typeface="Calibri"/>
+            </a:endParaRPr>
+          </a:p>
+        </p:txBody>
+      </p:sp>
+      <p:sp>
+        <p:nvSpPr>
+          <p:cNvPr id="9" name="PlaceHolder 3"/>
+          <p:cNvSpPr>
+            <a:spLocks noGrp="1"/>
+          </p:cNvSpPr>
+          <p:nvPr>
+            <p:ph type="body"/>
+          </p:nvPr>
+        </p:nvSpPr>
+        <p:spPr>
+          <a:xfrm>
+            <a:off x="630000" y="1542960"/>
+            <a:ext cx="2948400" cy="2858040"/>
+          </a:xfrm>
+          <a:prstGeom prst="rect">
+            <a:avLst/>
+          </a:prstGeom>
+          <a:noFill/>
+          <a:ln w="0">
+            <a:noFill/>
+          </a:ln>
+        </p:spPr>
+        <p:txBody>
+          <a:bodyPr lIns="91440" tIns="45720" rIns="91440" bIns="45720" anchor="t">
+            <a:noAutofit/>
+          </a:bodyPr>
+          <a:lstStyle>
+            <a:lvl1pPr indent="0" algn="l" defTabSz="685800">
+              <a:lnSpc>
+                <a:spcPct val="90000"/>
+              </a:lnSpc>
+              <a:spcBef>
+                <a:spcPts val="751"/>
+              </a:spcBef>
+              <a:buNone/>
+              <a:tabLst>
+                <a:tab pos="0" algn="l"/>
+              </a:tabLst>
+              <a:defRPr lang="en-US" sz="1200" b="0" u="none" strike="noStrike">
+                <a:solidFill>
+                  <a:schemeClr val="dk1"/>
+                </a:solidFill>
+                <a:effectLst/>
+                <a:uFillTx/>
+                <a:latin typeface="Calibri"/>
+              </a:defRPr>
+            </a:lvl1pPr>
+          </a:lstStyle>
+          <a:p>
+            <a:pPr indent="0" algn="l" defTabSz="685800">
+              <a:lnSpc>
+                <a:spcPct val="90000"/>
+              </a:lnSpc>
+              <a:spcBef>
+                <a:spcPts val="751"/>
+              </a:spcBef>
+              <a:buNone/>
+              <a:tabLst>
+                <a:tab pos="0" algn="l"/>
+              </a:tabLst>
+            </a:pPr>
+            <a:r>
+              <a:rPr lang="en-US" sz="1200" b="0" u="none" strike="noStrike">
+                <a:solidFill>
+                  <a:schemeClr val="dk1"/>
+                </a:solidFill>
+                <a:effectLst/>
+                <a:uFillTx/>
+                <a:latin typeface="Calibri"/>
+              </a:rPr>
+              <a:t>Edit Master text styles</a:t>
+            </a:r>
+            <a:endParaRPr lang="en-US" sz="1200" b="0" u="none" strike="noStrike">
+              <a:solidFill>
+                <a:schemeClr val="dk1"/>
+              </a:solidFill>
+              <a:effectLst/>
+              <a:uFillTx/>
+              <a:latin typeface="Calibri"/>
+            </a:endParaRPr>
+          </a:p>
+        </p:txBody>
+      </p:sp>
+      <p:sp>
+        <p:nvSpPr>
+          <p:cNvPr id="10" name="PlaceHolder 4"/>
+          <p:cNvSpPr>
+            <a:spLocks noGrp="1"/>
+          </p:cNvSpPr>
+          <p:nvPr>
+            <p:ph type="dt" idx="4"/>
+          </p:nvPr>
+        </p:nvSpPr>
+        <p:spPr>
+          <a:xfrm>
+            <a:off x="628560" y="4767120"/>
+            <a:ext cx="2056680" cy="273240"/>
+          </a:xfrm>
+          <a:prstGeom prst="rect">
+            <a:avLst/>
+          </a:prstGeom>
+          <a:noFill/>
+          <a:ln w="0">
+            <a:noFill/>
+          </a:ln>
+        </p:spPr>
+        <p:txBody>
+          <a:bodyPr lIns="91440" tIns="45720" rIns="91440" bIns="45720" anchor="ctr">
+            <a:noAutofit/>
+          </a:bodyPr>
+          <a:lstStyle>
+            <a:lvl1pPr indent="0" algn="l" defTabSz="457200">
+              <a:lnSpc>
+                <a:spcPct val="100000"/>
+              </a:lnSpc>
+              <a:buNone/>
+              <a:tabLst>
+                <a:tab pos="0" algn="l"/>
+              </a:tabLst>
+              <a:defRPr lang="en-IN" sz="900" b="0" u="none" strike="noStrike">
+                <a:solidFill>
+                  <a:schemeClr val="dk1">
+                    <a:tint val="75000"/>
+                  </a:schemeClr>
+                </a:solidFill>
+                <a:effectLst/>
+                <a:uFillTx/>
+                <a:latin typeface="Calibri"/>
+              </a:defRPr>
+            </a:lvl1pPr>
+          </a:lstStyle>
+          <a:p>
+            <a:pPr indent="0" algn="l" defTabSz="457200">
+              <a:lnSpc>
+                <a:spcPct val="100000"/>
+              </a:lnSpc>
+              <a:buNone/>
+              <a:tabLst>
+                <a:tab pos="0" algn="l"/>
+              </a:tabLst>
+            </a:pPr>
+            <a:r>
+              <a:rPr lang="en-IN" sz="900" b="0" u="none" strike="noStrike">
+                <a:solidFill>
+                  <a:schemeClr val="dk1">
+                    <a:tint val="75000"/>
+                  </a:schemeClr>
+                </a:solidFill>
+                <a:effectLst/>
+                <a:uFillTx/>
+                <a:latin typeface="Calibri"/>
+              </a:rPr>
+              <a:t>&lt;date/time&gt;</a:t>
+            </a:r>
+            <a:endParaRPr lang="en-US" sz="900" b="0" u="none" strike="noStrike">
+              <a:solidFill>
+                <a:srgbClr val="000000"/>
+              </a:solidFill>
+              <a:effectLst/>
+              <a:uFillTx/>
+              <a:latin typeface="Times New Roman"/>
+            </a:endParaRPr>
+          </a:p>
+        </p:txBody>
+      </p:sp>
+      <p:sp>
+        <p:nvSpPr>
+          <p:cNvPr id="11" name="PlaceHolder 5"/>
+          <p:cNvSpPr>
+            <a:spLocks noGrp="1"/>
+          </p:cNvSpPr>
+          <p:nvPr>
+            <p:ph type="ftr" idx="5"/>
+          </p:nvPr>
+        </p:nvSpPr>
+        <p:spPr>
+          <a:xfrm>
+            <a:off x="3029040" y="4767120"/>
+            <a:ext cx="3085560" cy="273240"/>
+          </a:xfrm>
+          <a:prstGeom prst="rect">
+            <a:avLst/>
+          </a:prstGeom>
+          <a:noFill/>
+          <a:ln w="0">
+            <a:noFill/>
+          </a:ln>
+        </p:spPr>
+        <p:txBody>
+          <a:bodyPr lIns="91440" tIns="45720" rIns="91440" bIns="45720" anchor="ctr">
+            <a:noAutofit/>
+          </a:bodyPr>
+          <a:lstStyle>
+            <a:lvl1pPr indent="0" algn="ctr">
+              <a:lnSpc>
+                <a:spcPct val="100000"/>
+              </a:lnSpc>
+              <a:buNone/>
+              <a:tabLst>
+                <a:tab pos="0" algn="l"/>
+              </a:tabLst>
+              <a:defRPr lang="en-US" sz="1400" b="0" u="none" strike="noStrike">
+                <a:solidFill>
+                  <a:srgbClr val="000000"/>
+                </a:solidFill>
+                <a:effectLst/>
+                <a:uFillTx/>
+                <a:latin typeface="Times New Roman"/>
+              </a:defRPr>
+            </a:lvl1pPr>
+          </a:lstStyle>
+          <a:p>
+            <a:pPr indent="0" algn="ctr">
+              <a:lnSpc>
+                <a:spcPct val="100000"/>
+              </a:lnSpc>
+              <a:buNone/>
+              <a:tabLst>
+                <a:tab pos="0" algn="l"/>
+              </a:tabLst>
+            </a:pPr>
+            <a:r>
+              <a:rPr lang="en-US" sz="1400" b="0" u="none" strike="noStrike">
+                <a:solidFill>
+                  <a:srgbClr val="000000"/>
+                </a:solidFill>
+                <a:effectLst/>
+                <a:uFillTx/>
+                <a:latin typeface="Times New Roman"/>
+              </a:rPr>
+              <a:t>&lt;footer&gt;</a:t>
+            </a:r>
+            <a:endParaRPr lang="en-US" sz="1400" b="0" u="none" strike="noStrike">
+              <a:solidFill>
+                <a:srgbClr val="000000"/>
+              </a:solidFill>
+              <a:effectLst/>
+              <a:uFillTx/>
+              <a:latin typeface="Times New Roman"/>
+            </a:endParaRPr>
+          </a:p>
+        </p:txBody>
+      </p:sp>
+      <p:sp>
+        <p:nvSpPr>
+          <p:cNvPr id="12" name="PlaceHolder 6"/>
+          <p:cNvSpPr>
+            <a:spLocks noGrp="1"/>
+          </p:cNvSpPr>
+          <p:nvPr>
+            <p:ph type="sldNum" idx="6"/>
+          </p:nvPr>
+        </p:nvSpPr>
+        <p:spPr>
+          <a:xfrm>
+            <a:off x="6458040" y="4767120"/>
+            <a:ext cx="2056680" cy="273240"/>
+          </a:xfrm>
+          <a:prstGeom prst="rect">
+            <a:avLst/>
+          </a:prstGeom>
+          <a:noFill/>
+          <a:ln w="0">
+            <a:noFill/>
+          </a:ln>
+        </p:spPr>
+        <p:txBody>
+          <a:bodyPr lIns="91440" tIns="45720" rIns="91440" bIns="45720" anchor="ctr">
+            <a:noAutofit/>
+          </a:bodyPr>
+          <a:lstStyle>
+            <a:lvl1pPr indent="0" algn="r" defTabSz="457200">
+              <a:lnSpc>
+                <a:spcPct val="100000"/>
+              </a:lnSpc>
+              <a:buNone/>
+              <a:tabLst>
+                <a:tab pos="0" algn="l"/>
+              </a:tabLst>
+              <a:defRPr lang="en-IN" sz="900" b="0" u="none" strike="noStrike">
+                <a:solidFill>
+                  <a:schemeClr val="dk1">
+                    <a:tint val="75000"/>
+                  </a:schemeClr>
+                </a:solidFill>
+                <a:effectLst/>
+                <a:uFillTx/>
+                <a:latin typeface="Calibri"/>
+              </a:defRPr>
+            </a:lvl1pPr>
+          </a:lstStyle>
+          <a:p>
+            <a:pPr indent="0" algn="r" defTabSz="457200">
+              <a:lnSpc>
+                <a:spcPct val="100000"/>
+              </a:lnSpc>
+              <a:buNone/>
+              <a:tabLst>
+                <a:tab pos="0" algn="l"/>
+              </a:tabLst>
+            </a:pPr>
+            <a:fld id="{E6A73476-2D5C-4E24-9E30-E2AF24D98C17}" type="slidenum">
+              <a:rPr lang="en-IN" sz="900" b="0" u="none" strike="noStrike">
+                <a:solidFill>
+                  <a:schemeClr val="dk1">
+                    <a:tint val="75000"/>
+                  </a:schemeClr>
+                </a:solidFill>
+                <a:effectLst/>
+                <a:uFillTx/>
+                <a:latin typeface="Calibri"/>
+              </a:rPr>
+              <a:t>&lt;number&gt;</a:t>
+            </a:fld>
+            <a:endParaRPr lang="en-US" sz="900" b="0" u="none" strike="noStrike">
+              <a:solidFill>
+                <a:srgbClr val="000000"/>
+              </a:solidFill>
+              <a:effectLst/>
+              <a:uFillTx/>
+              <a:latin typeface="Times New Roman"/>
+            </a:endParaRPr>
+          </a:p>
+        </p:txBody>
+      </p:sp>
+    </p:spTree>
+  </p:cSld>
+  <p:clrMapOvr>
+    <a:masterClrMapping/>
+  </p:clrMapOvr>
+</p:sldLayout>
+</file>
+
+<file path=ppt/slideLayouts/slideLayout3.xml><?xml version="1.0" encoding="utf-8"?>
+<p:sldLayout xmlns:a="http://schemas.openxmlformats.org/drawingml/2006/main" xmlns:p="http://schemas.openxmlformats.org/presentationml/2006/main" xmlns:r="http://schemas.openxmlformats.org/officeDocument/2006/relationships" xmlns:p14="http://schemas.microsoft.com/office/powerpoint/2010/main" xmlns:p15="http://schemas.microsoft.com/office/powerpoint/2012/main" xmlns:mc="http://schemas.openxmlformats.org/markup-compatibility/2006" type="blank" preserve="1">
+  <p:cSld name="Picture with Caption">
+    <p:bg>
+      <p:bgPr>
+        <a:solidFill>
+          <a:srgbClr val="FFFFFF"/>
+        </a:solidFill>
+      </p:bgPr>
+    </p:bg>
+    <p:spTree>
+      <p:nvGrpSpPr>
+        <p:cNvPr id="1" name=""/>
+        <p:cNvGrpSpPr/>
+        <p:nvPr/>
+      </p:nvGrpSpPr>
+      <p:grpSpPr>
+        <a:xfrm>
+          <a:off x="0" y="0"/>
+          <a:ext cx="0" cy="0"/>
+          <a:chOff x="0" y="0"/>
+          <a:chExt cx="0" cy="0"/>
+        </a:xfrm>
+      </p:grpSpPr>
+      <p:sp>
+        <p:nvSpPr>
+          <p:cNvPr id="13" name="PlaceHolder 1"/>
+          <p:cNvSpPr>
+            <a:spLocks noGrp="1"/>
+          </p:cNvSpPr>
+          <p:nvPr>
+            <p:ph type="title"/>
+          </p:nvPr>
+        </p:nvSpPr>
+        <p:spPr>
+          <a:xfrm>
+            <a:off x="630000" y="343080"/>
+            <a:ext cx="2948400" cy="1199520"/>
+          </a:xfrm>
+          <a:prstGeom prst="rect">
+            <a:avLst/>
+          </a:prstGeom>
+          <a:noFill/>
+          <a:ln w="0">
+            <a:noFill/>
+          </a:ln>
+        </p:spPr>
+        <p:txBody>
+          <a:bodyPr lIns="91440" tIns="45720" rIns="91440" bIns="45720" anchor="b">
+            <a:noAutofit/>
+          </a:bodyPr>
+          <a:lstStyle>
+            <a:lvl1pPr indent="0" algn="l" defTabSz="685800">
+              <a:lnSpc>
+                <a:spcPct val="90000"/>
+              </a:lnSpc>
+              <a:buNone/>
+              <a:tabLst>
+                <a:tab pos="0" algn="l"/>
+              </a:tabLst>
+              <a:defRPr lang="en-US" sz="2400" b="0" u="none" strike="noStrike">
+                <a:solidFill>
+                  <a:schemeClr val="dk1"/>
+                </a:solidFill>
+                <a:effectLst/>
+                <a:uFillTx/>
+                <a:latin typeface="Calibri Light"/>
+              </a:defRPr>
+            </a:lvl1pPr>
+          </a:lstStyle>
+          <a:p>
+            <a:pPr indent="0" algn="l" defTabSz="685800">
+              <a:lnSpc>
+                <a:spcPct val="90000"/>
+              </a:lnSpc>
+              <a:buNone/>
+              <a:tabLst>
+                <a:tab pos="0" algn="l"/>
+              </a:tabLst>
+            </a:pPr>
+            <a:r>
+              <a:rPr lang="en-US" sz="2400" b="0" u="none" strike="noStrike">
+                <a:solidFill>
+                  <a:schemeClr val="dk1"/>
+                </a:solidFill>
+                <a:effectLst/>
+                <a:uFillTx/>
+                <a:latin typeface="Calibri Light"/>
+              </a:rPr>
+              <a:t>Click to edit Master title style</a:t>
+            </a:r>
+            <a:endParaRPr lang="en-US" sz="2400" b="0" u="none" strike="noStrike">
+              <a:solidFill>
+                <a:schemeClr val="dk1"/>
+              </a:solidFill>
+              <a:effectLst/>
+              <a:uFillTx/>
+              <a:latin typeface="Calibri Light"/>
+            </a:endParaRPr>
+          </a:p>
+        </p:txBody>
+      </p:sp>
+      <p:sp>
+        <p:nvSpPr>
+          <p:cNvPr id="14" name="PlaceHolder 2"/>
+          <p:cNvSpPr>
+            <a:spLocks noGrp="1"/>
+          </p:cNvSpPr>
+          <p:nvPr>
+            <p:ph type="pic"/>
+          </p:nvPr>
+        </p:nvSpPr>
+        <p:spPr>
+          <a:xfrm>
+            <a:off x="3887280" y="740520"/>
+            <a:ext cx="4628520" cy="3654360"/>
+          </a:xfrm>
+          <a:prstGeom prst="rect">
+            <a:avLst/>
+          </a:prstGeom>
+          <a:noFill/>
+          <a:ln w="0">
+            <a:noFill/>
+          </a:ln>
+        </p:spPr>
+        <p:txBody>
+          <a:bodyPr lIns="90000" tIns="45000" rIns="90000" bIns="45000" anchor="t">
+            <a:noAutofit/>
+          </a:bodyPr>
+          <a:p>
+            <a:pPr indent="0" algn="l">
+              <a:buNone/>
+            </a:pPr>
+            <a:r>
+              <a:rPr lang="en-US" sz="1800" b="0" u="none" strike="noStrike">
+                <a:solidFill>
+                  <a:srgbClr val="000000"/>
+                </a:solidFill>
+                <a:effectLst/>
+                <a:uFillTx/>
+                <a:latin typeface="Arial"/>
+              </a:rPr>
+              <a:t>Double-click to add an Image</a:t>
+            </a:r>
+            <a:endParaRPr lang="en-US" sz="1800" b="0" u="none" strike="noStrike">
+              <a:solidFill>
+                <a:srgbClr val="000000"/>
+              </a:solidFill>
+              <a:effectLst/>
+              <a:uFillTx/>
+              <a:latin typeface="Arial"/>
+            </a:endParaRPr>
+          </a:p>
+        </p:txBody>
+      </p:sp>
+      <p:sp>
+        <p:nvSpPr>
+          <p:cNvPr id="15" name="PlaceHolder 3"/>
+          <p:cNvSpPr>
+            <a:spLocks noGrp="1"/>
+          </p:cNvSpPr>
+          <p:nvPr>
+            <p:ph type="body"/>
+          </p:nvPr>
+        </p:nvSpPr>
+        <p:spPr>
+          <a:xfrm>
+            <a:off x="630000" y="1542960"/>
+            <a:ext cx="2948400" cy="2858040"/>
+          </a:xfrm>
+          <a:prstGeom prst="rect">
+            <a:avLst/>
+          </a:prstGeom>
+          <a:noFill/>
+          <a:ln w="0">
+            <a:noFill/>
+          </a:ln>
+        </p:spPr>
+        <p:txBody>
+          <a:bodyPr lIns="91440" tIns="45720" rIns="91440" bIns="45720" anchor="t">
+            <a:noAutofit/>
+          </a:bodyPr>
+          <a:lstStyle>
+            <a:lvl1pPr indent="0" algn="l" defTabSz="685800">
+              <a:lnSpc>
+                <a:spcPct val="90000"/>
+              </a:lnSpc>
+              <a:spcBef>
+                <a:spcPts val="751"/>
+              </a:spcBef>
+              <a:buNone/>
+              <a:tabLst>
+                <a:tab pos="0" algn="l"/>
+              </a:tabLst>
+              <a:defRPr lang="en-US" sz="1200" b="0" u="none" strike="noStrike">
+                <a:solidFill>
+                  <a:schemeClr val="dk1"/>
+                </a:solidFill>
+                <a:effectLst/>
+                <a:uFillTx/>
+                <a:latin typeface="Calibri"/>
+              </a:defRPr>
+            </a:lvl1pPr>
+          </a:lstStyle>
+          <a:p>
+            <a:pPr indent="0" algn="l" defTabSz="685800">
+              <a:lnSpc>
+                <a:spcPct val="90000"/>
+              </a:lnSpc>
+              <a:spcBef>
+                <a:spcPts val="751"/>
+              </a:spcBef>
+              <a:buNone/>
+              <a:tabLst>
+                <a:tab pos="0" algn="l"/>
+              </a:tabLst>
+            </a:pPr>
+            <a:r>
+              <a:rPr lang="en-US" sz="1200" b="0" u="none" strike="noStrike">
+                <a:solidFill>
+                  <a:schemeClr val="dk1"/>
+                </a:solidFill>
+                <a:effectLst/>
+                <a:uFillTx/>
+                <a:latin typeface="Calibri"/>
+              </a:rPr>
+              <a:t>Edit Master text styles</a:t>
+            </a:r>
+            <a:endParaRPr lang="en-US" sz="1200" b="0" u="none" strike="noStrike">
+              <a:solidFill>
+                <a:schemeClr val="dk1"/>
+              </a:solidFill>
+              <a:effectLst/>
+              <a:uFillTx/>
+              <a:latin typeface="Calibri"/>
+            </a:endParaRPr>
+          </a:p>
+        </p:txBody>
+      </p:sp>
+      <p:sp>
+        <p:nvSpPr>
+          <p:cNvPr id="16" name="PlaceHolder 4"/>
+          <p:cNvSpPr>
+            <a:spLocks noGrp="1"/>
+          </p:cNvSpPr>
+          <p:nvPr>
+            <p:ph type="dt" idx="7"/>
+          </p:nvPr>
+        </p:nvSpPr>
+        <p:spPr>
+          <a:xfrm>
+            <a:off x="628560" y="4767120"/>
+            <a:ext cx="2056680" cy="273240"/>
+          </a:xfrm>
+          <a:prstGeom prst="rect">
+            <a:avLst/>
+          </a:prstGeom>
+          <a:noFill/>
+          <a:ln w="0">
+            <a:noFill/>
+          </a:ln>
+        </p:spPr>
+        <p:txBody>
+          <a:bodyPr lIns="91440" tIns="45720" rIns="91440" bIns="45720" anchor="ctr">
+            <a:noAutofit/>
+          </a:bodyPr>
+          <a:lstStyle>
+            <a:lvl1pPr indent="0" algn="l" defTabSz="457200">
+              <a:lnSpc>
+                <a:spcPct val="100000"/>
+              </a:lnSpc>
+              <a:buNone/>
+              <a:tabLst>
+                <a:tab pos="0" algn="l"/>
+              </a:tabLst>
+              <a:defRPr lang="en-IN" sz="900" b="0" u="none" strike="noStrike">
+                <a:solidFill>
+                  <a:schemeClr val="dk1">
+                    <a:tint val="75000"/>
+                  </a:schemeClr>
+                </a:solidFill>
+                <a:effectLst/>
+                <a:uFillTx/>
+                <a:latin typeface="Calibri"/>
+              </a:defRPr>
+            </a:lvl1pPr>
+          </a:lstStyle>
+          <a:p>
+            <a:pPr indent="0" algn="l" defTabSz="457200">
+              <a:lnSpc>
+                <a:spcPct val="100000"/>
+              </a:lnSpc>
+              <a:buNone/>
+              <a:tabLst>
+                <a:tab pos="0" algn="l"/>
+              </a:tabLst>
+            </a:pPr>
+            <a:r>
+              <a:rPr lang="en-IN" sz="900" b="0" u="none" strike="noStrike">
+                <a:solidFill>
+                  <a:schemeClr val="dk1">
+                    <a:tint val="75000"/>
+                  </a:schemeClr>
+                </a:solidFill>
+                <a:effectLst/>
+                <a:uFillTx/>
+                <a:latin typeface="Calibri"/>
+              </a:rPr>
+              <a:t>&lt;date/time&gt;</a:t>
+            </a:r>
+            <a:endParaRPr lang="en-US" sz="900" b="0" u="none" strike="noStrike">
+              <a:solidFill>
+                <a:srgbClr val="000000"/>
+              </a:solidFill>
+              <a:effectLst/>
+              <a:uFillTx/>
+              <a:latin typeface="Times New Roman"/>
+            </a:endParaRPr>
+          </a:p>
+        </p:txBody>
+      </p:sp>
+      <p:sp>
+        <p:nvSpPr>
+          <p:cNvPr id="17" name="PlaceHolder 5"/>
+          <p:cNvSpPr>
+            <a:spLocks noGrp="1"/>
+          </p:cNvSpPr>
+          <p:nvPr>
+            <p:ph type="ftr" idx="8"/>
+          </p:nvPr>
+        </p:nvSpPr>
+        <p:spPr>
+          <a:xfrm>
+            <a:off x="3029040" y="4767120"/>
+            <a:ext cx="3085560" cy="273240"/>
+          </a:xfrm>
+          <a:prstGeom prst="rect">
+            <a:avLst/>
+          </a:prstGeom>
+          <a:noFill/>
+          <a:ln w="0">
+            <a:noFill/>
+          </a:ln>
+        </p:spPr>
+        <p:txBody>
+          <a:bodyPr lIns="91440" tIns="45720" rIns="91440" bIns="45720" anchor="ctr">
+            <a:noAutofit/>
+          </a:bodyPr>
+          <a:lstStyle>
+            <a:lvl1pPr indent="0" algn="ctr">
+              <a:lnSpc>
+                <a:spcPct val="100000"/>
+              </a:lnSpc>
+              <a:buNone/>
+              <a:tabLst>
+                <a:tab pos="0" algn="l"/>
+              </a:tabLst>
+              <a:defRPr lang="en-US" sz="1400" b="0" u="none" strike="noStrike">
+                <a:solidFill>
+                  <a:srgbClr val="000000"/>
+                </a:solidFill>
+                <a:effectLst/>
+                <a:uFillTx/>
+                <a:latin typeface="Times New Roman"/>
+              </a:defRPr>
+            </a:lvl1pPr>
+          </a:lstStyle>
+          <a:p>
+            <a:pPr indent="0" algn="ctr">
+              <a:lnSpc>
+                <a:spcPct val="100000"/>
+              </a:lnSpc>
+              <a:buNone/>
+              <a:tabLst>
+                <a:tab pos="0" algn="l"/>
+              </a:tabLst>
+            </a:pPr>
+            <a:r>
+              <a:rPr lang="en-US" sz="1400" b="0" u="none" strike="noStrike">
+                <a:solidFill>
+                  <a:srgbClr val="000000"/>
+                </a:solidFill>
+                <a:effectLst/>
+                <a:uFillTx/>
+                <a:latin typeface="Times New Roman"/>
+              </a:rPr>
+              <a:t>&lt;footer&gt;</a:t>
+            </a:r>
+            <a:endParaRPr lang="en-US" sz="1400" b="0" u="none" strike="noStrike">
+              <a:solidFill>
+                <a:srgbClr val="000000"/>
+              </a:solidFill>
+              <a:effectLst/>
+              <a:uFillTx/>
+              <a:latin typeface="Times New Roman"/>
+            </a:endParaRPr>
+          </a:p>
+        </p:txBody>
+      </p:sp>
+      <p:sp>
+        <p:nvSpPr>
+          <p:cNvPr id="18" name="PlaceHolder 6"/>
+          <p:cNvSpPr>
+            <a:spLocks noGrp="1"/>
+          </p:cNvSpPr>
+          <p:nvPr>
+            <p:ph type="sldNum" idx="9"/>
+          </p:nvPr>
+        </p:nvSpPr>
+        <p:spPr>
+          <a:xfrm>
+            <a:off x="6458040" y="4767120"/>
+            <a:ext cx="2056680" cy="273240"/>
+          </a:xfrm>
+          <a:prstGeom prst="rect">
+            <a:avLst/>
+          </a:prstGeom>
+          <a:noFill/>
+          <a:ln w="0">
+            <a:noFill/>
+          </a:ln>
+        </p:spPr>
+        <p:txBody>
+          <a:bodyPr lIns="91440" tIns="45720" rIns="91440" bIns="45720" anchor="ctr">
+            <a:noAutofit/>
+          </a:bodyPr>
+          <a:lstStyle>
+            <a:lvl1pPr indent="0" algn="r" defTabSz="457200">
+              <a:lnSpc>
+                <a:spcPct val="100000"/>
+              </a:lnSpc>
+              <a:buNone/>
+              <a:tabLst>
+                <a:tab pos="0" algn="l"/>
+              </a:tabLst>
+              <a:defRPr lang="en-IN" sz="900" b="0" u="none" strike="noStrike">
+                <a:solidFill>
+                  <a:schemeClr val="dk1">
+                    <a:tint val="75000"/>
+                  </a:schemeClr>
+                </a:solidFill>
+                <a:effectLst/>
+                <a:uFillTx/>
+                <a:latin typeface="Calibri"/>
+              </a:defRPr>
+            </a:lvl1pPr>
+          </a:lstStyle>
+          <a:p>
+            <a:pPr indent="0" algn="r" defTabSz="457200">
+              <a:lnSpc>
+                <a:spcPct val="100000"/>
+              </a:lnSpc>
+              <a:buNone/>
+              <a:tabLst>
+                <a:tab pos="0" algn="l"/>
+              </a:tabLst>
+            </a:pPr>
+            <a:fld id="{38831639-EAFC-480F-9392-149A1A420D63}" type="slidenum">
+              <a:rPr lang="en-IN" sz="900" b="0" u="none" strike="noStrike">
+                <a:solidFill>
+                  <a:schemeClr val="dk1">
+                    <a:tint val="75000"/>
+                  </a:schemeClr>
+                </a:solidFill>
+                <a:effectLst/>
+                <a:uFillTx/>
+                <a:latin typeface="Calibri"/>
+              </a:rPr>
+              <a:t>&lt;number&gt;</a:t>
+            </a:fld>
+            <a:endParaRPr lang="en-US" sz="900" b="0" u="none" strike="noStrike">
+              <a:solidFill>
+                <a:srgbClr val="000000"/>
+              </a:solidFill>
+              <a:effectLst/>
+              <a:uFillTx/>
+              <a:latin typeface="Times New Roman"/>
+            </a:endParaRPr>
+          </a:p>
+        </p:txBody>
+      </p:sp>
+    </p:spTree>
+  </p:cSld>
+  <p:clrMapOvr>
+    <a:masterClrMapping/>
+  </p:clrMapOvr>
+</p:sldLayout>
+</file>
+
+<file path=ppt/slideLayouts/slideLayout4.xml><?xml version="1.0" encoding="utf-8"?>
+<p:sldLayout xmlns:a="http://schemas.openxmlformats.org/drawingml/2006/main" xmlns:p="http://schemas.openxmlformats.org/presentationml/2006/main" xmlns:r="http://schemas.openxmlformats.org/officeDocument/2006/relationships" xmlns:p14="http://schemas.microsoft.com/office/powerpoint/2010/main" xmlns:p15="http://schemas.microsoft.com/office/powerpoint/2012/main" xmlns:mc="http://schemas.openxmlformats.org/markup-compatibility/2006" type="title" preserve="1">
+  <p:cSld name="Title Slide">
+    <p:bg>
+      <p:bgPr>
+        <a:solidFill>
+          <a:srgbClr val="FFFFFF"/>
+        </a:solidFill>
+      </p:bgPr>
+    </p:bg>
+    <p:spTree>
+      <p:nvGrpSpPr>
+        <p:cNvPr id="1" name=""/>
+        <p:cNvGrpSpPr/>
+        <p:nvPr/>
+      </p:nvGrpSpPr>
+      <p:grpSpPr>
+        <a:xfrm>
+          <a:off x="0" y="0"/>
+          <a:ext cx="0" cy="0"/>
+          <a:chOff x="0" y="0"/>
+          <a:chExt cx="0" cy="0"/>
+        </a:xfrm>
+      </p:grpSpPr>
+      <p:sp>
+        <p:nvSpPr>
+          <p:cNvPr id="19" name="PlaceHolder 1"/>
+          <p:cNvSpPr>
+            <a:spLocks noGrp="1"/>
+          </p:cNvSpPr>
+          <p:nvPr>
+            <p:ph type="title"/>
+          </p:nvPr>
+        </p:nvSpPr>
+        <p:spPr>
+          <a:xfrm>
+            <a:off x="1143000" y="841680"/>
+            <a:ext cx="6857280" cy="1789920"/>
+          </a:xfrm>
+          <a:prstGeom prst="rect">
+            <a:avLst/>
+          </a:prstGeom>
+          <a:noFill/>
+          <a:ln w="0">
+            <a:noFill/>
+          </a:ln>
+        </p:spPr>
+        <p:txBody>
+          <a:bodyPr lIns="91440" tIns="45720" rIns="91440" bIns="45720" anchor="b">
+            <a:noAutofit/>
+          </a:bodyPr>
+          <a:lstStyle>
+            <a:lvl1pPr indent="0" algn="ctr" defTabSz="685800">
+              <a:lnSpc>
+                <a:spcPct val="90000"/>
+              </a:lnSpc>
+              <a:buNone/>
+              <a:tabLst>
+                <a:tab pos="0" algn="l"/>
+              </a:tabLst>
+              <a:defRPr lang="en-US" sz="4500" b="0" u="none" strike="noStrike">
+                <a:solidFill>
+                  <a:schemeClr val="dk1"/>
+                </a:solidFill>
+                <a:effectLst/>
+                <a:uFillTx/>
+                <a:latin typeface="Calibri Light"/>
+              </a:defRPr>
+            </a:lvl1pPr>
+          </a:lstStyle>
+          <a:p>
+            <a:pPr indent="0" algn="ctr" defTabSz="685800">
+              <a:lnSpc>
+                <a:spcPct val="90000"/>
+              </a:lnSpc>
+              <a:buNone/>
+              <a:tabLst>
+                <a:tab pos="0" algn="l"/>
+              </a:tabLst>
+            </a:pPr>
+            <a:r>
+              <a:rPr lang="en-US" sz="4500" b="0" u="none" strike="noStrike">
+                <a:solidFill>
+                  <a:schemeClr val="dk1"/>
+                </a:solidFill>
+                <a:effectLst/>
+                <a:uFillTx/>
+                <a:latin typeface="Calibri Light"/>
+              </a:rPr>
+              <a:t>Click to edit Master title style</a:t>
+            </a:r>
+            <a:endParaRPr lang="en-US" sz="4500" b="0" u="none" strike="noStrike">
+              <a:solidFill>
+                <a:schemeClr val="dk1"/>
+              </a:solidFill>
+              <a:effectLst/>
+              <a:uFillTx/>
+              <a:latin typeface="Calibri Light"/>
+            </a:endParaRPr>
+          </a:p>
+        </p:txBody>
+      </p:sp>
+      <p:sp>
+        <p:nvSpPr>
+          <p:cNvPr id="20" name="PlaceHolder 2"/>
+          <p:cNvSpPr>
+            <a:spLocks noGrp="1"/>
+          </p:cNvSpPr>
+          <p:nvPr>
+            <p:ph type="dt" idx="10"/>
+          </p:nvPr>
+        </p:nvSpPr>
+        <p:spPr>
+          <a:xfrm>
+            <a:off x="628560" y="4767120"/>
+            <a:ext cx="2056680" cy="273240"/>
+          </a:xfrm>
+          <a:prstGeom prst="rect">
+            <a:avLst/>
+          </a:prstGeom>
+          <a:noFill/>
+          <a:ln w="0">
+            <a:noFill/>
+          </a:ln>
+        </p:spPr>
+        <p:txBody>
+          <a:bodyPr lIns="91440" tIns="45720" rIns="91440" bIns="45720" anchor="ctr">
+            <a:noAutofit/>
+          </a:bodyPr>
+          <a:lstStyle>
+            <a:lvl1pPr indent="0" algn="l" defTabSz="457200">
+              <a:lnSpc>
+                <a:spcPct val="100000"/>
+              </a:lnSpc>
+              <a:buNone/>
+              <a:tabLst>
+                <a:tab pos="0" algn="l"/>
+              </a:tabLst>
+              <a:defRPr lang="en-IN" sz="900" b="0" u="none" strike="noStrike">
+                <a:solidFill>
+                  <a:schemeClr val="dk1">
+                    <a:tint val="75000"/>
+                  </a:schemeClr>
+                </a:solidFill>
+                <a:effectLst/>
+                <a:uFillTx/>
+                <a:latin typeface="Calibri"/>
+              </a:defRPr>
+            </a:lvl1pPr>
+          </a:lstStyle>
+          <a:p>
+            <a:pPr indent="0" algn="l" defTabSz="457200">
+              <a:lnSpc>
+                <a:spcPct val="100000"/>
+              </a:lnSpc>
+              <a:buNone/>
+              <a:tabLst>
+                <a:tab pos="0" algn="l"/>
+              </a:tabLst>
+            </a:pPr>
+            <a:r>
+              <a:rPr lang="en-IN" sz="900" b="0" u="none" strike="noStrike">
+                <a:solidFill>
+                  <a:schemeClr val="dk1">
+                    <a:tint val="75000"/>
+                  </a:schemeClr>
+                </a:solidFill>
+                <a:effectLst/>
+                <a:uFillTx/>
+                <a:latin typeface="Calibri"/>
+              </a:rPr>
+              <a:t>&lt;date/time&gt;</a:t>
+            </a:r>
+            <a:endParaRPr lang="en-US" sz="900" b="0" u="none" strike="noStrike">
+              <a:solidFill>
+                <a:srgbClr val="000000"/>
+              </a:solidFill>
+              <a:effectLst/>
+              <a:uFillTx/>
+              <a:latin typeface="Times New Roman"/>
+            </a:endParaRPr>
+          </a:p>
+        </p:txBody>
+      </p:sp>
+      <p:sp>
+        <p:nvSpPr>
+          <p:cNvPr id="21" name="PlaceHolder 3"/>
+          <p:cNvSpPr>
+            <a:spLocks noGrp="1"/>
+          </p:cNvSpPr>
+          <p:nvPr>
+            <p:ph type="ftr" idx="11"/>
+          </p:nvPr>
+        </p:nvSpPr>
+        <p:spPr>
+          <a:xfrm>
+            <a:off x="3029040" y="4767120"/>
+            <a:ext cx="3085560" cy="273240"/>
+          </a:xfrm>
+          <a:prstGeom prst="rect">
+            <a:avLst/>
+          </a:prstGeom>
+          <a:noFill/>
+          <a:ln w="0">
+            <a:noFill/>
+          </a:ln>
+        </p:spPr>
+        <p:txBody>
+          <a:bodyPr lIns="91440" tIns="45720" rIns="91440" bIns="45720" anchor="ctr">
+            <a:noAutofit/>
+          </a:bodyPr>
+          <a:lstStyle>
+            <a:lvl1pPr indent="0" algn="ctr">
+              <a:lnSpc>
+                <a:spcPct val="100000"/>
+              </a:lnSpc>
+              <a:buNone/>
+              <a:tabLst>
+                <a:tab pos="0" algn="l"/>
+              </a:tabLst>
+              <a:defRPr lang="en-US" sz="1400" b="0" u="none" strike="noStrike">
+                <a:solidFill>
+                  <a:srgbClr val="000000"/>
+                </a:solidFill>
+                <a:effectLst/>
+                <a:uFillTx/>
+                <a:latin typeface="Times New Roman"/>
+              </a:defRPr>
+            </a:lvl1pPr>
+          </a:lstStyle>
+          <a:p>
+            <a:pPr indent="0" algn="ctr">
+              <a:lnSpc>
+                <a:spcPct val="100000"/>
+              </a:lnSpc>
+              <a:buNone/>
+              <a:tabLst>
+                <a:tab pos="0" algn="l"/>
+              </a:tabLst>
+            </a:pPr>
+            <a:r>
+              <a:rPr lang="en-US" sz="1400" b="0" u="none" strike="noStrike">
+                <a:solidFill>
+                  <a:srgbClr val="000000"/>
+                </a:solidFill>
+                <a:effectLst/>
+                <a:uFillTx/>
+                <a:latin typeface="Times New Roman"/>
+              </a:rPr>
+              <a:t>&lt;footer&gt;</a:t>
+            </a:r>
+            <a:endParaRPr lang="en-US" sz="1400" b="0" u="none" strike="noStrike">
+              <a:solidFill>
+                <a:srgbClr val="000000"/>
+              </a:solidFill>
+              <a:effectLst/>
+              <a:uFillTx/>
+              <a:latin typeface="Times New Roman"/>
+            </a:endParaRPr>
+          </a:p>
+        </p:txBody>
+      </p:sp>
+      <p:sp>
+        <p:nvSpPr>
+          <p:cNvPr id="22" name="PlaceHolder 4"/>
+          <p:cNvSpPr>
+            <a:spLocks noGrp="1"/>
+          </p:cNvSpPr>
+          <p:nvPr>
+            <p:ph type="sldNum" idx="12"/>
+          </p:nvPr>
+        </p:nvSpPr>
+        <p:spPr>
+          <a:xfrm>
+            <a:off x="6458040" y="4767120"/>
+            <a:ext cx="2056680" cy="273240"/>
+          </a:xfrm>
+          <a:prstGeom prst="rect">
+            <a:avLst/>
+          </a:prstGeom>
+          <a:noFill/>
+          <a:ln w="0">
+            <a:noFill/>
+          </a:ln>
+        </p:spPr>
+        <p:txBody>
+          <a:bodyPr lIns="91440" tIns="45720" rIns="91440" bIns="45720" anchor="ctr">
+            <a:noAutofit/>
+          </a:bodyPr>
+          <a:lstStyle>
+            <a:lvl1pPr indent="0" algn="r" defTabSz="457200">
+              <a:lnSpc>
+                <a:spcPct val="100000"/>
+              </a:lnSpc>
+              <a:buNone/>
+              <a:tabLst>
+                <a:tab pos="0" algn="l"/>
+              </a:tabLst>
+              <a:defRPr lang="en-IN" sz="900" b="0" u="none" strike="noStrike">
+                <a:solidFill>
+                  <a:schemeClr val="dk1">
+                    <a:tint val="75000"/>
+                  </a:schemeClr>
+                </a:solidFill>
+                <a:effectLst/>
+                <a:uFillTx/>
+                <a:latin typeface="Calibri"/>
+              </a:defRPr>
+            </a:lvl1pPr>
+          </a:lstStyle>
+          <a:p>
+            <a:pPr indent="0" algn="r" defTabSz="457200">
+              <a:lnSpc>
+                <a:spcPct val="100000"/>
+              </a:lnSpc>
+              <a:buNone/>
+              <a:tabLst>
+                <a:tab pos="0" algn="l"/>
+              </a:tabLst>
+            </a:pPr>
+            <a:fld id="{8CE8EF02-2C25-419F-B0E2-91C6575F4006}" type="slidenum">
+              <a:rPr lang="en-IN" sz="900" b="0" u="none" strike="noStrike">
+                <a:solidFill>
+                  <a:schemeClr val="dk1">
+                    <a:tint val="75000"/>
+                  </a:schemeClr>
+                </a:solidFill>
+                <a:effectLst/>
+                <a:uFillTx/>
+                <a:latin typeface="Calibri"/>
+              </a:rPr>
+              <a:t>&lt;number&gt;</a:t>
+            </a:fld>
+            <a:endParaRPr lang="en-US" sz="900" b="0" u="none" strike="noStrike">
+              <a:solidFill>
+                <a:srgbClr val="000000"/>
+              </a:solidFill>
+              <a:effectLst/>
+              <a:uFillTx/>
+              <a:latin typeface="Times New Roman"/>
+            </a:endParaRPr>
+          </a:p>
+        </p:txBody>
+      </p:sp>
+      <p:sp>
+        <p:nvSpPr>
+          <p:cNvPr id="23" name="PlaceHolder 5"/>
+          <p:cNvSpPr>
+            <a:spLocks noGrp="1"/>
+          </p:cNvSpPr>
+          <p:nvPr>
+            <p:ph type="body"/>
+          </p:nvPr>
+        </p:nvSpPr>
+        <p:spPr>
+          <a:xfrm>
+            <a:off x="457200" y="1203480"/>
+            <a:ext cx="8228880" cy="2982600"/>
+          </a:xfrm>
+          <a:prstGeom prst="rect">
+            <a:avLst/>
+          </a:prstGeom>
+          <a:noFill/>
+          <a:ln w="0">
+            <a:noFill/>
+          </a:ln>
+        </p:spPr>
+        <p:txBody>
+          <a:bodyPr lIns="0" tIns="0" rIns="0" bIns="0" anchor="t">
+            <a:normAutofit/>
+          </a:bodyPr>
+          <a:lstStyle>
+            <a:lvl1pPr algn="l" defTabSz="685800">
+              <a:lnSpc>
+                <a:spcPct val="90000"/>
+              </a:lnSpc>
+              <a:spcBef>
+                <a:spcPts val="751"/>
+              </a:spcBef>
+              <a:buClr>
+                <a:srgbClr val="000000"/>
+              </a:buClr>
+              <a:buFont typeface="Arial"/>
+              <a:buChar char="•"/>
+              <a:defRPr lang="en-US" sz="2100" b="0" u="none" strike="noStrike">
+                <a:solidFill>
+                  <a:schemeClr val="dk1"/>
+                </a:solidFill>
+                <a:effectLst/>
+                <a:uFillTx/>
+                <a:latin typeface="Calibri"/>
+              </a:defRPr>
+            </a:lvl1pPr>
+            <a:lvl2pPr lvl="1" algn="l" defTabSz="685800">
+              <a:lnSpc>
+                <a:spcPct val="90000"/>
+              </a:lnSpc>
+              <a:spcBef>
+                <a:spcPts val="374"/>
+              </a:spcBef>
+              <a:buClr>
+                <a:srgbClr val="000000"/>
+              </a:buClr>
+              <a:buSzPct val="75000"/>
+              <a:buFont typeface="Symbol" charset="2"/>
+              <a:buChar char=""/>
+              <a:defRPr lang="en-US" sz="1800" b="0" u="none" strike="noStrike">
+                <a:solidFill>
+                  <a:schemeClr val="dk1"/>
+                </a:solidFill>
+                <a:effectLst/>
+                <a:uFillTx/>
+                <a:latin typeface="Calibri"/>
+              </a:defRPr>
+            </a:lvl2pPr>
+            <a:lvl3pPr lvl="2" algn="l" defTabSz="685800">
+              <a:lnSpc>
+                <a:spcPct val="90000"/>
+              </a:lnSpc>
+              <a:spcBef>
+                <a:spcPts val="374"/>
+              </a:spcBef>
+              <a:buClr>
+                <a:srgbClr val="000000"/>
+              </a:buClr>
+              <a:buSzPct val="45000"/>
+              <a:buFont typeface="Wingdings" charset="2"/>
+              <a:buChar char=""/>
+              <a:defRPr lang="en-US" sz="1500" b="0" u="none" strike="noStrike">
+                <a:solidFill>
+                  <a:schemeClr val="dk1"/>
+                </a:solidFill>
+                <a:effectLst/>
+                <a:uFillTx/>
+                <a:latin typeface="Calibri"/>
+              </a:defRPr>
+            </a:lvl3pPr>
+            <a:lvl4pPr lvl="3" algn="l" defTabSz="685800">
+              <a:lnSpc>
+                <a:spcPct val="90000"/>
+              </a:lnSpc>
+              <a:spcBef>
+                <a:spcPts val="374"/>
+              </a:spcBef>
+              <a:buClr>
+                <a:srgbClr val="000000"/>
+              </a:buClr>
+              <a:buSzPct val="75000"/>
+              <a:buFont typeface="Symbol" charset="2"/>
+              <a:buChar char=""/>
+              <a:defRPr lang="en-US" sz="1350" b="0" u="none" strike="noStrike">
+                <a:solidFill>
+                  <a:schemeClr val="dk1"/>
+                </a:solidFill>
+                <a:effectLst/>
+                <a:uFillTx/>
+                <a:latin typeface="Calibri"/>
+              </a:defRPr>
+            </a:lvl4pPr>
+            <a:lvl5pPr lvl="4" algn="l" defTabSz="685800">
+              <a:lnSpc>
+                <a:spcPct val="90000"/>
+              </a:lnSpc>
+              <a:spcBef>
+                <a:spcPts val="374"/>
+              </a:spcBef>
+              <a:buClr>
+                <a:srgbClr val="000000"/>
+              </a:buClr>
+              <a:buSzPct val="45000"/>
+              <a:buFont typeface="Wingdings" charset="2"/>
+              <a:buChar char=""/>
+              <a:defRPr lang="en-US" sz="1350" b="0" u="none" strike="noStrike">
+                <a:solidFill>
+                  <a:schemeClr val="dk1"/>
+                </a:solidFill>
+                <a:effectLst/>
+                <a:uFillTx/>
+                <a:latin typeface="Calibri"/>
+              </a:defRPr>
+            </a:lvl5pPr>
+            <a:lvl6pPr lvl="5" algn="l" defTabSz="685800">
+              <a:lnSpc>
+                <a:spcPct val="90000"/>
+              </a:lnSpc>
+              <a:spcBef>
+                <a:spcPts val="283"/>
+              </a:spcBef>
+              <a:buClr>
+                <a:srgbClr val="000000"/>
+              </a:buClr>
+              <a:buSzPct val="45000"/>
+              <a:buFont typeface="Wingdings" charset="2"/>
+              <a:buChar char=""/>
+              <a:defRPr lang="en-US" sz="2000" b="0" u="none" strike="noStrike">
+                <a:solidFill>
+                  <a:schemeClr val="dk1"/>
+                </a:solidFill>
+                <a:effectLst/>
+                <a:uFillTx/>
+                <a:latin typeface="Calibri"/>
+              </a:defRPr>
+            </a:lvl6pPr>
+            <a:lvl7pPr lvl="6" algn="l" defTabSz="685800">
+              <a:lnSpc>
+                <a:spcPct val="90000"/>
+              </a:lnSpc>
+              <a:spcBef>
+                <a:spcPts val="283"/>
+              </a:spcBef>
+              <a:buClr>
+                <a:srgbClr val="000000"/>
+              </a:buClr>
+              <a:buSzPct val="45000"/>
+              <a:buFont typeface="Wingdings" charset="2"/>
+              <a:buChar char=""/>
+              <a:defRPr lang="en-US" sz="2000" b="0" u="none" strike="noStrike">
+                <a:solidFill>
+                  <a:schemeClr val="dk1"/>
+                </a:solidFill>
+                <a:effectLst/>
+                <a:uFillTx/>
+                <a:latin typeface="Calibri"/>
+              </a:defRPr>
+            </a:lvl7pPr>
+          </a:lstStyle>
+          <a:p>
+            <a:pPr marL="171360" indent="-171360" algn="l" defTabSz="685800">
+              <a:lnSpc>
+                <a:spcPct val="90000"/>
+              </a:lnSpc>
+              <a:spcBef>
+                <a:spcPts val="751"/>
+              </a:spcBef>
+              <a:buClr>
+                <a:srgbClr val="000000"/>
+              </a:buClr>
+              <a:buFont typeface="Arial"/>
+              <a:buChar char="•"/>
+            </a:pPr>
+            <a:r>
+              <a:rPr lang="en-US" sz="2100" b="0" u="none" strike="noStrike">
+                <a:solidFill>
+                  <a:schemeClr val="dk1"/>
+                </a:solidFill>
+                <a:effectLst/>
+                <a:uFillTx/>
+                <a:latin typeface="Calibri"/>
+              </a:rPr>
+              <a:t>Click to edit the outline text format</a:t>
+            </a:r>
+            <a:endParaRPr lang="en-US" sz="2100" b="0" u="none" strike="noStrike">
+              <a:solidFill>
+                <a:schemeClr val="dk1"/>
+              </a:solidFill>
+              <a:effectLst/>
+              <a:uFillTx/>
+              <a:latin typeface="Calibri"/>
+            </a:endParaRPr>
+          </a:p>
+          <a:p>
+            <a:pPr marL="864000" lvl="1" indent="-324000" algn="l" defTabSz="685800">
+              <a:lnSpc>
+                <a:spcPct val="90000"/>
+              </a:lnSpc>
+              <a:spcBef>
+                <a:spcPts val="374"/>
+              </a:spcBef>
+              <a:buClr>
+                <a:srgbClr val="000000"/>
+              </a:buClr>
+              <a:buSzPct val="75000"/>
+              <a:buFont typeface="Symbol" charset="2"/>
+              <a:buChar char=""/>
+            </a:pPr>
+            <a:r>
+              <a:rPr lang="en-US" sz="1800" b="0" u="none" strike="noStrike">
+                <a:solidFill>
+                  <a:schemeClr val="dk1"/>
+                </a:solidFill>
+                <a:effectLst/>
+                <a:uFillTx/>
+                <a:latin typeface="Calibri"/>
+              </a:rPr>
+              <a:t>Second Outline Level</a:t>
+            </a:r>
+            <a:endParaRPr lang="en-US" sz="1800" b="0" u="none" strike="noStrike">
+              <a:solidFill>
+                <a:schemeClr val="dk1"/>
+              </a:solidFill>
+              <a:effectLst/>
+              <a:uFillTx/>
+              <a:latin typeface="Calibri"/>
+            </a:endParaRPr>
+          </a:p>
+          <a:p>
+            <a:pPr marL="1296000" lvl="2" indent="-288000" algn="l" defTabSz="685800">
+              <a:lnSpc>
+                <a:spcPct val="90000"/>
+              </a:lnSpc>
+              <a:spcBef>
+                <a:spcPts val="374"/>
+              </a:spcBef>
+              <a:buClr>
+                <a:srgbClr val="000000"/>
+              </a:buClr>
+              <a:buSzPct val="45000"/>
+              <a:buFont typeface="Wingdings" charset="2"/>
+              <a:buChar char=""/>
+            </a:pPr>
+            <a:r>
+              <a:rPr lang="en-US" sz="1500" b="0" u="none" strike="noStrike">
+                <a:solidFill>
+                  <a:schemeClr val="dk1"/>
+                </a:solidFill>
+                <a:effectLst/>
+                <a:uFillTx/>
+                <a:latin typeface="Calibri"/>
+              </a:rPr>
+              <a:t>Third Outline Level</a:t>
+            </a:r>
+            <a:endParaRPr lang="en-US" sz="1500" b="0" u="none" strike="noStrike">
+              <a:solidFill>
+                <a:schemeClr val="dk1"/>
+              </a:solidFill>
+              <a:effectLst/>
+              <a:uFillTx/>
+              <a:latin typeface="Calibri"/>
+            </a:endParaRPr>
+          </a:p>
+          <a:p>
+            <a:pPr marL="1728000" lvl="3" indent="-216000" algn="l" defTabSz="685800">
+              <a:lnSpc>
+                <a:spcPct val="90000"/>
+              </a:lnSpc>
+              <a:spcBef>
+                <a:spcPts val="374"/>
+              </a:spcBef>
+              <a:buClr>
+                <a:srgbClr val="000000"/>
+              </a:buClr>
+              <a:buSzPct val="75000"/>
+              <a:buFont typeface="Symbol" charset="2"/>
+              <a:buChar char=""/>
+            </a:pPr>
+            <a:r>
+              <a:rPr lang="en-US" sz="1350" b="0" u="none" strike="noStrike">
+                <a:solidFill>
+                  <a:schemeClr val="dk1"/>
+                </a:solidFill>
+                <a:effectLst/>
+                <a:uFillTx/>
+                <a:latin typeface="Calibri"/>
+              </a:rPr>
+              <a:t>Fourth Outline Level</a:t>
+            </a:r>
+            <a:endParaRPr lang="en-US" sz="1350" b="0" u="none" strike="noStrike">
+              <a:solidFill>
+                <a:schemeClr val="dk1"/>
+              </a:solidFill>
+              <a:effectLst/>
+              <a:uFillTx/>
+              <a:latin typeface="Calibri"/>
+            </a:endParaRPr>
+          </a:p>
+          <a:p>
+            <a:pPr marL="2160000" lvl="4" indent="-216000" algn="l" defTabSz="685800">
+              <a:lnSpc>
+                <a:spcPct val="90000"/>
+              </a:lnSpc>
+              <a:spcBef>
+                <a:spcPts val="374"/>
+              </a:spcBef>
+              <a:buClr>
+                <a:srgbClr val="000000"/>
+              </a:buClr>
+              <a:buSzPct val="45000"/>
+              <a:buFont typeface="Wingdings" charset="2"/>
+              <a:buChar char=""/>
+            </a:pPr>
+            <a:r>
+              <a:rPr lang="en-US" sz="1350" b="0" u="none" strike="noStrike">
+                <a:solidFill>
+                  <a:schemeClr val="dk1"/>
+                </a:solidFill>
+                <a:effectLst/>
+                <a:uFillTx/>
+                <a:latin typeface="Calibri"/>
+              </a:rPr>
+              <a:t>Fifth Outline Level</a:t>
+            </a:r>
+            <a:endParaRPr lang="en-US" sz="1350" b="0" u="none" strike="noStrike">
+              <a:solidFill>
+                <a:schemeClr val="dk1"/>
+              </a:solidFill>
+              <a:effectLst/>
+              <a:uFillTx/>
+              <a:latin typeface="Calibri"/>
+            </a:endParaRPr>
+          </a:p>
+          <a:p>
+            <a:pPr marL="2592000" lvl="5" indent="-216000" algn="l" defTabSz="685800">
+              <a:lnSpc>
+                <a:spcPct val="90000"/>
+              </a:lnSpc>
+              <a:spcBef>
+                <a:spcPts val="283"/>
+              </a:spcBef>
+              <a:buClr>
+                <a:srgbClr val="000000"/>
+              </a:buClr>
+              <a:buSzPct val="45000"/>
+              <a:buFont typeface="Wingdings" charset="2"/>
+              <a:buChar char=""/>
+            </a:pPr>
+            <a:r>
+              <a:rPr lang="en-US" sz="2000" b="0" u="none" strike="noStrike">
+                <a:solidFill>
+                  <a:schemeClr val="dk1"/>
+                </a:solidFill>
+                <a:effectLst/>
+                <a:uFillTx/>
+                <a:latin typeface="Calibri"/>
+              </a:rPr>
+              <a:t>Sixth Outline Level</a:t>
+            </a:r>
+            <a:endParaRPr lang="en-US" sz="2000" b="0" u="none" strike="noStrike">
+              <a:solidFill>
+                <a:schemeClr val="dk1"/>
+              </a:solidFill>
+              <a:effectLst/>
+              <a:uFillTx/>
+              <a:latin typeface="Calibri"/>
+            </a:endParaRPr>
+          </a:p>
+          <a:p>
+            <a:pPr marL="3024000" lvl="6" indent="-216000" algn="l" defTabSz="685800">
+              <a:lnSpc>
+                <a:spcPct val="90000"/>
+              </a:lnSpc>
+              <a:spcBef>
+                <a:spcPts val="283"/>
+              </a:spcBef>
+              <a:buClr>
+                <a:srgbClr val="000000"/>
+              </a:buClr>
+              <a:buSzPct val="45000"/>
+              <a:buFont typeface="Wingdings" charset="2"/>
+              <a:buChar char=""/>
+            </a:pPr>
+            <a:r>
+              <a:rPr lang="en-US" sz="2000" b="0" u="none" strike="noStrike">
+                <a:solidFill>
+                  <a:schemeClr val="dk1"/>
+                </a:solidFill>
+                <a:effectLst/>
+                <a:uFillTx/>
+                <a:latin typeface="Calibri"/>
+              </a:rPr>
+              <a:t>Seventh Outline Level</a:t>
+            </a:r>
+            <a:endParaRPr lang="en-US" sz="2000" b="0" u="none" strike="noStrike">
+              <a:solidFill>
+                <a:schemeClr val="dk1"/>
+              </a:solidFill>
+              <a:effectLst/>
+              <a:uFillTx/>
+              <a:latin typeface="Calibri"/>
+            </a:endParaRPr>
+          </a:p>
+        </p:txBody>
+      </p:sp>
+    </p:spTree>
+  </p:cSld>
+  <p:clrMapOvr>
+    <a:masterClrMapping/>
+  </p:clrMapOvr>
+</p:sldLayout>
+</file>
+
+<file path=ppt/slideLayouts/slideLayout5.xml><?xml version="1.0" encoding="utf-8"?>
+<p:sldLayout xmlns:a="http://schemas.openxmlformats.org/drawingml/2006/main" xmlns:p="http://schemas.openxmlformats.org/presentationml/2006/main" xmlns:r="http://schemas.openxmlformats.org/officeDocument/2006/relationships" xmlns:p14="http://schemas.microsoft.com/office/powerpoint/2010/main" xmlns:p15="http://schemas.microsoft.com/office/powerpoint/2012/main" xmlns:mc="http://schemas.openxmlformats.org/markup-compatibility/2006" type="vertTx" preserve="1">
+  <p:cSld name="Title and Vertical Text">
+    <p:bg>
+      <p:bgPr>
+        <a:solidFill>
+          <a:srgbClr val="FFFFFF"/>
+        </a:solidFill>
+      </p:bgPr>
+    </p:bg>
+    <p:spTree>
+      <p:nvGrpSpPr>
+        <p:cNvPr id="1" name=""/>
+        <p:cNvGrpSpPr/>
+        <p:nvPr/>
+      </p:nvGrpSpPr>
+      <p:grpSpPr>
+        <a:xfrm>
+          <a:off x="0" y="0"/>
+          <a:ext cx="0" cy="0"/>
+          <a:chOff x="0" y="0"/>
+          <a:chExt cx="0" cy="0"/>
+        </a:xfrm>
+      </p:grpSpPr>
+      <p:sp>
+        <p:nvSpPr>
+          <p:cNvPr id="24" name="PlaceHolder 1"/>
+          <p:cNvSpPr>
+            <a:spLocks noGrp="1"/>
+          </p:cNvSpPr>
+          <p:nvPr>
+            <p:ph type="title"/>
+          </p:nvPr>
+        </p:nvSpPr>
+        <p:spPr>
+          <a:xfrm>
             <a:off x="628560" y="273960"/>
-            <a:ext cx="7886520" cy="993960"/>
+            <a:ext cx="7886160" cy="993600"/>
           </a:xfrm>
           <a:prstGeom prst="rect">
             <a:avLst/>
@@ -1995,6 +4745,9 @@
                 <a:spcPct val="90000"/>
               </a:lnSpc>
               <a:buNone/>
+              <a:tabLst>
+                <a:tab pos="0" algn="l"/>
+              </a:tabLst>
               <a:defRPr lang="en-US" sz="3300" b="0" u="none" strike="noStrike">
                 <a:solidFill>
                   <a:schemeClr val="dk1"/>
@@ -2011,6 +4764,9 @@
                 <a:spcPct val="90000"/>
               </a:lnSpc>
               <a:buNone/>
+              <a:tabLst>
+                <a:tab pos="0" algn="l"/>
+              </a:tabLst>
             </a:pPr>
             <a:r>
               <a:rPr lang="en-US" sz="3300" b="0" u="none" strike="noStrike">
@@ -2036,7 +4792,7 @@
       </p:sp>
       <p:sp>
         <p:nvSpPr>
-          <p:cNvPr id="8" name="PlaceHolder 2"/>
+          <p:cNvPr id="25" name="PlaceHolder 2"/>
           <p:cNvSpPr>
             <a:spLocks noGrp="1"/>
           </p:cNvSpPr>
@@ -2047,7 +4803,7 @@
         <p:spPr>
           <a:xfrm>
             <a:off x="628560" y="1369080"/>
-            <a:ext cx="7886520" cy="3263040"/>
+            <a:ext cx="7886160" cy="3262680"/>
           </a:xfrm>
           <a:prstGeom prst="rect">
             <a:avLst/>
@@ -2342,18 +5098,18 @@
       </p:sp>
       <p:sp>
         <p:nvSpPr>
-          <p:cNvPr id="9" name="PlaceHolder 3"/>
+          <p:cNvPr id="26" name="PlaceHolder 3"/>
           <p:cNvSpPr>
             <a:spLocks noGrp="1"/>
           </p:cNvSpPr>
           <p:nvPr>
-            <p:ph type="dt" idx="4"/>
+            <p:ph type="dt" idx="13"/>
           </p:nvPr>
         </p:nvSpPr>
         <p:spPr>
           <a:xfrm>
             <a:off x="628560" y="4767120"/>
-            <a:ext cx="2057040" cy="273600"/>
+            <a:ext cx="2056680" cy="273240"/>
           </a:xfrm>
           <a:prstGeom prst="rect">
             <a:avLst/>
@@ -2373,6 +5129,9 @@
                 <a:spcPct val="100000"/>
               </a:lnSpc>
               <a:buNone/>
+              <a:tabLst>
+                <a:tab pos="0" algn="l"/>
+              </a:tabLst>
               <a:defRPr lang="en-IN" sz="900" b="0" u="none" strike="noStrike">
                 <a:solidFill>
                   <a:schemeClr val="dk1">
@@ -2391,6 +5150,9 @@
                 <a:spcPct val="100000"/>
               </a:lnSpc>
               <a:buNone/>
+              <a:tabLst>
+                <a:tab pos="0" algn="l"/>
+              </a:tabLst>
             </a:pPr>
             <a:r>
               <a:rPr lang="en-IN" sz="900" b="0" u="none" strike="noStrike">
@@ -2418,18 +5180,18 @@
       </p:sp>
       <p:sp>
         <p:nvSpPr>
-          <p:cNvPr id="10" name="PlaceHolder 4"/>
+          <p:cNvPr id="27" name="PlaceHolder 4"/>
           <p:cNvSpPr>
             <a:spLocks noGrp="1"/>
           </p:cNvSpPr>
           <p:nvPr>
-            <p:ph type="ftr" idx="5"/>
+            <p:ph type="ftr" idx="14"/>
           </p:nvPr>
         </p:nvSpPr>
         <p:spPr>
           <a:xfrm>
             <a:off x="3029040" y="4767120"/>
-            <a:ext cx="3085920" cy="273600"/>
+            <a:ext cx="3085560" cy="273240"/>
           </a:xfrm>
           <a:prstGeom prst="rect">
             <a:avLst/>
@@ -2445,7 +5207,13 @@
           </a:bodyPr>
           <a:lstStyle>
             <a:lvl1pPr indent="0" algn="ctr">
+              <a:lnSpc>
+                <a:spcPct val="100000"/>
+              </a:lnSpc>
               <a:buNone/>
+              <a:tabLst>
+                <a:tab pos="0" algn="l"/>
+              </a:tabLst>
               <a:defRPr lang="en-US" sz="1400" b="0" u="none" strike="noStrike">
                 <a:solidFill>
                   <a:srgbClr val="000000"/>
@@ -2458,7 +5226,13 @@
           </a:lstStyle>
           <a:p>
             <a:pPr indent="0" algn="ctr">
+              <a:lnSpc>
+                <a:spcPct val="100000"/>
+              </a:lnSpc>
               <a:buNone/>
+              <a:tabLst>
+                <a:tab pos="0" algn="l"/>
+              </a:tabLst>
             </a:pPr>
             <a:r>
               <a:rPr lang="en-US" sz="1400" b="0" u="none" strike="noStrike">
@@ -2484,18 +5258,18 @@
       </p:sp>
       <p:sp>
         <p:nvSpPr>
-          <p:cNvPr id="11" name="PlaceHolder 5"/>
+          <p:cNvPr id="28" name="PlaceHolder 5"/>
           <p:cNvSpPr>
             <a:spLocks noGrp="1"/>
           </p:cNvSpPr>
           <p:nvPr>
-            <p:ph type="sldNum" idx="6"/>
+            <p:ph type="sldNum" idx="15"/>
           </p:nvPr>
         </p:nvSpPr>
         <p:spPr>
           <a:xfrm>
             <a:off x="6458040" y="4767120"/>
-            <a:ext cx="2057040" cy="273600"/>
+            <a:ext cx="2056680" cy="273240"/>
           </a:xfrm>
           <a:prstGeom prst="rect">
             <a:avLst/>
@@ -2515,6 +5289,9 @@
                 <a:spcPct val="100000"/>
               </a:lnSpc>
               <a:buNone/>
+              <a:tabLst>
+                <a:tab pos="0" algn="l"/>
+              </a:tabLst>
               <a:defRPr lang="en-IN" sz="900" b="0" u="none" strike="noStrike">
                 <a:solidFill>
                   <a:schemeClr val="dk1">
@@ -2533,8 +5310,11 @@
                 <a:spcPct val="100000"/>
               </a:lnSpc>
               <a:buNone/>
-            </a:pPr>
-            <a:fld id="{D54056CB-ED92-4AD5-A83A-A56664B0BCD3}" type="slidenum">
+              <a:tabLst>
+                <a:tab pos="0" algn="l"/>
+              </a:tabLst>
+            </a:pPr>
+            <a:fld id="{59E3F254-686D-4681-8E1B-AB8DFB867CE9}" type="slidenum">
               <a:rPr lang="en-IN" sz="900" b="0" u="none" strike="noStrike">
                 <a:solidFill>
                   <a:schemeClr val="dk1">
@@ -2566,7 +5346,7 @@
 </p:sldLayout>
 </file>
 
-<file path=ppt/slideLayouts/slideLayout3.xml><?xml version="1.0" encoding="utf-8"?>
+<file path=ppt/slideLayouts/slideLayout6.xml><?xml version="1.0" encoding="utf-8"?>
 <p:sldLayout xmlns:a="http://schemas.openxmlformats.org/drawingml/2006/main" xmlns:p="http://schemas.openxmlformats.org/presentationml/2006/main" xmlns:r="http://schemas.openxmlformats.org/officeDocument/2006/relationships" xmlns:p14="http://schemas.microsoft.com/office/powerpoint/2010/main" xmlns:p15="http://schemas.microsoft.com/office/powerpoint/2012/main" xmlns:mc="http://schemas.openxmlformats.org/markup-compatibility/2006" type="vertTitleAndTx" preserve="1">
   <p:cSld name="Vertical Title and Text">
     <p:bg>
@@ -2592,7 +5372,7 @@
       </p:grpSpPr>
       <p:sp>
         <p:nvSpPr>
-          <p:cNvPr id="12" name="PlaceHolder 1"/>
+          <p:cNvPr id="29" name="PlaceHolder 1"/>
           <p:cNvSpPr>
             <a:spLocks noGrp="1"/>
           </p:cNvSpPr>
@@ -2603,7 +5383,7 @@
         <p:spPr>
           <a:xfrm>
             <a:off x="6543720" y="273960"/>
-            <a:ext cx="1971360" cy="4358520"/>
+            <a:ext cx="1971000" cy="4358160"/>
           </a:xfrm>
           <a:prstGeom prst="rect">
             <a:avLst/>
@@ -2623,6 +5403,9 @@
                 <a:spcPct val="90000"/>
               </a:lnSpc>
               <a:buNone/>
+              <a:tabLst>
+                <a:tab pos="0" algn="l"/>
+              </a:tabLst>
               <a:defRPr lang="en-US" sz="3300" b="0" u="none" strike="noStrike">
                 <a:solidFill>
                   <a:schemeClr val="dk1"/>
@@ -2639,6 +5422,9 @@
                 <a:spcPct val="90000"/>
               </a:lnSpc>
               <a:buNone/>
+              <a:tabLst>
+                <a:tab pos="0" algn="l"/>
+              </a:tabLst>
             </a:pPr>
             <a:r>
               <a:rPr lang="en-US" sz="3300" b="0" u="none" strike="noStrike">
@@ -2664,7 +5450,7 @@
       </p:sp>
       <p:sp>
         <p:nvSpPr>
-          <p:cNvPr id="13" name="PlaceHolder 2"/>
+          <p:cNvPr id="30" name="PlaceHolder 2"/>
           <p:cNvSpPr>
             <a:spLocks noGrp="1"/>
           </p:cNvSpPr>
@@ -2675,7 +5461,7 @@
         <p:spPr>
           <a:xfrm>
             <a:off x="628560" y="273960"/>
-            <a:ext cx="5800320" cy="4358520"/>
+            <a:ext cx="5799960" cy="4358160"/>
           </a:xfrm>
           <a:prstGeom prst="rect">
             <a:avLst/>
@@ -2970,18 +5756,18 @@
       </p:sp>
       <p:sp>
         <p:nvSpPr>
-          <p:cNvPr id="14" name="PlaceHolder 3"/>
+          <p:cNvPr id="31" name="PlaceHolder 3"/>
           <p:cNvSpPr>
             <a:spLocks noGrp="1"/>
           </p:cNvSpPr>
           <p:nvPr>
-            <p:ph type="dt" idx="7"/>
+            <p:ph type="dt" idx="16"/>
           </p:nvPr>
         </p:nvSpPr>
         <p:spPr>
           <a:xfrm>
             <a:off x="628560" y="4767120"/>
-            <a:ext cx="2057040" cy="273600"/>
+            <a:ext cx="2056680" cy="273240"/>
           </a:xfrm>
           <a:prstGeom prst="rect">
             <a:avLst/>
@@ -3001,6 +5787,9 @@
                 <a:spcPct val="100000"/>
               </a:lnSpc>
               <a:buNone/>
+              <a:tabLst>
+                <a:tab pos="0" algn="l"/>
+              </a:tabLst>
               <a:defRPr lang="en-IN" sz="900" b="0" u="none" strike="noStrike">
                 <a:solidFill>
                   <a:schemeClr val="dk1">
@@ -3019,6 +5808,9 @@
                 <a:spcPct val="100000"/>
               </a:lnSpc>
               <a:buNone/>
+              <a:tabLst>
+                <a:tab pos="0" algn="l"/>
+              </a:tabLst>
             </a:pPr>
             <a:r>
               <a:rPr lang="en-IN" sz="900" b="0" u="none" strike="noStrike">
@@ -3046,18 +5838,18 @@
       </p:sp>
       <p:sp>
         <p:nvSpPr>
-          <p:cNvPr id="15" name="PlaceHolder 4"/>
+          <p:cNvPr id="32" name="PlaceHolder 4"/>
           <p:cNvSpPr>
             <a:spLocks noGrp="1"/>
           </p:cNvSpPr>
           <p:nvPr>
-            <p:ph type="ftr" idx="8"/>
+            <p:ph type="ftr" idx="17"/>
           </p:nvPr>
         </p:nvSpPr>
         <p:spPr>
           <a:xfrm>
             <a:off x="3029040" y="4767120"/>
-            <a:ext cx="3085920" cy="273600"/>
+            <a:ext cx="3085560" cy="273240"/>
           </a:xfrm>
           <a:prstGeom prst="rect">
             <a:avLst/>
@@ -3073,7 +5865,13 @@
           </a:bodyPr>
           <a:lstStyle>
             <a:lvl1pPr indent="0" algn="ctr">
+              <a:lnSpc>
+                <a:spcPct val="100000"/>
+              </a:lnSpc>
               <a:buNone/>
+              <a:tabLst>
+                <a:tab pos="0" algn="l"/>
+              </a:tabLst>
               <a:defRPr lang="en-US" sz="1400" b="0" u="none" strike="noStrike">
                 <a:solidFill>
                   <a:srgbClr val="000000"/>
@@ -3086,7 +5884,13 @@
           </a:lstStyle>
           <a:p>
             <a:pPr indent="0" algn="ctr">
+              <a:lnSpc>
+                <a:spcPct val="100000"/>
+              </a:lnSpc>
               <a:buNone/>
+              <a:tabLst>
+                <a:tab pos="0" algn="l"/>
+              </a:tabLst>
             </a:pPr>
             <a:r>
               <a:rPr lang="en-US" sz="1400" b="0" u="none" strike="noStrike">
@@ -3112,18 +5916,18 @@
       </p:sp>
       <p:sp>
         <p:nvSpPr>
-          <p:cNvPr id="16" name="PlaceHolder 5"/>
+          <p:cNvPr id="33" name="PlaceHolder 5"/>
           <p:cNvSpPr>
             <a:spLocks noGrp="1"/>
           </p:cNvSpPr>
           <p:nvPr>
-            <p:ph type="sldNum" idx="9"/>
+            <p:ph type="sldNum" idx="18"/>
           </p:nvPr>
         </p:nvSpPr>
         <p:spPr>
           <a:xfrm>
             <a:off x="6458040" y="4767120"/>
-            <a:ext cx="2057040" cy="273600"/>
+            <a:ext cx="2056680" cy="273240"/>
           </a:xfrm>
           <a:prstGeom prst="rect">
             <a:avLst/>
@@ -3143,6 +5947,9 @@
                 <a:spcPct val="100000"/>
               </a:lnSpc>
               <a:buNone/>
+              <a:tabLst>
+                <a:tab pos="0" algn="l"/>
+              </a:tabLst>
               <a:defRPr lang="en-IN" sz="900" b="0" u="none" strike="noStrike">
                 <a:solidFill>
                   <a:schemeClr val="dk1">
@@ -3161,8 +5968,11 @@
                 <a:spcPct val="100000"/>
               </a:lnSpc>
               <a:buNone/>
-            </a:pPr>
-            <a:fld id="{CF40EAA7-A2D8-412E-9733-BFEDE3068736}" type="slidenum">
+              <a:tabLst>
+                <a:tab pos="0" algn="l"/>
+              </a:tabLst>
+            </a:pPr>
+            <a:fld id="{CC1476C7-D02C-4417-AEFF-CEA1BB0AB4DA}" type="slidenum">
               <a:rPr lang="en-IN" sz="900" b="0" u="none" strike="noStrike">
                 <a:solidFill>
                   <a:schemeClr val="dk1">
@@ -3194,7 +6004,7 @@
 </p:sldLayout>
 </file>
 
-<file path=ppt/slideLayouts/slideLayout4.xml><?xml version="1.0" encoding="utf-8"?>
+<file path=ppt/slideLayouts/slideLayout7.xml><?xml version="1.0" encoding="utf-8"?>
 <p:sldLayout xmlns:a="http://schemas.openxmlformats.org/drawingml/2006/main" xmlns:p="http://schemas.openxmlformats.org/presentationml/2006/main" xmlns:r="http://schemas.openxmlformats.org/officeDocument/2006/relationships" xmlns:p14="http://schemas.microsoft.com/office/powerpoint/2010/main" xmlns:p15="http://schemas.microsoft.com/office/powerpoint/2012/main" xmlns:mc="http://schemas.openxmlformats.org/markup-compatibility/2006" type="obj" preserve="1">
   <p:cSld name="Title and Content">
     <p:bg>
@@ -3220,7 +6030,7 @@
       </p:grpSpPr>
       <p:sp>
         <p:nvSpPr>
-          <p:cNvPr id="17" name="PlaceHolder 1"/>
+          <p:cNvPr id="34" name="PlaceHolder 1"/>
           <p:cNvSpPr>
             <a:spLocks noGrp="1"/>
           </p:cNvSpPr>
@@ -3231,7 +6041,7 @@
         <p:spPr>
           <a:xfrm>
             <a:off x="628560" y="273960"/>
-            <a:ext cx="7886520" cy="993960"/>
+            <a:ext cx="7886160" cy="993600"/>
           </a:xfrm>
           <a:prstGeom prst="rect">
             <a:avLst/>
@@ -3251,6 +6061,9 @@
                 <a:spcPct val="90000"/>
               </a:lnSpc>
               <a:buNone/>
+              <a:tabLst>
+                <a:tab pos="0" algn="l"/>
+              </a:tabLst>
               <a:defRPr lang="en-US" sz="3300" b="0" u="none" strike="noStrike">
                 <a:solidFill>
                   <a:schemeClr val="dk1"/>
@@ -3267,6 +6080,9 @@
                 <a:spcPct val="90000"/>
               </a:lnSpc>
               <a:buNone/>
+              <a:tabLst>
+                <a:tab pos="0" algn="l"/>
+              </a:tabLst>
             </a:pPr>
             <a:r>
               <a:rPr lang="en-US" sz="3300" b="0" u="none" strike="noStrike">
@@ -3292,7 +6108,7 @@
       </p:sp>
       <p:sp>
         <p:nvSpPr>
-          <p:cNvPr id="18" name="PlaceHolder 2"/>
+          <p:cNvPr id="35" name="PlaceHolder 2"/>
           <p:cNvSpPr>
             <a:spLocks noGrp="1"/>
           </p:cNvSpPr>
@@ -3303,7 +6119,7 @@
         <p:spPr>
           <a:xfrm>
             <a:off x="628560" y="1369080"/>
-            <a:ext cx="7886520" cy="3263040"/>
+            <a:ext cx="7886160" cy="3262680"/>
           </a:xfrm>
           <a:prstGeom prst="rect">
             <a:avLst/>
@@ -3598,18 +6414,18 @@
       </p:sp>
       <p:sp>
         <p:nvSpPr>
-          <p:cNvPr id="19" name="PlaceHolder 3"/>
+          <p:cNvPr id="36" name="PlaceHolder 3"/>
           <p:cNvSpPr>
             <a:spLocks noGrp="1"/>
           </p:cNvSpPr>
           <p:nvPr>
-            <p:ph type="dt" idx="10"/>
+            <p:ph type="dt" idx="19"/>
           </p:nvPr>
         </p:nvSpPr>
         <p:spPr>
           <a:xfrm>
             <a:off x="628560" y="4767120"/>
-            <a:ext cx="2057040" cy="273600"/>
+            <a:ext cx="2056680" cy="273240"/>
           </a:xfrm>
           <a:prstGeom prst="rect">
             <a:avLst/>
@@ -3629,6 +6445,9 @@
                 <a:spcPct val="100000"/>
               </a:lnSpc>
               <a:buNone/>
+              <a:tabLst>
+                <a:tab pos="0" algn="l"/>
+              </a:tabLst>
               <a:defRPr lang="en-IN" sz="900" b="0" u="none" strike="noStrike">
                 <a:solidFill>
                   <a:schemeClr val="dk1">
@@ -3647,6 +6466,9 @@
                 <a:spcPct val="100000"/>
               </a:lnSpc>
               <a:buNone/>
+              <a:tabLst>
+                <a:tab pos="0" algn="l"/>
+              </a:tabLst>
             </a:pPr>
             <a:r>
               <a:rPr lang="en-IN" sz="900" b="0" u="none" strike="noStrike">
@@ -3674,18 +6496,18 @@
       </p:sp>
       <p:sp>
         <p:nvSpPr>
-          <p:cNvPr id="20" name="PlaceHolder 4"/>
+          <p:cNvPr id="37" name="PlaceHolder 4"/>
           <p:cNvSpPr>
             <a:spLocks noGrp="1"/>
           </p:cNvSpPr>
           <p:nvPr>
-            <p:ph type="ftr" idx="11"/>
+            <p:ph type="ftr" idx="20"/>
           </p:nvPr>
         </p:nvSpPr>
         <p:spPr>
           <a:xfrm>
             <a:off x="3029040" y="4767120"/>
-            <a:ext cx="3085920" cy="273600"/>
+            <a:ext cx="3085560" cy="273240"/>
           </a:xfrm>
           <a:prstGeom prst="rect">
             <a:avLst/>
@@ -3701,7 +6523,13 @@
           </a:bodyPr>
           <a:lstStyle>
             <a:lvl1pPr indent="0" algn="ctr">
+              <a:lnSpc>
+                <a:spcPct val="100000"/>
+              </a:lnSpc>
               <a:buNone/>
+              <a:tabLst>
+                <a:tab pos="0" algn="l"/>
+              </a:tabLst>
               <a:defRPr lang="en-US" sz="1400" b="0" u="none" strike="noStrike">
                 <a:solidFill>
                   <a:srgbClr val="000000"/>
@@ -3714,7 +6542,13 @@
           </a:lstStyle>
           <a:p>
             <a:pPr indent="0" algn="ctr">
+              <a:lnSpc>
+                <a:spcPct val="100000"/>
+              </a:lnSpc>
               <a:buNone/>
+              <a:tabLst>
+                <a:tab pos="0" algn="l"/>
+              </a:tabLst>
             </a:pPr>
             <a:r>
               <a:rPr lang="en-US" sz="1400" b="0" u="none" strike="noStrike">
@@ -3740,18 +6574,18 @@
       </p:sp>
       <p:sp>
         <p:nvSpPr>
-          <p:cNvPr id="21" name="PlaceHolder 5"/>
+          <p:cNvPr id="38" name="PlaceHolder 5"/>
           <p:cNvSpPr>
             <a:spLocks noGrp="1"/>
           </p:cNvSpPr>
           <p:nvPr>
-            <p:ph type="sldNum" idx="12"/>
+            <p:ph type="sldNum" idx="21"/>
           </p:nvPr>
         </p:nvSpPr>
         <p:spPr>
           <a:xfrm>
             <a:off x="6458040" y="4767120"/>
-            <a:ext cx="2057040" cy="273600"/>
+            <a:ext cx="2056680" cy="273240"/>
           </a:xfrm>
           <a:prstGeom prst="rect">
             <a:avLst/>
@@ -3771,6 +6605,9 @@
                 <a:spcPct val="100000"/>
               </a:lnSpc>
               <a:buNone/>
+              <a:tabLst>
+                <a:tab pos="0" algn="l"/>
+              </a:tabLst>
               <a:defRPr lang="en-IN" sz="900" b="0" u="none" strike="noStrike">
                 <a:solidFill>
                   <a:schemeClr val="dk1">
@@ -3789,8 +6626,11 @@
                 <a:spcPct val="100000"/>
               </a:lnSpc>
               <a:buNone/>
-            </a:pPr>
-            <a:fld id="{0C50A3A7-3A43-4AC4-B5BB-B40713D7A461}" type="slidenum">
+              <a:tabLst>
+                <a:tab pos="0" algn="l"/>
+              </a:tabLst>
+            </a:pPr>
+            <a:fld id="{57F3E23A-A2F1-4FB6-A80A-0615FD9A85AB}" type="slidenum">
               <a:rPr lang="en-IN" sz="900" b="0" u="none" strike="noStrike">
                 <a:solidFill>
                   <a:schemeClr val="dk1">
@@ -3822,7 +6662,7 @@
 </p:sldLayout>
 </file>
 
-<file path=ppt/slideLayouts/slideLayout5.xml><?xml version="1.0" encoding="utf-8"?>
+<file path=ppt/slideLayouts/slideLayout8.xml><?xml version="1.0" encoding="utf-8"?>
 <p:sldLayout xmlns:a="http://schemas.openxmlformats.org/drawingml/2006/main" xmlns:p="http://schemas.openxmlformats.org/presentationml/2006/main" xmlns:r="http://schemas.openxmlformats.org/officeDocument/2006/relationships" xmlns:p14="http://schemas.microsoft.com/office/powerpoint/2010/main" xmlns:p15="http://schemas.microsoft.com/office/powerpoint/2012/main" xmlns:mc="http://schemas.openxmlformats.org/markup-compatibility/2006" type="blank" preserve="1">
   <p:cSld name="Section Header">
     <p:bg>
@@ -3848,7 +6688,7 @@
       </p:grpSpPr>
       <p:sp>
         <p:nvSpPr>
-          <p:cNvPr id="22" name="PlaceHolder 1"/>
+          <p:cNvPr id="39" name="PlaceHolder 1"/>
           <p:cNvSpPr>
             <a:spLocks noGrp="1"/>
           </p:cNvSpPr>
@@ -3859,7 +6699,7 @@
         <p:spPr>
           <a:xfrm>
             <a:off x="623880" y="1282320"/>
-            <a:ext cx="7886520" cy="2139120"/>
+            <a:ext cx="7886160" cy="2138760"/>
           </a:xfrm>
           <a:prstGeom prst="rect">
             <a:avLst/>
@@ -3879,6 +6719,9 @@
                 <a:spcPct val="90000"/>
               </a:lnSpc>
               <a:buNone/>
+              <a:tabLst>
+                <a:tab pos="0" algn="l"/>
+              </a:tabLst>
               <a:defRPr lang="en-US" sz="4500" b="0" u="none" strike="noStrike">
                 <a:solidFill>
                   <a:schemeClr val="dk1"/>
@@ -3895,6 +6738,9 @@
                 <a:spcPct val="90000"/>
               </a:lnSpc>
               <a:buNone/>
+              <a:tabLst>
+                <a:tab pos="0" algn="l"/>
+              </a:tabLst>
             </a:pPr>
             <a:r>
               <a:rPr lang="en-US" sz="4500" b="0" u="none" strike="noStrike">
@@ -3920,7 +6766,7 @@
       </p:sp>
       <p:sp>
         <p:nvSpPr>
-          <p:cNvPr id="23" name="PlaceHolder 2"/>
+          <p:cNvPr id="40" name="PlaceHolder 2"/>
           <p:cNvSpPr>
             <a:spLocks noGrp="1"/>
           </p:cNvSpPr>
@@ -3931,7 +6777,7 @@
         <p:spPr>
           <a:xfrm>
             <a:off x="623880" y="3441960"/>
-            <a:ext cx="7886520" cy="1124640"/>
+            <a:ext cx="7886160" cy="1124280"/>
           </a:xfrm>
           <a:prstGeom prst="rect">
             <a:avLst/>
@@ -4010,18 +6856,18 @@
       </p:sp>
       <p:sp>
         <p:nvSpPr>
-          <p:cNvPr id="24" name="PlaceHolder 3"/>
+          <p:cNvPr id="41" name="PlaceHolder 3"/>
           <p:cNvSpPr>
             <a:spLocks noGrp="1"/>
           </p:cNvSpPr>
           <p:nvPr>
-            <p:ph type="dt" idx="13"/>
+            <p:ph type="dt" idx="22"/>
           </p:nvPr>
         </p:nvSpPr>
         <p:spPr>
           <a:xfrm>
             <a:off x="628560" y="4767120"/>
-            <a:ext cx="2057040" cy="273600"/>
+            <a:ext cx="2056680" cy="273240"/>
           </a:xfrm>
           <a:prstGeom prst="rect">
             <a:avLst/>
@@ -4041,6 +6887,9 @@
                 <a:spcPct val="100000"/>
               </a:lnSpc>
               <a:buNone/>
+              <a:tabLst>
+                <a:tab pos="0" algn="l"/>
+              </a:tabLst>
               <a:defRPr lang="en-IN" sz="900" b="0" u="none" strike="noStrike">
                 <a:solidFill>
                   <a:schemeClr val="dk1">
@@ -4059,6 +6908,9 @@
                 <a:spcPct val="100000"/>
               </a:lnSpc>
               <a:buNone/>
+              <a:tabLst>
+                <a:tab pos="0" algn="l"/>
+              </a:tabLst>
             </a:pPr>
             <a:r>
               <a:rPr lang="en-IN" sz="900" b="0" u="none" strike="noStrike">
@@ -4086,18 +6938,18 @@
       </p:sp>
       <p:sp>
         <p:nvSpPr>
-          <p:cNvPr id="25" name="PlaceHolder 4"/>
+          <p:cNvPr id="42" name="PlaceHolder 4"/>
           <p:cNvSpPr>
             <a:spLocks noGrp="1"/>
           </p:cNvSpPr>
           <p:nvPr>
-            <p:ph type="ftr" idx="14"/>
+            <p:ph type="ftr" idx="23"/>
           </p:nvPr>
         </p:nvSpPr>
         <p:spPr>
           <a:xfrm>
             <a:off x="3029040" y="4767120"/>
-            <a:ext cx="3085920" cy="273600"/>
+            <a:ext cx="3085560" cy="273240"/>
           </a:xfrm>
           <a:prstGeom prst="rect">
             <a:avLst/>
@@ -4113,7 +6965,13 @@
           </a:bodyPr>
           <a:lstStyle>
             <a:lvl1pPr indent="0" algn="ctr">
+              <a:lnSpc>
+                <a:spcPct val="100000"/>
+              </a:lnSpc>
               <a:buNone/>
+              <a:tabLst>
+                <a:tab pos="0" algn="l"/>
+              </a:tabLst>
               <a:defRPr lang="en-US" sz="1400" b="0" u="none" strike="noStrike">
                 <a:solidFill>
                   <a:srgbClr val="000000"/>
@@ -4126,7 +6984,13 @@
           </a:lstStyle>
           <a:p>
             <a:pPr indent="0" algn="ctr">
+              <a:lnSpc>
+                <a:spcPct val="100000"/>
+              </a:lnSpc>
               <a:buNone/>
+              <a:tabLst>
+                <a:tab pos="0" algn="l"/>
+              </a:tabLst>
             </a:pPr>
             <a:r>
               <a:rPr lang="en-US" sz="1400" b="0" u="none" strike="noStrike">
@@ -4152,18 +7016,18 @@
       </p:sp>
       <p:sp>
         <p:nvSpPr>
-          <p:cNvPr id="26" name="PlaceHolder 5"/>
+          <p:cNvPr id="43" name="PlaceHolder 5"/>
           <p:cNvSpPr>
             <a:spLocks noGrp="1"/>
           </p:cNvSpPr>
           <p:nvPr>
-            <p:ph type="sldNum" idx="15"/>
+            <p:ph type="sldNum" idx="24"/>
           </p:nvPr>
         </p:nvSpPr>
         <p:spPr>
           <a:xfrm>
             <a:off x="6458040" y="4767120"/>
-            <a:ext cx="2057040" cy="273600"/>
+            <a:ext cx="2056680" cy="273240"/>
           </a:xfrm>
           <a:prstGeom prst="rect">
             <a:avLst/>
@@ -4183,6 +7047,9 @@
                 <a:spcPct val="100000"/>
               </a:lnSpc>
               <a:buNone/>
+              <a:tabLst>
+                <a:tab pos="0" algn="l"/>
+              </a:tabLst>
               <a:defRPr lang="en-IN" sz="900" b="0" u="none" strike="noStrike">
                 <a:solidFill>
                   <a:schemeClr val="dk1">
@@ -4201,8 +7068,11 @@
                 <a:spcPct val="100000"/>
               </a:lnSpc>
               <a:buNone/>
-            </a:pPr>
-            <a:fld id="{ADC5D9CD-4786-49BF-9211-6FFE7A02F9C9}" type="slidenum">
+              <a:tabLst>
+                <a:tab pos="0" algn="l"/>
+              </a:tabLst>
+            </a:pPr>
+            <a:fld id="{686250ED-6B47-4950-8727-E2D3622F82C3}" type="slidenum">
               <a:rPr lang="en-IN" sz="900" b="0" u="none" strike="noStrike">
                 <a:solidFill>
                   <a:schemeClr val="dk1">
@@ -4234,7 +7104,7 @@
 </p:sldLayout>
 </file>
 
-<file path=ppt/slideLayouts/slideLayout6.xml><?xml version="1.0" encoding="utf-8"?>
+<file path=ppt/slideLayouts/slideLayout9.xml><?xml version="1.0" encoding="utf-8"?>
 <p:sldLayout xmlns:a="http://schemas.openxmlformats.org/drawingml/2006/main" xmlns:p="http://schemas.openxmlformats.org/presentationml/2006/main" xmlns:r="http://schemas.openxmlformats.org/officeDocument/2006/relationships" xmlns:p14="http://schemas.microsoft.com/office/powerpoint/2010/main" xmlns:p15="http://schemas.microsoft.com/office/powerpoint/2012/main" xmlns:mc="http://schemas.openxmlformats.org/markup-compatibility/2006" type="twoObj" preserve="1">
   <p:cSld name="Two Content">
     <p:bg>
@@ -4260,7 +7130,7 @@
       </p:grpSpPr>
       <p:sp>
         <p:nvSpPr>
-          <p:cNvPr id="27" name="PlaceHolder 1"/>
+          <p:cNvPr id="44" name="PlaceHolder 1"/>
           <p:cNvSpPr>
             <a:spLocks noGrp="1"/>
           </p:cNvSpPr>
@@ -4271,7 +7141,7 @@
         <p:spPr>
           <a:xfrm>
             <a:off x="628560" y="273960"/>
-            <a:ext cx="7886520" cy="993960"/>
+            <a:ext cx="7886160" cy="993600"/>
           </a:xfrm>
           <a:prstGeom prst="rect">
             <a:avLst/>
@@ -4291,6 +7161,9 @@
                 <a:spcPct val="90000"/>
               </a:lnSpc>
               <a:buNone/>
+              <a:tabLst>
+                <a:tab pos="0" algn="l"/>
+              </a:tabLst>
               <a:defRPr lang="en-US" sz="3300" b="0" u="none" strike="noStrike">
                 <a:solidFill>
                   <a:schemeClr val="dk1"/>
@@ -4307,6 +7180,9 @@
                 <a:spcPct val="90000"/>
               </a:lnSpc>
               <a:buNone/>
+              <a:tabLst>
+                <a:tab pos="0" algn="l"/>
+              </a:tabLst>
             </a:pPr>
             <a:r>
               <a:rPr lang="en-US" sz="3300" b="0" u="none" strike="noStrike">
@@ -4332,7 +7208,7 @@
       </p:sp>
       <p:sp>
         <p:nvSpPr>
-          <p:cNvPr id="28" name="PlaceHolder 2"/>
+          <p:cNvPr id="45" name="PlaceHolder 2"/>
           <p:cNvSpPr>
             <a:spLocks noGrp="1"/>
           </p:cNvSpPr>
@@ -4343,7 +7219,7 @@
         <p:spPr>
           <a:xfrm>
             <a:off x="628560" y="1369080"/>
-            <a:ext cx="3885840" cy="3263040"/>
+            <a:ext cx="3885480" cy="3262680"/>
           </a:xfrm>
           <a:prstGeom prst="rect">
             <a:avLst/>
@@ -4638,7 +7514,7 @@
       </p:sp>
       <p:sp>
         <p:nvSpPr>
-          <p:cNvPr id="29" name="PlaceHolder 3"/>
+          <p:cNvPr id="46" name="PlaceHolder 3"/>
           <p:cNvSpPr>
             <a:spLocks noGrp="1"/>
           </p:cNvSpPr>
@@ -4649,7 +7525,7 @@
         <p:spPr>
           <a:xfrm>
             <a:off x="4629240" y="1369080"/>
-            <a:ext cx="3885840" cy="3263040"/>
+            <a:ext cx="3885480" cy="3262680"/>
           </a:xfrm>
           <a:prstGeom prst="rect">
             <a:avLst/>
@@ -4944,18 +7820,18 @@
       </p:sp>
       <p:sp>
         <p:nvSpPr>
-          <p:cNvPr id="30" name="PlaceHolder 4"/>
+          <p:cNvPr id="47" name="PlaceHolder 4"/>
           <p:cNvSpPr>
             <a:spLocks noGrp="1"/>
           </p:cNvSpPr>
           <p:nvPr>
-            <p:ph type="dt" idx="16"/>
+            <p:ph type="dt" idx="25"/>
           </p:nvPr>
         </p:nvSpPr>
         <p:spPr>
           <a:xfrm>
             <a:off x="628560" y="4767120"/>
-            <a:ext cx="2057040" cy="273600"/>
+            <a:ext cx="2056680" cy="273240"/>
           </a:xfrm>
           <a:prstGeom prst="rect">
             <a:avLst/>
@@ -4975,6 +7851,9 @@
                 <a:spcPct val="100000"/>
               </a:lnSpc>
               <a:buNone/>
+              <a:tabLst>
+                <a:tab pos="0" algn="l"/>
+              </a:tabLst>
               <a:defRPr lang="en-IN" sz="900" b="0" u="none" strike="noStrike">
                 <a:solidFill>
                   <a:schemeClr val="dk1">
@@ -4993,6 +7872,9 @@
                 <a:spcPct val="100000"/>
               </a:lnSpc>
               <a:buNone/>
+              <a:tabLst>
+                <a:tab pos="0" algn="l"/>
+              </a:tabLst>
             </a:pPr>
             <a:r>
               <a:rPr lang="en-IN" sz="900" b="0" u="none" strike="noStrike">
@@ -5020,18 +7902,18 @@
       </p:sp>
       <p:sp>
         <p:nvSpPr>
-          <p:cNvPr id="31" name="PlaceHolder 5"/>
+          <p:cNvPr id="48" name="PlaceHolder 5"/>
           <p:cNvSpPr>
             <a:spLocks noGrp="1"/>
           </p:cNvSpPr>
           <p:nvPr>
-            <p:ph type="ftr" idx="17"/>
+            <p:ph type="ftr" idx="26"/>
           </p:nvPr>
         </p:nvSpPr>
         <p:spPr>
           <a:xfrm>
             <a:off x="3029040" y="4767120"/>
-            <a:ext cx="3085920" cy="273600"/>
+            <a:ext cx="3085560" cy="273240"/>
           </a:xfrm>
           <a:prstGeom prst="rect">
             <a:avLst/>
@@ -5047,7 +7929,13 @@
           </a:bodyPr>
           <a:lstStyle>
             <a:lvl1pPr indent="0" algn="ctr">
+              <a:lnSpc>
+                <a:spcPct val="100000"/>
+              </a:lnSpc>
               <a:buNone/>
+              <a:tabLst>
+                <a:tab pos="0" algn="l"/>
+              </a:tabLst>
               <a:defRPr lang="en-US" sz="1400" b="0" u="none" strike="noStrike">
                 <a:solidFill>
                   <a:srgbClr val="000000"/>
@@ -5060,7 +7948,13 @@
           </a:lstStyle>
           <a:p>
             <a:pPr indent="0" algn="ctr">
+              <a:lnSpc>
+                <a:spcPct val="100000"/>
+              </a:lnSpc>
               <a:buNone/>
+              <a:tabLst>
+                <a:tab pos="0" algn="l"/>
+              </a:tabLst>
             </a:pPr>
             <a:r>
               <a:rPr lang="en-US" sz="1400" b="0" u="none" strike="noStrike">
@@ -5086,18 +7980,18 @@
       </p:sp>
       <p:sp>
         <p:nvSpPr>
-          <p:cNvPr id="32" name="PlaceHolder 6"/>
+          <p:cNvPr id="49" name="PlaceHolder 6"/>
           <p:cNvSpPr>
             <a:spLocks noGrp="1"/>
           </p:cNvSpPr>
           <p:nvPr>
-            <p:ph type="sldNum" idx="18"/>
+            <p:ph type="sldNum" idx="27"/>
           </p:nvPr>
         </p:nvSpPr>
         <p:spPr>
           <a:xfrm>
             <a:off x="6458040" y="4767120"/>
-            <a:ext cx="2057040" cy="273600"/>
+            <a:ext cx="2056680" cy="273240"/>
           </a:xfrm>
           <a:prstGeom prst="rect">
             <a:avLst/>
@@ -5117,6 +8011,9 @@
                 <a:spcPct val="100000"/>
               </a:lnSpc>
               <a:buNone/>
+              <a:tabLst>
+                <a:tab pos="0" algn="l"/>
+              </a:tabLst>
               <a:defRPr lang="en-IN" sz="900" b="0" u="none" strike="noStrike">
                 <a:solidFill>
                   <a:schemeClr val="dk1">
@@ -5135,1742 +8032,11 @@
                 <a:spcPct val="100000"/>
               </a:lnSpc>
               <a:buNone/>
-            </a:pPr>
-            <a:fld id="{1AA17973-EA05-406A-9FB4-D6FC0D042690}" type="slidenum">
-              <a:rPr lang="en-IN" sz="900" b="0" u="none" strike="noStrike">
-                <a:solidFill>
-                  <a:schemeClr val="dk1">
-                    <a:tint val="75000"/>
-                  </a:schemeClr>
-                </a:solidFill>
-                <a:effectLst/>
-                <a:uFillTx/>
-                <a:latin typeface="Calibri"/>
-              </a:rPr>
-              <a:t>&lt;number&gt;</a:t>
-            </a:fld>
-            <a:endParaRPr lang="en-US" sz="900" b="0" u="none" strike="noStrike">
-              <a:solidFill>
-                <a:srgbClr val="000000"/>
-              </a:solidFill>
-              <a:effectLst/>
-              <a:uFillTx/>
-              <a:latin typeface="Times New Roman"/>
-            </a:endParaRPr>
-          </a:p>
-        </p:txBody>
-      </p:sp>
-    </p:spTree>
-  </p:cSld>
-  <p:clrMapOvr>
-    <a:masterClrMapping/>
-  </p:clrMapOvr>
-</p:sldLayout>
-</file>
-
-<file path=ppt/slideLayouts/slideLayout7.xml><?xml version="1.0" encoding="utf-8"?>
-<p:sldLayout xmlns:a="http://schemas.openxmlformats.org/drawingml/2006/main" xmlns:p="http://schemas.openxmlformats.org/presentationml/2006/main" xmlns:r="http://schemas.openxmlformats.org/officeDocument/2006/relationships" xmlns:p14="http://schemas.microsoft.com/office/powerpoint/2010/main" xmlns:p15="http://schemas.microsoft.com/office/powerpoint/2012/main" xmlns:mc="http://schemas.openxmlformats.org/markup-compatibility/2006" type="blank" preserve="1">
-  <p:cSld name="Comparison">
-    <p:bg>
-      <p:bgPr>
-        <a:solidFill>
-          <a:srgbClr val="FFFFFF"/>
-        </a:solidFill>
-      </p:bgPr>
-    </p:bg>
-    <p:spTree>
-      <p:nvGrpSpPr>
-        <p:cNvPr id="1" name=""/>
-        <p:cNvGrpSpPr/>
-        <p:nvPr/>
-      </p:nvGrpSpPr>
-      <p:grpSpPr>
-        <a:xfrm>
-          <a:off x="0" y="0"/>
-          <a:ext cx="0" cy="0"/>
-          <a:chOff x="0" y="0"/>
-          <a:chExt cx="0" cy="0"/>
-        </a:xfrm>
-      </p:grpSpPr>
-      <p:sp>
-        <p:nvSpPr>
-          <p:cNvPr id="33" name="PlaceHolder 1"/>
-          <p:cNvSpPr>
-            <a:spLocks noGrp="1"/>
-          </p:cNvSpPr>
-          <p:nvPr>
-            <p:ph type="title"/>
-          </p:nvPr>
-        </p:nvSpPr>
-        <p:spPr>
-          <a:xfrm>
-            <a:off x="630000" y="273960"/>
-            <a:ext cx="7886520" cy="993960"/>
-          </a:xfrm>
-          <a:prstGeom prst="rect">
-            <a:avLst/>
-          </a:prstGeom>
-          <a:noFill/>
-          <a:ln w="0">
-            <a:noFill/>
-          </a:ln>
-        </p:spPr>
-        <p:txBody>
-          <a:bodyPr lIns="91440" tIns="45720" rIns="91440" bIns="45720" anchor="ctr">
-            <a:noAutofit/>
-          </a:bodyPr>
-          <a:lstStyle>
-            <a:lvl1pPr indent="0" algn="l" defTabSz="685800">
-              <a:lnSpc>
-                <a:spcPct val="90000"/>
-              </a:lnSpc>
-              <a:buNone/>
-              <a:defRPr lang="en-US" sz="3300" b="0" u="none" strike="noStrike">
-                <a:solidFill>
-                  <a:schemeClr val="dk1"/>
-                </a:solidFill>
-                <a:effectLst/>
-                <a:uFillTx/>
-                <a:latin typeface="Calibri Light"/>
-              </a:defRPr>
-            </a:lvl1pPr>
-          </a:lstStyle>
-          <a:p>
-            <a:pPr indent="0" algn="l" defTabSz="685800">
-              <a:lnSpc>
-                <a:spcPct val="90000"/>
-              </a:lnSpc>
-              <a:buNone/>
-            </a:pPr>
-            <a:r>
-              <a:rPr lang="en-US" sz="3300" b="0" u="none" strike="noStrike">
-                <a:solidFill>
-                  <a:schemeClr val="dk1"/>
-                </a:solidFill>
-                <a:effectLst/>
-                <a:uFillTx/>
-                <a:latin typeface="Calibri Light"/>
-              </a:rPr>
-              <a:t>Click to edit Master title style</a:t>
-            </a:r>
-            <a:endParaRPr lang="en-US" sz="3300" b="0" u="none" strike="noStrike">
-              <a:solidFill>
-                <a:schemeClr val="dk1"/>
-              </a:solidFill>
-              <a:effectLst/>
-              <a:uFillTx/>
-              <a:latin typeface="Calibri Light"/>
-            </a:endParaRPr>
-          </a:p>
-        </p:txBody>
-      </p:sp>
-      <p:sp>
-        <p:nvSpPr>
-          <p:cNvPr id="34" name="PlaceHolder 2"/>
-          <p:cNvSpPr>
-            <a:spLocks noGrp="1"/>
-          </p:cNvSpPr>
-          <p:nvPr>
-            <p:ph type="body"/>
-          </p:nvPr>
-        </p:nvSpPr>
-        <p:spPr>
-          <a:xfrm>
-            <a:off x="630000" y="1260720"/>
-            <a:ext cx="3867840" cy="617400"/>
-          </a:xfrm>
-          <a:prstGeom prst="rect">
-            <a:avLst/>
-          </a:prstGeom>
-          <a:noFill/>
-          <a:ln w="0">
-            <a:noFill/>
-          </a:ln>
-        </p:spPr>
-        <p:txBody>
-          <a:bodyPr lIns="91440" tIns="45720" rIns="91440" bIns="45720" anchor="b">
-            <a:noAutofit/>
-          </a:bodyPr>
-          <a:lstStyle>
-            <a:lvl1pPr indent="0" algn="l" defTabSz="685800">
-              <a:lnSpc>
-                <a:spcPct val="90000"/>
-              </a:lnSpc>
-              <a:spcBef>
-                <a:spcPts val="751"/>
-              </a:spcBef>
-              <a:buNone/>
-              <a:tabLst>
-                <a:tab pos="0" algn="l"/>
-              </a:tabLst>
-              <a:defRPr lang="en-US" sz="1800" b="1" u="none" strike="noStrike">
-                <a:solidFill>
-                  <a:schemeClr val="dk1"/>
-                </a:solidFill>
-                <a:effectLst/>
-                <a:uFillTx/>
-                <a:latin typeface="Calibri"/>
-              </a:defRPr>
-            </a:lvl1pPr>
-          </a:lstStyle>
-          <a:p>
-            <a:pPr indent="0" algn="l" defTabSz="685800">
-              <a:lnSpc>
-                <a:spcPct val="90000"/>
-              </a:lnSpc>
-              <a:spcBef>
-                <a:spcPts val="751"/>
-              </a:spcBef>
-              <a:buNone/>
-              <a:tabLst>
-                <a:tab pos="0" algn="l"/>
-              </a:tabLst>
-            </a:pPr>
-            <a:r>
-              <a:rPr lang="en-US" sz="1800" b="1" u="none" strike="noStrike">
-                <a:solidFill>
-                  <a:schemeClr val="dk1"/>
-                </a:solidFill>
-                <a:effectLst/>
-                <a:uFillTx/>
-                <a:latin typeface="Calibri"/>
-              </a:rPr>
-              <a:t>Edit Master text styles</a:t>
-            </a:r>
-            <a:endParaRPr lang="en-US" sz="1800" b="0" u="none" strike="noStrike">
-              <a:solidFill>
-                <a:schemeClr val="dk1"/>
-              </a:solidFill>
-              <a:effectLst/>
-              <a:uFillTx/>
-              <a:latin typeface="Calibri"/>
-            </a:endParaRPr>
-          </a:p>
-        </p:txBody>
-      </p:sp>
-      <p:sp>
-        <p:nvSpPr>
-          <p:cNvPr id="35" name="PlaceHolder 3"/>
-          <p:cNvSpPr>
-            <a:spLocks noGrp="1"/>
-          </p:cNvSpPr>
-          <p:nvPr>
-            <p:ph type="body"/>
-          </p:nvPr>
-        </p:nvSpPr>
-        <p:spPr>
-          <a:xfrm>
-            <a:off x="630000" y="1878840"/>
-            <a:ext cx="3867840" cy="2763000"/>
-          </a:xfrm>
-          <a:prstGeom prst="rect">
-            <a:avLst/>
-          </a:prstGeom>
-          <a:noFill/>
-          <a:ln w="0">
-            <a:noFill/>
-          </a:ln>
-        </p:spPr>
-        <p:txBody>
-          <a:bodyPr lIns="91440" tIns="45720" rIns="91440" bIns="45720" anchor="t">
-            <a:noAutofit/>
-          </a:bodyPr>
-          <a:lstStyle>
-            <a:lvl1pPr algn="l" defTabSz="685800">
-              <a:lnSpc>
-                <a:spcPct val="90000"/>
-              </a:lnSpc>
-              <a:spcBef>
-                <a:spcPts val="751"/>
-              </a:spcBef>
-              <a:buClr>
-                <a:srgbClr val="000000"/>
-              </a:buClr>
-              <a:buFont typeface="Arial"/>
-              <a:buChar char="•"/>
-              <a:tabLst>
-                <a:tab pos="0" algn="l"/>
-              </a:tabLst>
-              <a:defRPr lang="en-US" sz="2100" b="0" u="none" strike="noStrike">
-                <a:solidFill>
-                  <a:schemeClr val="dk1"/>
-                </a:solidFill>
-                <a:effectLst/>
-                <a:uFillTx/>
-                <a:latin typeface="Calibri"/>
-              </a:defRPr>
-            </a:lvl1pPr>
-            <a:lvl2pPr lvl="1" algn="l" defTabSz="685800">
-              <a:lnSpc>
-                <a:spcPct val="90000"/>
-              </a:lnSpc>
-              <a:spcBef>
-                <a:spcPts val="374"/>
-              </a:spcBef>
-              <a:buClr>
-                <a:srgbClr val="000000"/>
-              </a:buClr>
-              <a:buFont typeface="Arial"/>
-              <a:buChar char="•"/>
-              <a:tabLst>
-                <a:tab pos="0" algn="l"/>
-              </a:tabLst>
-              <a:defRPr lang="en-US" sz="1800" b="0" u="none" strike="noStrike">
-                <a:solidFill>
-                  <a:schemeClr val="dk1"/>
-                </a:solidFill>
-                <a:effectLst/>
-                <a:uFillTx/>
-                <a:latin typeface="Calibri"/>
-              </a:defRPr>
-            </a:lvl2pPr>
-            <a:lvl3pPr lvl="2" algn="l" defTabSz="685800">
-              <a:lnSpc>
-                <a:spcPct val="90000"/>
-              </a:lnSpc>
-              <a:spcBef>
-                <a:spcPts val="374"/>
-              </a:spcBef>
-              <a:buClr>
-                <a:srgbClr val="000000"/>
-              </a:buClr>
-              <a:buFont typeface="Arial"/>
-              <a:buChar char="•"/>
-              <a:tabLst>
-                <a:tab pos="0" algn="l"/>
-              </a:tabLst>
-              <a:defRPr lang="en-US" sz="1500" b="0" u="none" strike="noStrike">
-                <a:solidFill>
-                  <a:schemeClr val="dk1"/>
-                </a:solidFill>
-                <a:effectLst/>
-                <a:uFillTx/>
-                <a:latin typeface="Calibri"/>
-              </a:defRPr>
-            </a:lvl3pPr>
-            <a:lvl4pPr lvl="3" algn="l" defTabSz="685800">
-              <a:lnSpc>
-                <a:spcPct val="90000"/>
-              </a:lnSpc>
-              <a:spcBef>
-                <a:spcPts val="374"/>
-              </a:spcBef>
-              <a:buClr>
-                <a:srgbClr val="000000"/>
-              </a:buClr>
-              <a:buFont typeface="Arial"/>
-              <a:buChar char="•"/>
-              <a:tabLst>
-                <a:tab pos="0" algn="l"/>
-              </a:tabLst>
-              <a:defRPr lang="en-US" sz="1350" b="0" u="none" strike="noStrike">
-                <a:solidFill>
-                  <a:schemeClr val="dk1"/>
-                </a:solidFill>
-                <a:effectLst/>
-                <a:uFillTx/>
-                <a:latin typeface="Calibri"/>
-              </a:defRPr>
-            </a:lvl4pPr>
-            <a:lvl5pPr lvl="4" algn="l" defTabSz="685800">
-              <a:lnSpc>
-                <a:spcPct val="90000"/>
-              </a:lnSpc>
-              <a:spcBef>
-                <a:spcPts val="374"/>
-              </a:spcBef>
-              <a:buClr>
-                <a:srgbClr val="000000"/>
-              </a:buClr>
-              <a:buFont typeface="Arial"/>
-              <a:buChar char="•"/>
-              <a:tabLst>
-                <a:tab pos="0" algn="l"/>
-              </a:tabLst>
-              <a:defRPr lang="en-US" sz="1350" b="0" u="none" strike="noStrike">
-                <a:solidFill>
-                  <a:schemeClr val="dk1"/>
-                </a:solidFill>
-                <a:effectLst/>
-                <a:uFillTx/>
-                <a:latin typeface="Calibri"/>
-              </a:defRPr>
-            </a:lvl5pPr>
-          </a:lstStyle>
-          <a:p>
-            <a:pPr marL="171360" indent="-171360" algn="l" defTabSz="685800">
-              <a:lnSpc>
-                <a:spcPct val="90000"/>
-              </a:lnSpc>
-              <a:spcBef>
-                <a:spcPts val="751"/>
-              </a:spcBef>
-              <a:buClr>
-                <a:srgbClr val="000000"/>
-              </a:buClr>
-              <a:buFont typeface="Arial"/>
-              <a:buChar char="•"/>
-              <a:tabLst>
-                <a:tab pos="0" algn="l"/>
-              </a:tabLst>
-            </a:pPr>
-            <a:r>
-              <a:rPr lang="en-US" sz="2100" b="0" u="none" strike="noStrike">
-                <a:solidFill>
-                  <a:schemeClr val="dk1"/>
-                </a:solidFill>
-                <a:effectLst/>
-                <a:uFillTx/>
-                <a:latin typeface="Calibri"/>
-              </a:rPr>
-              <a:t>Edit Master text styles</a:t>
-            </a:r>
-            <a:endParaRPr lang="en-US" sz="2100" b="0" u="none" strike="noStrike">
-              <a:solidFill>
-                <a:schemeClr val="dk1"/>
-              </a:solidFill>
-              <a:effectLst/>
-              <a:uFillTx/>
-              <a:latin typeface="Calibri"/>
-            </a:endParaRPr>
-          </a:p>
-          <a:p>
-            <a:pPr marL="514440" lvl="1" indent="-171360" algn="l" defTabSz="685800">
-              <a:lnSpc>
-                <a:spcPct val="90000"/>
-              </a:lnSpc>
-              <a:spcBef>
-                <a:spcPts val="374"/>
-              </a:spcBef>
-              <a:buClr>
-                <a:srgbClr val="000000"/>
-              </a:buClr>
-              <a:buFont typeface="Arial"/>
-              <a:buChar char="•"/>
-              <a:tabLst>
-                <a:tab pos="0" algn="l"/>
-              </a:tabLst>
-            </a:pPr>
-            <a:r>
-              <a:rPr lang="en-US" sz="1800" b="0" u="none" strike="noStrike">
-                <a:solidFill>
-                  <a:schemeClr val="dk1"/>
-                </a:solidFill>
-                <a:effectLst/>
-                <a:uFillTx/>
-                <a:latin typeface="Calibri"/>
-              </a:rPr>
-              <a:t>Second level</a:t>
-            </a:r>
-            <a:endParaRPr lang="en-US" sz="1800" b="0" u="none" strike="noStrike">
-              <a:solidFill>
-                <a:schemeClr val="dk1"/>
-              </a:solidFill>
-              <a:effectLst/>
-              <a:uFillTx/>
-              <a:latin typeface="Calibri"/>
-            </a:endParaRPr>
-          </a:p>
-          <a:p>
-            <a:pPr marL="857160" lvl="2" indent="-171360" algn="l" defTabSz="685800">
-              <a:lnSpc>
-                <a:spcPct val="90000"/>
-              </a:lnSpc>
-              <a:spcBef>
-                <a:spcPts val="374"/>
-              </a:spcBef>
-              <a:buClr>
-                <a:srgbClr val="000000"/>
-              </a:buClr>
-              <a:buFont typeface="Arial"/>
-              <a:buChar char="•"/>
-              <a:tabLst>
-                <a:tab pos="0" algn="l"/>
-              </a:tabLst>
-            </a:pPr>
-            <a:r>
-              <a:rPr lang="en-US" sz="1500" b="0" u="none" strike="noStrike">
-                <a:solidFill>
-                  <a:schemeClr val="dk1"/>
-                </a:solidFill>
-                <a:effectLst/>
-                <a:uFillTx/>
-                <a:latin typeface="Calibri"/>
-              </a:rPr>
-              <a:t>Third level</a:t>
-            </a:r>
-            <a:endParaRPr lang="en-US" sz="1500" b="0" u="none" strike="noStrike">
-              <a:solidFill>
-                <a:schemeClr val="dk1"/>
-              </a:solidFill>
-              <a:effectLst/>
-              <a:uFillTx/>
-              <a:latin typeface="Calibri"/>
-            </a:endParaRPr>
-          </a:p>
-          <a:p>
-            <a:pPr marL="1200240" lvl="3" indent="-171360" algn="l" defTabSz="685800">
-              <a:lnSpc>
-                <a:spcPct val="90000"/>
-              </a:lnSpc>
-              <a:spcBef>
-                <a:spcPts val="374"/>
-              </a:spcBef>
-              <a:buClr>
-                <a:srgbClr val="000000"/>
-              </a:buClr>
-              <a:buFont typeface="Arial"/>
-              <a:buChar char="•"/>
-              <a:tabLst>
-                <a:tab pos="0" algn="l"/>
-              </a:tabLst>
-            </a:pPr>
-            <a:r>
-              <a:rPr lang="en-US" sz="1350" b="0" u="none" strike="noStrike">
-                <a:solidFill>
-                  <a:schemeClr val="dk1"/>
-                </a:solidFill>
-                <a:effectLst/>
-                <a:uFillTx/>
-                <a:latin typeface="Calibri"/>
-              </a:rPr>
-              <a:t>Fourth level</a:t>
-            </a:r>
-            <a:endParaRPr lang="en-US" sz="1350" b="0" u="none" strike="noStrike">
-              <a:solidFill>
-                <a:schemeClr val="dk1"/>
-              </a:solidFill>
-              <a:effectLst/>
-              <a:uFillTx/>
-              <a:latin typeface="Calibri"/>
-            </a:endParaRPr>
-          </a:p>
-          <a:p>
-            <a:pPr marL="1542960" lvl="4" indent="-171360" algn="l" defTabSz="685800">
-              <a:lnSpc>
-                <a:spcPct val="90000"/>
-              </a:lnSpc>
-              <a:spcBef>
-                <a:spcPts val="374"/>
-              </a:spcBef>
-              <a:buClr>
-                <a:srgbClr val="000000"/>
-              </a:buClr>
-              <a:buFont typeface="Arial"/>
-              <a:buChar char="•"/>
-              <a:tabLst>
-                <a:tab pos="0" algn="l"/>
-              </a:tabLst>
-            </a:pPr>
-            <a:r>
-              <a:rPr lang="en-US" sz="1350" b="0" u="none" strike="noStrike">
-                <a:solidFill>
-                  <a:schemeClr val="dk1"/>
-                </a:solidFill>
-                <a:effectLst/>
-                <a:uFillTx/>
-                <a:latin typeface="Calibri"/>
-              </a:rPr>
-              <a:t>Fifth level</a:t>
-            </a:r>
-            <a:endParaRPr lang="en-US" sz="1350" b="0" u="none" strike="noStrike">
-              <a:solidFill>
-                <a:schemeClr val="dk1"/>
-              </a:solidFill>
-              <a:effectLst/>
-              <a:uFillTx/>
-              <a:latin typeface="Calibri"/>
-            </a:endParaRPr>
-          </a:p>
-        </p:txBody>
-      </p:sp>
-      <p:sp>
-        <p:nvSpPr>
-          <p:cNvPr id="36" name="PlaceHolder 4"/>
-          <p:cNvSpPr>
-            <a:spLocks noGrp="1"/>
-          </p:cNvSpPr>
-          <p:nvPr>
-            <p:ph type="body"/>
-          </p:nvPr>
-        </p:nvSpPr>
-        <p:spPr>
-          <a:xfrm>
-            <a:off x="4629240" y="1260720"/>
-            <a:ext cx="3886920" cy="617400"/>
-          </a:xfrm>
-          <a:prstGeom prst="rect">
-            <a:avLst/>
-          </a:prstGeom>
-          <a:noFill/>
-          <a:ln w="0">
-            <a:noFill/>
-          </a:ln>
-        </p:spPr>
-        <p:txBody>
-          <a:bodyPr lIns="91440" tIns="45720" rIns="91440" bIns="45720" anchor="b">
-            <a:noAutofit/>
-          </a:bodyPr>
-          <a:lstStyle>
-            <a:lvl1pPr indent="0" algn="l" defTabSz="685800">
-              <a:lnSpc>
-                <a:spcPct val="90000"/>
-              </a:lnSpc>
-              <a:spcBef>
-                <a:spcPts val="751"/>
-              </a:spcBef>
-              <a:buNone/>
-              <a:tabLst>
-                <a:tab pos="0" algn="l"/>
-              </a:tabLst>
-              <a:defRPr lang="en-US" sz="1800" b="1" u="none" strike="noStrike">
-                <a:solidFill>
-                  <a:schemeClr val="dk1"/>
-                </a:solidFill>
-                <a:effectLst/>
-                <a:uFillTx/>
-                <a:latin typeface="Calibri"/>
-              </a:defRPr>
-            </a:lvl1pPr>
-          </a:lstStyle>
-          <a:p>
-            <a:pPr indent="0" algn="l" defTabSz="685800">
-              <a:lnSpc>
-                <a:spcPct val="90000"/>
-              </a:lnSpc>
-              <a:spcBef>
-                <a:spcPts val="751"/>
-              </a:spcBef>
-              <a:buNone/>
-              <a:tabLst>
-                <a:tab pos="0" algn="l"/>
-              </a:tabLst>
-            </a:pPr>
-            <a:r>
-              <a:rPr lang="en-US" sz="1800" b="1" u="none" strike="noStrike">
-                <a:solidFill>
-                  <a:schemeClr val="dk1"/>
-                </a:solidFill>
-                <a:effectLst/>
-                <a:uFillTx/>
-                <a:latin typeface="Calibri"/>
-              </a:rPr>
-              <a:t>Edit Master text styles</a:t>
-            </a:r>
-            <a:endParaRPr lang="en-US" sz="1800" b="0" u="none" strike="noStrike">
-              <a:solidFill>
-                <a:schemeClr val="dk1"/>
-              </a:solidFill>
-              <a:effectLst/>
-              <a:uFillTx/>
-              <a:latin typeface="Calibri"/>
-            </a:endParaRPr>
-          </a:p>
-        </p:txBody>
-      </p:sp>
-      <p:sp>
-        <p:nvSpPr>
-          <p:cNvPr id="37" name="PlaceHolder 5"/>
-          <p:cNvSpPr>
-            <a:spLocks noGrp="1"/>
-          </p:cNvSpPr>
-          <p:nvPr>
-            <p:ph type="body"/>
-          </p:nvPr>
-        </p:nvSpPr>
-        <p:spPr>
-          <a:xfrm>
-            <a:off x="4629240" y="1878840"/>
-            <a:ext cx="3886920" cy="2763000"/>
-          </a:xfrm>
-          <a:prstGeom prst="rect">
-            <a:avLst/>
-          </a:prstGeom>
-          <a:noFill/>
-          <a:ln w="0">
-            <a:noFill/>
-          </a:ln>
-        </p:spPr>
-        <p:txBody>
-          <a:bodyPr lIns="91440" tIns="45720" rIns="91440" bIns="45720" anchor="t">
-            <a:noAutofit/>
-          </a:bodyPr>
-          <a:lstStyle>
-            <a:lvl1pPr algn="l" defTabSz="685800">
-              <a:lnSpc>
-                <a:spcPct val="90000"/>
-              </a:lnSpc>
-              <a:spcBef>
-                <a:spcPts val="751"/>
-              </a:spcBef>
-              <a:buClr>
-                <a:srgbClr val="000000"/>
-              </a:buClr>
-              <a:buFont typeface="Arial"/>
-              <a:buChar char="•"/>
-              <a:tabLst>
-                <a:tab pos="0" algn="l"/>
-              </a:tabLst>
-              <a:defRPr lang="en-US" sz="2100" b="0" u="none" strike="noStrike">
-                <a:solidFill>
-                  <a:schemeClr val="dk1"/>
-                </a:solidFill>
-                <a:effectLst/>
-                <a:uFillTx/>
-                <a:latin typeface="Calibri"/>
-              </a:defRPr>
-            </a:lvl1pPr>
-            <a:lvl2pPr lvl="1" algn="l" defTabSz="685800">
-              <a:lnSpc>
-                <a:spcPct val="90000"/>
-              </a:lnSpc>
-              <a:spcBef>
-                <a:spcPts val="374"/>
-              </a:spcBef>
-              <a:buClr>
-                <a:srgbClr val="000000"/>
-              </a:buClr>
-              <a:buFont typeface="Arial"/>
-              <a:buChar char="•"/>
-              <a:tabLst>
-                <a:tab pos="0" algn="l"/>
-              </a:tabLst>
-              <a:defRPr lang="en-US" sz="1800" b="0" u="none" strike="noStrike">
-                <a:solidFill>
-                  <a:schemeClr val="dk1"/>
-                </a:solidFill>
-                <a:effectLst/>
-                <a:uFillTx/>
-                <a:latin typeface="Calibri"/>
-              </a:defRPr>
-            </a:lvl2pPr>
-            <a:lvl3pPr lvl="2" algn="l" defTabSz="685800">
-              <a:lnSpc>
-                <a:spcPct val="90000"/>
-              </a:lnSpc>
-              <a:spcBef>
-                <a:spcPts val="374"/>
-              </a:spcBef>
-              <a:buClr>
-                <a:srgbClr val="000000"/>
-              </a:buClr>
-              <a:buFont typeface="Arial"/>
-              <a:buChar char="•"/>
-              <a:tabLst>
-                <a:tab pos="0" algn="l"/>
-              </a:tabLst>
-              <a:defRPr lang="en-US" sz="1500" b="0" u="none" strike="noStrike">
-                <a:solidFill>
-                  <a:schemeClr val="dk1"/>
-                </a:solidFill>
-                <a:effectLst/>
-                <a:uFillTx/>
-                <a:latin typeface="Calibri"/>
-              </a:defRPr>
-            </a:lvl3pPr>
-            <a:lvl4pPr lvl="3" algn="l" defTabSz="685800">
-              <a:lnSpc>
-                <a:spcPct val="90000"/>
-              </a:lnSpc>
-              <a:spcBef>
-                <a:spcPts val="374"/>
-              </a:spcBef>
-              <a:buClr>
-                <a:srgbClr val="000000"/>
-              </a:buClr>
-              <a:buFont typeface="Arial"/>
-              <a:buChar char="•"/>
-              <a:tabLst>
-                <a:tab pos="0" algn="l"/>
-              </a:tabLst>
-              <a:defRPr lang="en-US" sz="1350" b="0" u="none" strike="noStrike">
-                <a:solidFill>
-                  <a:schemeClr val="dk1"/>
-                </a:solidFill>
-                <a:effectLst/>
-                <a:uFillTx/>
-                <a:latin typeface="Calibri"/>
-              </a:defRPr>
-            </a:lvl4pPr>
-            <a:lvl5pPr lvl="4" algn="l" defTabSz="685800">
-              <a:lnSpc>
-                <a:spcPct val="90000"/>
-              </a:lnSpc>
-              <a:spcBef>
-                <a:spcPts val="374"/>
-              </a:spcBef>
-              <a:buClr>
-                <a:srgbClr val="000000"/>
-              </a:buClr>
-              <a:buFont typeface="Arial"/>
-              <a:buChar char="•"/>
-              <a:tabLst>
-                <a:tab pos="0" algn="l"/>
-              </a:tabLst>
-              <a:defRPr lang="en-US" sz="1350" b="0" u="none" strike="noStrike">
-                <a:solidFill>
-                  <a:schemeClr val="dk1"/>
-                </a:solidFill>
-                <a:effectLst/>
-                <a:uFillTx/>
-                <a:latin typeface="Calibri"/>
-              </a:defRPr>
-            </a:lvl5pPr>
-          </a:lstStyle>
-          <a:p>
-            <a:pPr marL="171360" indent="-171360" algn="l" defTabSz="685800">
-              <a:lnSpc>
-                <a:spcPct val="90000"/>
-              </a:lnSpc>
-              <a:spcBef>
-                <a:spcPts val="751"/>
-              </a:spcBef>
-              <a:buClr>
-                <a:srgbClr val="000000"/>
-              </a:buClr>
-              <a:buFont typeface="Arial"/>
-              <a:buChar char="•"/>
-              <a:tabLst>
-                <a:tab pos="0" algn="l"/>
-              </a:tabLst>
-            </a:pPr>
-            <a:r>
-              <a:rPr lang="en-US" sz="2100" b="0" u="none" strike="noStrike">
-                <a:solidFill>
-                  <a:schemeClr val="dk1"/>
-                </a:solidFill>
-                <a:effectLst/>
-                <a:uFillTx/>
-                <a:latin typeface="Calibri"/>
-              </a:rPr>
-              <a:t>Edit Master text styles</a:t>
-            </a:r>
-            <a:endParaRPr lang="en-US" sz="2100" b="0" u="none" strike="noStrike">
-              <a:solidFill>
-                <a:schemeClr val="dk1"/>
-              </a:solidFill>
-              <a:effectLst/>
-              <a:uFillTx/>
-              <a:latin typeface="Calibri"/>
-            </a:endParaRPr>
-          </a:p>
-          <a:p>
-            <a:pPr marL="514440" lvl="1" indent="-171360" algn="l" defTabSz="685800">
-              <a:lnSpc>
-                <a:spcPct val="90000"/>
-              </a:lnSpc>
-              <a:spcBef>
-                <a:spcPts val="374"/>
-              </a:spcBef>
-              <a:buClr>
-                <a:srgbClr val="000000"/>
-              </a:buClr>
-              <a:buFont typeface="Arial"/>
-              <a:buChar char="•"/>
-              <a:tabLst>
-                <a:tab pos="0" algn="l"/>
-              </a:tabLst>
-            </a:pPr>
-            <a:r>
-              <a:rPr lang="en-US" sz="1800" b="0" u="none" strike="noStrike">
-                <a:solidFill>
-                  <a:schemeClr val="dk1"/>
-                </a:solidFill>
-                <a:effectLst/>
-                <a:uFillTx/>
-                <a:latin typeface="Calibri"/>
-              </a:rPr>
-              <a:t>Second level</a:t>
-            </a:r>
-            <a:endParaRPr lang="en-US" sz="1800" b="0" u="none" strike="noStrike">
-              <a:solidFill>
-                <a:schemeClr val="dk1"/>
-              </a:solidFill>
-              <a:effectLst/>
-              <a:uFillTx/>
-              <a:latin typeface="Calibri"/>
-            </a:endParaRPr>
-          </a:p>
-          <a:p>
-            <a:pPr marL="857160" lvl="2" indent="-171360" algn="l" defTabSz="685800">
-              <a:lnSpc>
-                <a:spcPct val="90000"/>
-              </a:lnSpc>
-              <a:spcBef>
-                <a:spcPts val="374"/>
-              </a:spcBef>
-              <a:buClr>
-                <a:srgbClr val="000000"/>
-              </a:buClr>
-              <a:buFont typeface="Arial"/>
-              <a:buChar char="•"/>
-              <a:tabLst>
-                <a:tab pos="0" algn="l"/>
-              </a:tabLst>
-            </a:pPr>
-            <a:r>
-              <a:rPr lang="en-US" sz="1500" b="0" u="none" strike="noStrike">
-                <a:solidFill>
-                  <a:schemeClr val="dk1"/>
-                </a:solidFill>
-                <a:effectLst/>
-                <a:uFillTx/>
-                <a:latin typeface="Calibri"/>
-              </a:rPr>
-              <a:t>Third level</a:t>
-            </a:r>
-            <a:endParaRPr lang="en-US" sz="1500" b="0" u="none" strike="noStrike">
-              <a:solidFill>
-                <a:schemeClr val="dk1"/>
-              </a:solidFill>
-              <a:effectLst/>
-              <a:uFillTx/>
-              <a:latin typeface="Calibri"/>
-            </a:endParaRPr>
-          </a:p>
-          <a:p>
-            <a:pPr marL="1200240" lvl="3" indent="-171360" algn="l" defTabSz="685800">
-              <a:lnSpc>
-                <a:spcPct val="90000"/>
-              </a:lnSpc>
-              <a:spcBef>
-                <a:spcPts val="374"/>
-              </a:spcBef>
-              <a:buClr>
-                <a:srgbClr val="000000"/>
-              </a:buClr>
-              <a:buFont typeface="Arial"/>
-              <a:buChar char="•"/>
-              <a:tabLst>
-                <a:tab pos="0" algn="l"/>
-              </a:tabLst>
-            </a:pPr>
-            <a:r>
-              <a:rPr lang="en-US" sz="1350" b="0" u="none" strike="noStrike">
-                <a:solidFill>
-                  <a:schemeClr val="dk1"/>
-                </a:solidFill>
-                <a:effectLst/>
-                <a:uFillTx/>
-                <a:latin typeface="Calibri"/>
-              </a:rPr>
-              <a:t>Fourth level</a:t>
-            </a:r>
-            <a:endParaRPr lang="en-US" sz="1350" b="0" u="none" strike="noStrike">
-              <a:solidFill>
-                <a:schemeClr val="dk1"/>
-              </a:solidFill>
-              <a:effectLst/>
-              <a:uFillTx/>
-              <a:latin typeface="Calibri"/>
-            </a:endParaRPr>
-          </a:p>
-          <a:p>
-            <a:pPr marL="1542960" lvl="4" indent="-171360" algn="l" defTabSz="685800">
-              <a:lnSpc>
-                <a:spcPct val="90000"/>
-              </a:lnSpc>
-              <a:spcBef>
-                <a:spcPts val="374"/>
-              </a:spcBef>
-              <a:buClr>
-                <a:srgbClr val="000000"/>
-              </a:buClr>
-              <a:buFont typeface="Arial"/>
-              <a:buChar char="•"/>
-              <a:tabLst>
-                <a:tab pos="0" algn="l"/>
-              </a:tabLst>
-            </a:pPr>
-            <a:r>
-              <a:rPr lang="en-US" sz="1350" b="0" u="none" strike="noStrike">
-                <a:solidFill>
-                  <a:schemeClr val="dk1"/>
-                </a:solidFill>
-                <a:effectLst/>
-                <a:uFillTx/>
-                <a:latin typeface="Calibri"/>
-              </a:rPr>
-              <a:t>Fifth level</a:t>
-            </a:r>
-            <a:endParaRPr lang="en-US" sz="1350" b="0" u="none" strike="noStrike">
-              <a:solidFill>
-                <a:schemeClr val="dk1"/>
-              </a:solidFill>
-              <a:effectLst/>
-              <a:uFillTx/>
-              <a:latin typeface="Calibri"/>
-            </a:endParaRPr>
-          </a:p>
-        </p:txBody>
-      </p:sp>
-      <p:sp>
-        <p:nvSpPr>
-          <p:cNvPr id="38" name="PlaceHolder 6"/>
-          <p:cNvSpPr>
-            <a:spLocks noGrp="1"/>
-          </p:cNvSpPr>
-          <p:nvPr>
-            <p:ph type="dt" idx="19"/>
-          </p:nvPr>
-        </p:nvSpPr>
-        <p:spPr>
-          <a:xfrm>
-            <a:off x="628560" y="4767120"/>
-            <a:ext cx="2057040" cy="273600"/>
-          </a:xfrm>
-          <a:prstGeom prst="rect">
-            <a:avLst/>
-          </a:prstGeom>
-          <a:noFill/>
-          <a:ln w="0">
-            <a:noFill/>
-          </a:ln>
-        </p:spPr>
-        <p:txBody>
-          <a:bodyPr lIns="91440" tIns="45720" rIns="91440" bIns="45720" anchor="ctr">
-            <a:noAutofit/>
-          </a:bodyPr>
-          <a:lstStyle>
-            <a:lvl1pPr indent="0" algn="l" defTabSz="457200">
-              <a:lnSpc>
-                <a:spcPct val="100000"/>
-              </a:lnSpc>
-              <a:buNone/>
-              <a:defRPr lang="en-IN" sz="900" b="0" u="none" strike="noStrike">
-                <a:solidFill>
-                  <a:schemeClr val="dk1">
-                    <a:tint val="75000"/>
-                  </a:schemeClr>
-                </a:solidFill>
-                <a:effectLst/>
-                <a:uFillTx/>
-                <a:latin typeface="Calibri"/>
-              </a:defRPr>
-            </a:lvl1pPr>
-          </a:lstStyle>
-          <a:p>
-            <a:pPr indent="0" algn="l" defTabSz="457200">
-              <a:lnSpc>
-                <a:spcPct val="100000"/>
-              </a:lnSpc>
-              <a:buNone/>
-            </a:pPr>
-            <a:r>
-              <a:rPr lang="en-IN" sz="900" b="0" u="none" strike="noStrike">
-                <a:solidFill>
-                  <a:schemeClr val="dk1">
-                    <a:tint val="75000"/>
-                  </a:schemeClr>
-                </a:solidFill>
-                <a:effectLst/>
-                <a:uFillTx/>
-                <a:latin typeface="Calibri"/>
-              </a:rPr>
-              <a:t>&lt;date/time&gt;</a:t>
-            </a:r>
-            <a:endParaRPr lang="en-US" sz="900" b="0" u="none" strike="noStrike">
-              <a:solidFill>
-                <a:srgbClr val="000000"/>
-              </a:solidFill>
-              <a:effectLst/>
-              <a:uFillTx/>
-              <a:latin typeface="Times New Roman"/>
-            </a:endParaRPr>
-          </a:p>
-        </p:txBody>
-      </p:sp>
-      <p:sp>
-        <p:nvSpPr>
-          <p:cNvPr id="39" name="PlaceHolder 7"/>
-          <p:cNvSpPr>
-            <a:spLocks noGrp="1"/>
-          </p:cNvSpPr>
-          <p:nvPr>
-            <p:ph type="ftr" idx="20"/>
-          </p:nvPr>
-        </p:nvSpPr>
-        <p:spPr>
-          <a:xfrm>
-            <a:off x="3029040" y="4767120"/>
-            <a:ext cx="3085920" cy="273600"/>
-          </a:xfrm>
-          <a:prstGeom prst="rect">
-            <a:avLst/>
-          </a:prstGeom>
-          <a:noFill/>
-          <a:ln w="0">
-            <a:noFill/>
-          </a:ln>
-        </p:spPr>
-        <p:txBody>
-          <a:bodyPr lIns="91440" tIns="45720" rIns="91440" bIns="45720" anchor="ctr">
-            <a:noAutofit/>
-          </a:bodyPr>
-          <a:lstStyle>
-            <a:lvl1pPr indent="0" algn="ctr">
-              <a:buNone/>
-              <a:defRPr lang="en-US" sz="1400" b="0" u="none" strike="noStrike">
-                <a:solidFill>
-                  <a:srgbClr val="000000"/>
-                </a:solidFill>
-                <a:effectLst/>
-                <a:uFillTx/>
-                <a:latin typeface="Times New Roman"/>
-              </a:defRPr>
-            </a:lvl1pPr>
-          </a:lstStyle>
-          <a:p>
-            <a:pPr indent="0" algn="ctr">
-              <a:buNone/>
-            </a:pPr>
-            <a:r>
-              <a:rPr lang="en-US" sz="1400" b="0" u="none" strike="noStrike">
-                <a:solidFill>
-                  <a:srgbClr val="000000"/>
-                </a:solidFill>
-                <a:effectLst/>
-                <a:uFillTx/>
-                <a:latin typeface="Times New Roman"/>
-              </a:rPr>
-              <a:t>&lt;footer&gt;</a:t>
-            </a:r>
-            <a:endParaRPr lang="en-US" sz="1400" b="0" u="none" strike="noStrike">
-              <a:solidFill>
-                <a:srgbClr val="000000"/>
-              </a:solidFill>
-              <a:effectLst/>
-              <a:uFillTx/>
-              <a:latin typeface="Times New Roman"/>
-            </a:endParaRPr>
-          </a:p>
-        </p:txBody>
-      </p:sp>
-      <p:sp>
-        <p:nvSpPr>
-          <p:cNvPr id="40" name="PlaceHolder 8"/>
-          <p:cNvSpPr>
-            <a:spLocks noGrp="1"/>
-          </p:cNvSpPr>
-          <p:nvPr>
-            <p:ph type="sldNum" idx="21"/>
-          </p:nvPr>
-        </p:nvSpPr>
-        <p:spPr>
-          <a:xfrm>
-            <a:off x="6458040" y="4767120"/>
-            <a:ext cx="2057040" cy="273600"/>
-          </a:xfrm>
-          <a:prstGeom prst="rect">
-            <a:avLst/>
-          </a:prstGeom>
-          <a:noFill/>
-          <a:ln w="0">
-            <a:noFill/>
-          </a:ln>
-        </p:spPr>
-        <p:txBody>
-          <a:bodyPr lIns="91440" tIns="45720" rIns="91440" bIns="45720" anchor="ctr">
-            <a:noAutofit/>
-          </a:bodyPr>
-          <a:lstStyle>
-            <a:lvl1pPr indent="0" algn="r" defTabSz="457200">
-              <a:lnSpc>
-                <a:spcPct val="100000"/>
-              </a:lnSpc>
-              <a:buNone/>
-              <a:defRPr lang="en-IN" sz="900" b="0" u="none" strike="noStrike">
-                <a:solidFill>
-                  <a:schemeClr val="dk1">
-                    <a:tint val="75000"/>
-                  </a:schemeClr>
-                </a:solidFill>
-                <a:effectLst/>
-                <a:uFillTx/>
-                <a:latin typeface="Calibri"/>
-              </a:defRPr>
-            </a:lvl1pPr>
-          </a:lstStyle>
-          <a:p>
-            <a:pPr indent="0" algn="r" defTabSz="457200">
-              <a:lnSpc>
-                <a:spcPct val="100000"/>
-              </a:lnSpc>
-              <a:buNone/>
-            </a:pPr>
-            <a:fld id="{8F444FB9-E1DA-49FD-887F-3E551CE25B93}" type="slidenum">
-              <a:rPr lang="en-IN" sz="900" b="0" u="none" strike="noStrike">
-                <a:solidFill>
-                  <a:schemeClr val="dk1">
-                    <a:tint val="75000"/>
-                  </a:schemeClr>
-                </a:solidFill>
-                <a:effectLst/>
-                <a:uFillTx/>
-                <a:latin typeface="Calibri"/>
-              </a:rPr>
-              <a:t>&lt;number&gt;</a:t>
-            </a:fld>
-            <a:endParaRPr lang="en-US" sz="900" b="0" u="none" strike="noStrike">
-              <a:solidFill>
-                <a:srgbClr val="000000"/>
-              </a:solidFill>
-              <a:effectLst/>
-              <a:uFillTx/>
-              <a:latin typeface="Times New Roman"/>
-            </a:endParaRPr>
-          </a:p>
-        </p:txBody>
-      </p:sp>
-    </p:spTree>
-  </p:cSld>
-  <p:clrMapOvr>
-    <a:masterClrMapping/>
-  </p:clrMapOvr>
-</p:sldLayout>
-</file>
-
-<file path=ppt/slideLayouts/slideLayout8.xml><?xml version="1.0" encoding="utf-8"?>
-<p:sldLayout xmlns:a="http://schemas.openxmlformats.org/drawingml/2006/main" xmlns:p="http://schemas.openxmlformats.org/presentationml/2006/main" xmlns:r="http://schemas.openxmlformats.org/officeDocument/2006/relationships" xmlns:p14="http://schemas.microsoft.com/office/powerpoint/2010/main" xmlns:p15="http://schemas.microsoft.com/office/powerpoint/2012/main" xmlns:mc="http://schemas.openxmlformats.org/markup-compatibility/2006" type="titleOnly" preserve="1">
-  <p:cSld name="Title Only">
-    <p:bg>
-      <p:bgPr>
-        <a:solidFill>
-          <a:srgbClr val="FFFFFF"/>
-        </a:solidFill>
-      </p:bgPr>
-    </p:bg>
-    <p:spTree>
-      <p:nvGrpSpPr>
-        <p:cNvPr id="1" name=""/>
-        <p:cNvGrpSpPr/>
-        <p:nvPr/>
-      </p:nvGrpSpPr>
-      <p:grpSpPr>
-        <a:xfrm>
-          <a:off x="0" y="0"/>
-          <a:ext cx="0" cy="0"/>
-          <a:chOff x="0" y="0"/>
-          <a:chExt cx="0" cy="0"/>
-        </a:xfrm>
-      </p:grpSpPr>
-      <p:sp>
-        <p:nvSpPr>
-          <p:cNvPr id="41" name="PlaceHolder 1"/>
-          <p:cNvSpPr>
-            <a:spLocks noGrp="1"/>
-          </p:cNvSpPr>
-          <p:nvPr>
-            <p:ph type="title"/>
-          </p:nvPr>
-        </p:nvSpPr>
-        <p:spPr>
-          <a:xfrm>
-            <a:off x="628560" y="273960"/>
-            <a:ext cx="7886520" cy="993960"/>
-          </a:xfrm>
-          <a:prstGeom prst="rect">
-            <a:avLst/>
-          </a:prstGeom>
-          <a:noFill/>
-          <a:ln w="0">
-            <a:noFill/>
-          </a:ln>
-        </p:spPr>
-        <p:txBody>
-          <a:bodyPr lIns="91440" tIns="45720" rIns="91440" bIns="45720" anchor="ctr">
-            <a:noAutofit/>
-          </a:bodyPr>
-          <a:lstStyle>
-            <a:lvl1pPr indent="0" algn="l" defTabSz="685800">
-              <a:lnSpc>
-                <a:spcPct val="90000"/>
-              </a:lnSpc>
-              <a:buNone/>
-              <a:defRPr lang="en-US" sz="3300" b="0" u="none" strike="noStrike">
-                <a:solidFill>
-                  <a:schemeClr val="dk1"/>
-                </a:solidFill>
-                <a:effectLst/>
-                <a:uFillTx/>
-                <a:latin typeface="Calibri Light"/>
-              </a:defRPr>
-            </a:lvl1pPr>
-          </a:lstStyle>
-          <a:p>
-            <a:pPr indent="0" algn="l" defTabSz="685800">
-              <a:lnSpc>
-                <a:spcPct val="90000"/>
-              </a:lnSpc>
-              <a:buNone/>
-            </a:pPr>
-            <a:r>
-              <a:rPr lang="en-US" sz="3300" b="0" u="none" strike="noStrike">
-                <a:solidFill>
-                  <a:schemeClr val="dk1"/>
-                </a:solidFill>
-                <a:effectLst/>
-                <a:uFillTx/>
-                <a:latin typeface="Calibri Light"/>
-              </a:rPr>
-              <a:t>Click to edit Master title style</a:t>
-            </a:r>
-            <a:endParaRPr lang="en-US" sz="3300" b="0" u="none" strike="noStrike">
-              <a:solidFill>
-                <a:schemeClr val="dk1"/>
-              </a:solidFill>
-              <a:effectLst/>
-              <a:uFillTx/>
-              <a:latin typeface="Calibri Light"/>
-            </a:endParaRPr>
-          </a:p>
-        </p:txBody>
-      </p:sp>
-      <p:sp>
-        <p:nvSpPr>
-          <p:cNvPr id="42" name="PlaceHolder 2"/>
-          <p:cNvSpPr>
-            <a:spLocks noGrp="1"/>
-          </p:cNvSpPr>
-          <p:nvPr>
-            <p:ph type="dt" idx="22"/>
-          </p:nvPr>
-        </p:nvSpPr>
-        <p:spPr>
-          <a:xfrm>
-            <a:off x="628560" y="4767120"/>
-            <a:ext cx="2057040" cy="273600"/>
-          </a:xfrm>
-          <a:prstGeom prst="rect">
-            <a:avLst/>
-          </a:prstGeom>
-          <a:noFill/>
-          <a:ln w="0">
-            <a:noFill/>
-          </a:ln>
-        </p:spPr>
-        <p:txBody>
-          <a:bodyPr lIns="91440" tIns="45720" rIns="91440" bIns="45720" anchor="ctr">
-            <a:noAutofit/>
-          </a:bodyPr>
-          <a:lstStyle>
-            <a:lvl1pPr indent="0" algn="l" defTabSz="457200">
-              <a:lnSpc>
-                <a:spcPct val="100000"/>
-              </a:lnSpc>
-              <a:buNone/>
-              <a:defRPr lang="en-IN" sz="900" b="0" u="none" strike="noStrike">
-                <a:solidFill>
-                  <a:schemeClr val="dk1">
-                    <a:tint val="75000"/>
-                  </a:schemeClr>
-                </a:solidFill>
-                <a:effectLst/>
-                <a:uFillTx/>
-                <a:latin typeface="Calibri"/>
-              </a:defRPr>
-            </a:lvl1pPr>
-          </a:lstStyle>
-          <a:p>
-            <a:pPr indent="0" algn="l" defTabSz="457200">
-              <a:lnSpc>
-                <a:spcPct val="100000"/>
-              </a:lnSpc>
-              <a:buNone/>
-            </a:pPr>
-            <a:r>
-              <a:rPr lang="en-IN" sz="900" b="0" u="none" strike="noStrike">
-                <a:solidFill>
-                  <a:schemeClr val="dk1">
-                    <a:tint val="75000"/>
-                  </a:schemeClr>
-                </a:solidFill>
-                <a:effectLst/>
-                <a:uFillTx/>
-                <a:latin typeface="Calibri"/>
-              </a:rPr>
-              <a:t>&lt;date/time&gt;</a:t>
-            </a:r>
-            <a:endParaRPr lang="en-US" sz="900" b="0" u="none" strike="noStrike">
-              <a:solidFill>
-                <a:srgbClr val="000000"/>
-              </a:solidFill>
-              <a:effectLst/>
-              <a:uFillTx/>
-              <a:latin typeface="Times New Roman"/>
-            </a:endParaRPr>
-          </a:p>
-        </p:txBody>
-      </p:sp>
-      <p:sp>
-        <p:nvSpPr>
-          <p:cNvPr id="43" name="PlaceHolder 3"/>
-          <p:cNvSpPr>
-            <a:spLocks noGrp="1"/>
-          </p:cNvSpPr>
-          <p:nvPr>
-            <p:ph type="ftr" idx="23"/>
-          </p:nvPr>
-        </p:nvSpPr>
-        <p:spPr>
-          <a:xfrm>
-            <a:off x="3029040" y="4767120"/>
-            <a:ext cx="3085920" cy="273600"/>
-          </a:xfrm>
-          <a:prstGeom prst="rect">
-            <a:avLst/>
-          </a:prstGeom>
-          <a:noFill/>
-          <a:ln w="0">
-            <a:noFill/>
-          </a:ln>
-        </p:spPr>
-        <p:txBody>
-          <a:bodyPr lIns="91440" tIns="45720" rIns="91440" bIns="45720" anchor="ctr">
-            <a:noAutofit/>
-          </a:bodyPr>
-          <a:lstStyle>
-            <a:lvl1pPr indent="0" algn="ctr">
-              <a:buNone/>
-              <a:defRPr lang="en-US" sz="1400" b="0" u="none" strike="noStrike">
-                <a:solidFill>
-                  <a:srgbClr val="000000"/>
-                </a:solidFill>
-                <a:effectLst/>
-                <a:uFillTx/>
-                <a:latin typeface="Times New Roman"/>
-              </a:defRPr>
-            </a:lvl1pPr>
-          </a:lstStyle>
-          <a:p>
-            <a:pPr indent="0" algn="ctr">
-              <a:buNone/>
-            </a:pPr>
-            <a:r>
-              <a:rPr lang="en-US" sz="1400" b="0" u="none" strike="noStrike">
-                <a:solidFill>
-                  <a:srgbClr val="000000"/>
-                </a:solidFill>
-                <a:effectLst/>
-                <a:uFillTx/>
-                <a:latin typeface="Times New Roman"/>
-              </a:rPr>
-              <a:t>&lt;footer&gt;</a:t>
-            </a:r>
-            <a:endParaRPr lang="en-US" sz="1400" b="0" u="none" strike="noStrike">
-              <a:solidFill>
-                <a:srgbClr val="000000"/>
-              </a:solidFill>
-              <a:effectLst/>
-              <a:uFillTx/>
-              <a:latin typeface="Times New Roman"/>
-            </a:endParaRPr>
-          </a:p>
-        </p:txBody>
-      </p:sp>
-      <p:sp>
-        <p:nvSpPr>
-          <p:cNvPr id="44" name="PlaceHolder 4"/>
-          <p:cNvSpPr>
-            <a:spLocks noGrp="1"/>
-          </p:cNvSpPr>
-          <p:nvPr>
-            <p:ph type="sldNum" idx="24"/>
-          </p:nvPr>
-        </p:nvSpPr>
-        <p:spPr>
-          <a:xfrm>
-            <a:off x="6458040" y="4767120"/>
-            <a:ext cx="2057040" cy="273600"/>
-          </a:xfrm>
-          <a:prstGeom prst="rect">
-            <a:avLst/>
-          </a:prstGeom>
-          <a:noFill/>
-          <a:ln w="0">
-            <a:noFill/>
-          </a:ln>
-        </p:spPr>
-        <p:txBody>
-          <a:bodyPr lIns="91440" tIns="45720" rIns="91440" bIns="45720" anchor="ctr">
-            <a:noAutofit/>
-          </a:bodyPr>
-          <a:lstStyle>
-            <a:lvl1pPr indent="0" algn="r" defTabSz="457200">
-              <a:lnSpc>
-                <a:spcPct val="100000"/>
-              </a:lnSpc>
-              <a:buNone/>
-              <a:defRPr lang="en-IN" sz="900" b="0" u="none" strike="noStrike">
-                <a:solidFill>
-                  <a:schemeClr val="dk1">
-                    <a:tint val="75000"/>
-                  </a:schemeClr>
-                </a:solidFill>
-                <a:effectLst/>
-                <a:uFillTx/>
-                <a:latin typeface="Calibri"/>
-              </a:defRPr>
-            </a:lvl1pPr>
-          </a:lstStyle>
-          <a:p>
-            <a:pPr indent="0" algn="r" defTabSz="457200">
-              <a:lnSpc>
-                <a:spcPct val="100000"/>
-              </a:lnSpc>
-              <a:buNone/>
-            </a:pPr>
-            <a:fld id="{1BAE6663-6711-4A25-B976-6A613058BE8A}" type="slidenum">
-              <a:rPr lang="en-IN" sz="900" b="0" u="none" strike="noStrike">
-                <a:solidFill>
-                  <a:schemeClr val="dk1">
-                    <a:tint val="75000"/>
-                  </a:schemeClr>
-                </a:solidFill>
-                <a:effectLst/>
-                <a:uFillTx/>
-                <a:latin typeface="Calibri"/>
-              </a:rPr>
-              <a:t>&lt;number&gt;</a:t>
-            </a:fld>
-            <a:endParaRPr lang="en-US" sz="900" b="0" u="none" strike="noStrike">
-              <a:solidFill>
-                <a:srgbClr val="000000"/>
-              </a:solidFill>
-              <a:effectLst/>
-              <a:uFillTx/>
-              <a:latin typeface="Times New Roman"/>
-            </a:endParaRPr>
-          </a:p>
-        </p:txBody>
-      </p:sp>
-    </p:spTree>
-  </p:cSld>
-  <p:clrMapOvr>
-    <a:masterClrMapping/>
-  </p:clrMapOvr>
-</p:sldLayout>
-</file>
-
-<file path=ppt/slideLayouts/slideLayout9.xml><?xml version="1.0" encoding="utf-8"?>
-<p:sldLayout xmlns:a="http://schemas.openxmlformats.org/drawingml/2006/main" xmlns:p="http://schemas.openxmlformats.org/presentationml/2006/main" xmlns:r="http://schemas.openxmlformats.org/officeDocument/2006/relationships" xmlns:p14="http://schemas.microsoft.com/office/powerpoint/2010/main" xmlns:p15="http://schemas.microsoft.com/office/powerpoint/2012/main" xmlns:mc="http://schemas.openxmlformats.org/markup-compatibility/2006" type="blank" preserve="1">
-  <p:cSld name="Blank">
-    <p:bg>
-      <p:bgPr>
-        <a:solidFill>
-          <a:srgbClr val="FFFFFF"/>
-        </a:solidFill>
-      </p:bgPr>
-    </p:bg>
-    <p:spTree>
-      <p:nvGrpSpPr>
-        <p:cNvPr id="1" name=""/>
-        <p:cNvGrpSpPr/>
-        <p:nvPr/>
-      </p:nvGrpSpPr>
-      <p:grpSpPr>
-        <a:xfrm>
-          <a:off x="0" y="0"/>
-          <a:ext cx="0" cy="0"/>
-          <a:chOff x="0" y="0"/>
-          <a:chExt cx="0" cy="0"/>
-        </a:xfrm>
-      </p:grpSpPr>
-      <p:sp>
-        <p:nvSpPr>
-          <p:cNvPr id="45" name="PlaceHolder 1"/>
-          <p:cNvSpPr>
-            <a:spLocks noGrp="1"/>
-          </p:cNvSpPr>
-          <p:nvPr>
-            <p:ph type="dt" idx="25"/>
-          </p:nvPr>
-        </p:nvSpPr>
-        <p:spPr>
-          <a:xfrm>
-            <a:off x="628560" y="4767120"/>
-            <a:ext cx="2057040" cy="273600"/>
-          </a:xfrm>
-          <a:prstGeom prst="rect">
-            <a:avLst/>
-          </a:prstGeom>
-          <a:noFill/>
-          <a:ln w="0">
-            <a:noFill/>
-          </a:ln>
-        </p:spPr>
-        <p:txBody>
-          <a:bodyPr lIns="91440" tIns="45720" rIns="91440" bIns="45720" anchor="ctr">
-            <a:noAutofit/>
-          </a:bodyPr>
-          <a:lstStyle>
-            <a:lvl1pPr indent="0" algn="l" defTabSz="457200">
-              <a:lnSpc>
-                <a:spcPct val="100000"/>
-              </a:lnSpc>
-              <a:buNone/>
-              <a:defRPr lang="en-IN" sz="900" b="0" u="none" strike="noStrike">
-                <a:solidFill>
-                  <a:schemeClr val="dk1">
-                    <a:tint val="75000"/>
-                  </a:schemeClr>
-                </a:solidFill>
-                <a:effectLst/>
-                <a:uFillTx/>
-                <a:latin typeface="Calibri"/>
-              </a:defRPr>
-            </a:lvl1pPr>
-          </a:lstStyle>
-          <a:p>
-            <a:pPr indent="0" algn="l" defTabSz="457200">
-              <a:lnSpc>
-                <a:spcPct val="100000"/>
-              </a:lnSpc>
-              <a:buNone/>
-            </a:pPr>
-            <a:r>
-              <a:rPr lang="en-IN" sz="900" b="0" u="none" strike="noStrike">
-                <a:solidFill>
-                  <a:schemeClr val="dk1">
-                    <a:tint val="75000"/>
-                  </a:schemeClr>
-                </a:solidFill>
-                <a:effectLst/>
-                <a:uFillTx/>
-                <a:latin typeface="Calibri"/>
-              </a:rPr>
-              <a:t>&lt;date/time&gt;</a:t>
-            </a:r>
-            <a:endParaRPr lang="en-US" sz="900" b="0" u="none" strike="noStrike">
-              <a:solidFill>
-                <a:srgbClr val="000000"/>
-              </a:solidFill>
-              <a:effectLst/>
-              <a:uFillTx/>
-              <a:latin typeface="Times New Roman"/>
-            </a:endParaRPr>
-          </a:p>
-        </p:txBody>
-      </p:sp>
-      <p:sp>
-        <p:nvSpPr>
-          <p:cNvPr id="46" name="PlaceHolder 2"/>
-          <p:cNvSpPr>
-            <a:spLocks noGrp="1"/>
-          </p:cNvSpPr>
-          <p:nvPr>
-            <p:ph type="ftr" idx="26"/>
-          </p:nvPr>
-        </p:nvSpPr>
-        <p:spPr>
-          <a:xfrm>
-            <a:off x="3029040" y="4767120"/>
-            <a:ext cx="3085920" cy="273600"/>
-          </a:xfrm>
-          <a:prstGeom prst="rect">
-            <a:avLst/>
-          </a:prstGeom>
-          <a:noFill/>
-          <a:ln w="0">
-            <a:noFill/>
-          </a:ln>
-        </p:spPr>
-        <p:txBody>
-          <a:bodyPr lIns="91440" tIns="45720" rIns="91440" bIns="45720" anchor="ctr">
-            <a:noAutofit/>
-          </a:bodyPr>
-          <a:lstStyle>
-            <a:lvl1pPr indent="0" algn="ctr">
-              <a:buNone/>
-              <a:defRPr lang="en-US" sz="1400" b="0" u="none" strike="noStrike">
-                <a:solidFill>
-                  <a:srgbClr val="000000"/>
-                </a:solidFill>
-                <a:effectLst/>
-                <a:uFillTx/>
-                <a:latin typeface="Times New Roman"/>
-              </a:defRPr>
-            </a:lvl1pPr>
-          </a:lstStyle>
-          <a:p>
-            <a:pPr indent="0" algn="ctr">
-              <a:buNone/>
-            </a:pPr>
-            <a:r>
-              <a:rPr lang="en-US" sz="1400" b="0" u="none" strike="noStrike">
-                <a:solidFill>
-                  <a:srgbClr val="000000"/>
-                </a:solidFill>
-                <a:effectLst/>
-                <a:uFillTx/>
-                <a:latin typeface="Times New Roman"/>
-              </a:rPr>
-              <a:t>&lt;footer&gt;</a:t>
-            </a:r>
-            <a:endParaRPr lang="en-US" sz="1400" b="0" u="none" strike="noStrike">
-              <a:solidFill>
-                <a:srgbClr val="000000"/>
-              </a:solidFill>
-              <a:effectLst/>
-              <a:uFillTx/>
-              <a:latin typeface="Times New Roman"/>
-            </a:endParaRPr>
-          </a:p>
-        </p:txBody>
-      </p:sp>
-      <p:sp>
-        <p:nvSpPr>
-          <p:cNvPr id="47" name="PlaceHolder 3"/>
-          <p:cNvSpPr>
-            <a:spLocks noGrp="1"/>
-          </p:cNvSpPr>
-          <p:nvPr>
-            <p:ph type="sldNum" idx="27"/>
-          </p:nvPr>
-        </p:nvSpPr>
-        <p:spPr>
-          <a:xfrm>
-            <a:off x="6458040" y="4767120"/>
-            <a:ext cx="2057040" cy="273600"/>
-          </a:xfrm>
-          <a:prstGeom prst="rect">
-            <a:avLst/>
-          </a:prstGeom>
-          <a:noFill/>
-          <a:ln w="0">
-            <a:noFill/>
-          </a:ln>
-        </p:spPr>
-        <p:txBody>
-          <a:bodyPr lIns="91440" tIns="45720" rIns="91440" bIns="45720" anchor="ctr">
-            <a:noAutofit/>
-          </a:bodyPr>
-          <a:lstStyle>
-            <a:lvl1pPr indent="0" algn="r" defTabSz="457200">
-              <a:lnSpc>
-                <a:spcPct val="100000"/>
-              </a:lnSpc>
-              <a:buNone/>
-              <a:defRPr lang="en-IN" sz="900" b="0" u="none" strike="noStrike">
-                <a:solidFill>
-                  <a:schemeClr val="dk1">
-                    <a:tint val="75000"/>
-                  </a:schemeClr>
-                </a:solidFill>
-                <a:effectLst/>
-                <a:uFillTx/>
-                <a:latin typeface="Calibri"/>
-              </a:defRPr>
-            </a:lvl1pPr>
-          </a:lstStyle>
-          <a:p>
-            <a:pPr indent="0" algn="r" defTabSz="457200">
-              <a:lnSpc>
-                <a:spcPct val="100000"/>
-              </a:lnSpc>
-              <a:buNone/>
-            </a:pPr>
-            <a:fld id="{74C60F61-527F-4789-B650-3ADA4ECF700D}" type="slidenum">
+              <a:tabLst>
+                <a:tab pos="0" algn="l"/>
+              </a:tabLst>
+            </a:pPr>
+            <a:fld id="{56662A1B-18EB-4E6A-8721-4A922B9C42CD}" type="slidenum">
               <a:rPr lang="en-IN" sz="900" b="0" u="none" strike="noStrike">
                 <a:solidFill>
                   <a:schemeClr val="dk1">
@@ -6941,6 +8107,14 @@
 <file path=ppt/slides/slide1.xml><?xml version="1.0" encoding="utf-8"?>
 <p:sld xmlns:a="http://schemas.openxmlformats.org/drawingml/2006/main" xmlns:p="http://schemas.openxmlformats.org/presentationml/2006/main" xmlns:r="http://schemas.openxmlformats.org/officeDocument/2006/relationships" xmlns:p14="http://schemas.microsoft.com/office/powerpoint/2010/main" xmlns:p15="http://schemas.microsoft.com/office/powerpoint/2012/main" xmlns:mc="http://schemas.openxmlformats.org/markup-compatibility/2006">
   <p:cSld>
+    <p:bg>
+      <p:bgPr>
+        <a:blipFill rotWithShape="0">
+          <a:blip r:embed="rId1"/>
+          <a:stretch/>
+        </a:blipFill>
+      </p:bgPr>
+    </p:bg>
     <p:spTree>
       <p:nvGrpSpPr>
         <p:cNvPr id="1" name=""/>
@@ -6957,18 +8131,18 @@
       </p:grpSpPr>
       <p:pic>
         <p:nvPicPr>
-          <p:cNvPr id="60" name="Picture 8"/>
+          <p:cNvPr id="63" name="Picture 8"/>
           <p:cNvPicPr/>
           <p:nvPr/>
         </p:nvPicPr>
         <p:blipFill>
-          <a:blip r:embed="rId1"/>
+          <a:blip r:embed="rId2"/>
           <a:stretch/>
         </p:blipFill>
         <p:spPr>
           <a:xfrm>
             <a:off x="1582560" y="-23040"/>
-            <a:ext cx="5711040" cy="1739160"/>
+            <a:ext cx="5710680" cy="1738800"/>
           </a:xfrm>
           <a:prstGeom prst="rect">
             <a:avLst/>
@@ -6981,14 +8155,14 @@
       </p:pic>
       <p:sp>
         <p:nvSpPr>
-          <p:cNvPr id="61" name="TextBox 9"/>
+          <p:cNvPr id="64" name="TextBox 9"/>
           <p:cNvSpPr/>
           <p:nvPr/>
         </p:nvSpPr>
         <p:spPr>
           <a:xfrm>
             <a:off x="391320" y="1473120"/>
-            <a:ext cx="7835400" cy="707400"/>
+            <a:ext cx="7835040" cy="699840"/>
           </a:xfrm>
           <a:prstGeom prst="rect">
             <a:avLst/>
@@ -7038,14 +8212,14 @@
       </p:sp>
       <p:sp>
         <p:nvSpPr>
-          <p:cNvPr id="62" name="TextBox 13"/>
+          <p:cNvPr id="65" name="TextBox 13"/>
           <p:cNvSpPr/>
           <p:nvPr/>
         </p:nvSpPr>
         <p:spPr>
           <a:xfrm>
             <a:off x="1798200" y="2252160"/>
-            <a:ext cx="5022000" cy="522720"/>
+            <a:ext cx="5021640" cy="517320"/>
           </a:xfrm>
           <a:prstGeom prst="rect">
             <a:avLst/>
@@ -7100,18 +8274,18 @@
       </p:sp>
       <p:pic>
         <p:nvPicPr>
-          <p:cNvPr id="63" name="Picture 15"/>
+          <p:cNvPr id="66" name="Picture 15"/>
           <p:cNvPicPr/>
           <p:nvPr/>
         </p:nvPicPr>
         <p:blipFill>
-          <a:blip r:embed="rId2"/>
+          <a:blip r:embed="rId3"/>
           <a:stretch/>
         </p:blipFill>
         <p:spPr>
           <a:xfrm>
             <a:off x="1600200" y="2514600"/>
-            <a:ext cx="5283720" cy="2971800"/>
+            <a:ext cx="5283360" cy="2971440"/>
           </a:xfrm>
           <a:prstGeom prst="rect">
             <a:avLst/>
@@ -7138,6 +8312,14 @@
 <file path=ppt/slides/slide2.xml><?xml version="1.0" encoding="utf-8"?>
 <p:sld xmlns:a="http://schemas.openxmlformats.org/drawingml/2006/main" xmlns:p="http://schemas.openxmlformats.org/presentationml/2006/main" xmlns:r="http://schemas.openxmlformats.org/officeDocument/2006/relationships" xmlns:p14="http://schemas.microsoft.com/office/powerpoint/2010/main" xmlns:p15="http://schemas.microsoft.com/office/powerpoint/2012/main" xmlns:mc="http://schemas.openxmlformats.org/markup-compatibility/2006">
   <p:cSld>
+    <p:bg>
+      <p:bgPr>
+        <a:blipFill rotWithShape="0">
+          <a:blip r:embed="rId1"/>
+          <a:stretch/>
+        </a:blipFill>
+      </p:bgPr>
+    </p:bg>
     <p:spTree>
       <p:nvGrpSpPr>
         <p:cNvPr id="1" name=""/>
@@ -7154,14 +8336,14 @@
       </p:grpSpPr>
       <p:sp>
         <p:nvSpPr>
-          <p:cNvPr id="64" name="Rectangle 10"/>
+          <p:cNvPr id="67" name="Rectangle 10"/>
           <p:cNvSpPr/>
           <p:nvPr/>
         </p:nvSpPr>
         <p:spPr>
           <a:xfrm>
             <a:off x="2387160" y="151920"/>
-            <a:ext cx="4681800" cy="415080"/>
+            <a:ext cx="4681440" cy="414720"/>
           </a:xfrm>
           <a:prstGeom prst="rect">
             <a:avLst/>
@@ -7228,14 +8410,14 @@
       </p:sp>
       <p:sp>
         <p:nvSpPr>
-          <p:cNvPr id="65" name="TextBox 8"/>
+          <p:cNvPr id="68" name="TextBox 8"/>
           <p:cNvSpPr/>
           <p:nvPr/>
         </p:nvSpPr>
         <p:spPr>
           <a:xfrm>
             <a:off x="2808000" y="729000"/>
-            <a:ext cx="3678480" cy="3416040"/>
+            <a:ext cx="3678120" cy="3382200"/>
           </a:xfrm>
           <a:prstGeom prst="rect">
             <a:avLst/>
@@ -7285,18 +8467,18 @@
       </p:sp>
       <p:pic>
         <p:nvPicPr>
-          <p:cNvPr id="66" name="Picture 13"/>
+          <p:cNvPr id="69" name="Picture 13"/>
           <p:cNvPicPr/>
           <p:nvPr/>
         </p:nvPicPr>
         <p:blipFill>
-          <a:blip r:embed="rId1"/>
+          <a:blip r:embed="rId2"/>
           <a:stretch/>
         </p:blipFill>
         <p:spPr>
           <a:xfrm>
             <a:off x="0" y="643320"/>
-            <a:ext cx="2807640" cy="1703880"/>
+            <a:ext cx="2807280" cy="1703520"/>
           </a:xfrm>
           <a:prstGeom prst="rect">
             <a:avLst/>
@@ -7309,18 +8491,18 @@
       </p:pic>
       <p:pic>
         <p:nvPicPr>
-          <p:cNvPr id="67" name="Picture 18"/>
+          <p:cNvPr id="70" name="Picture 18"/>
           <p:cNvPicPr/>
           <p:nvPr/>
         </p:nvPicPr>
         <p:blipFill>
-          <a:blip r:embed="rId2"/>
+          <a:blip r:embed="rId3"/>
           <a:stretch/>
         </p:blipFill>
         <p:spPr>
           <a:xfrm>
             <a:off x="6486480" y="643320"/>
-            <a:ext cx="2678040" cy="2571480"/>
+            <a:ext cx="2677680" cy="2571120"/>
           </a:xfrm>
           <a:prstGeom prst="rect">
             <a:avLst/>
@@ -7333,18 +8515,18 @@
       </p:pic>
       <p:pic>
         <p:nvPicPr>
-          <p:cNvPr id="68" name="Picture 20"/>
+          <p:cNvPr id="71" name="Picture 20"/>
           <p:cNvPicPr/>
           <p:nvPr/>
         </p:nvPicPr>
         <p:blipFill>
-          <a:blip r:embed="rId3"/>
+          <a:blip r:embed="rId4"/>
           <a:stretch/>
         </p:blipFill>
         <p:spPr>
           <a:xfrm>
             <a:off x="-20880" y="2743200"/>
-            <a:ext cx="2828880" cy="1885680"/>
+            <a:ext cx="2828520" cy="1885320"/>
           </a:xfrm>
           <a:prstGeom prst="rect">
             <a:avLst/>
@@ -7371,6 +8553,14 @@
 <file path=ppt/slides/slide3.xml><?xml version="1.0" encoding="utf-8"?>
 <p:sld xmlns:a="http://schemas.openxmlformats.org/drawingml/2006/main" xmlns:p="http://schemas.openxmlformats.org/presentationml/2006/main" xmlns:r="http://schemas.openxmlformats.org/officeDocument/2006/relationships" xmlns:p14="http://schemas.microsoft.com/office/powerpoint/2010/main" xmlns:p15="http://schemas.microsoft.com/office/powerpoint/2012/main" xmlns:mc="http://schemas.openxmlformats.org/markup-compatibility/2006">
   <p:cSld>
+    <p:bg>
+      <p:bgPr>
+        <a:blipFill rotWithShape="0">
+          <a:blip r:embed="rId1"/>
+          <a:stretch/>
+        </a:blipFill>
+      </p:bgPr>
+    </p:bg>
     <p:spTree>
       <p:nvGrpSpPr>
         <p:cNvPr id="1" name=""/>
@@ -7387,14 +8577,14 @@
       </p:grpSpPr>
       <p:sp>
         <p:nvSpPr>
-          <p:cNvPr id="69" name="Rectangle 10"/>
+          <p:cNvPr id="72" name="Rectangle 10"/>
           <p:cNvSpPr/>
           <p:nvPr/>
         </p:nvSpPr>
         <p:spPr>
           <a:xfrm>
             <a:off x="2387160" y="151920"/>
-            <a:ext cx="4681800" cy="415080"/>
+            <a:ext cx="4681440" cy="414720"/>
           </a:xfrm>
           <a:prstGeom prst="rect">
             <a:avLst/>
@@ -7461,18 +8651,18 @@
       </p:sp>
       <p:pic>
         <p:nvPicPr>
-          <p:cNvPr id="70" name="Picture 3"/>
+          <p:cNvPr id="73" name="Picture 3"/>
           <p:cNvPicPr/>
           <p:nvPr/>
         </p:nvPicPr>
         <p:blipFill>
-          <a:blip r:embed="rId1"/>
+          <a:blip r:embed="rId2"/>
           <a:stretch/>
         </p:blipFill>
         <p:spPr>
           <a:xfrm>
             <a:off x="160920" y="949680"/>
-            <a:ext cx="4185720" cy="3622320"/>
+            <a:ext cx="4185360" cy="3621960"/>
           </a:xfrm>
           <a:prstGeom prst="rect">
             <a:avLst/>
@@ -7485,14 +8675,14 @@
       </p:pic>
       <p:sp>
         <p:nvSpPr>
-          <p:cNvPr id="71" name="TextBox 5"/>
+          <p:cNvPr id="74" name="TextBox 5"/>
           <p:cNvSpPr/>
           <p:nvPr/>
         </p:nvSpPr>
         <p:spPr>
           <a:xfrm>
             <a:off x="4347000" y="865080"/>
-            <a:ext cx="4416840" cy="2446560"/>
+            <a:ext cx="4416480" cy="2423160"/>
           </a:xfrm>
           <a:prstGeom prst="rect">
             <a:avLst/>
@@ -7542,18 +8732,18 @@
       </p:sp>
       <p:pic>
         <p:nvPicPr>
-          <p:cNvPr id="72" name="Picture 6"/>
+          <p:cNvPr id="75" name="Picture 6"/>
           <p:cNvPicPr/>
           <p:nvPr/>
         </p:nvPicPr>
         <p:blipFill>
-          <a:blip r:embed="rId2"/>
+          <a:blip r:embed="rId3"/>
           <a:stretch/>
         </p:blipFill>
         <p:spPr>
           <a:xfrm>
             <a:off x="236160" y="228600"/>
-            <a:ext cx="1364040" cy="415080"/>
+            <a:ext cx="1363680" cy="414720"/>
           </a:xfrm>
           <a:prstGeom prst="rect">
             <a:avLst/>
@@ -7580,6 +8770,14 @@
 <file path=ppt/slides/slide4.xml><?xml version="1.0" encoding="utf-8"?>
 <p:sld xmlns:a="http://schemas.openxmlformats.org/drawingml/2006/main" xmlns:p="http://schemas.openxmlformats.org/presentationml/2006/main" xmlns:r="http://schemas.openxmlformats.org/officeDocument/2006/relationships" xmlns:p14="http://schemas.microsoft.com/office/powerpoint/2010/main" xmlns:p15="http://schemas.microsoft.com/office/powerpoint/2012/main" xmlns:mc="http://schemas.openxmlformats.org/markup-compatibility/2006">
   <p:cSld>
+    <p:bg>
+      <p:bgPr>
+        <a:blipFill rotWithShape="0">
+          <a:blip r:embed="rId1"/>
+          <a:stretch/>
+        </a:blipFill>
+      </p:bgPr>
+    </p:bg>
     <p:spTree>
       <p:nvGrpSpPr>
         <p:cNvPr id="1" name=""/>
@@ -7596,14 +8794,14 @@
       </p:grpSpPr>
       <p:sp>
         <p:nvSpPr>
-          <p:cNvPr id="73" name="Rectangle 10"/>
+          <p:cNvPr id="76" name="Rectangle 10"/>
           <p:cNvSpPr/>
           <p:nvPr/>
         </p:nvSpPr>
         <p:spPr>
           <a:xfrm>
             <a:off x="2387160" y="151920"/>
-            <a:ext cx="4681800" cy="415080"/>
+            <a:ext cx="4681440" cy="414720"/>
           </a:xfrm>
           <a:prstGeom prst="rect">
             <a:avLst/>
@@ -7670,18 +8868,18 @@
       </p:sp>
       <p:pic>
         <p:nvPicPr>
-          <p:cNvPr id="74" name="Picture 2"/>
+          <p:cNvPr id="77" name="Picture 2"/>
           <p:cNvPicPr/>
           <p:nvPr/>
         </p:nvPicPr>
         <p:blipFill>
-          <a:blip r:embed="rId1"/>
+          <a:blip r:embed="rId2"/>
           <a:stretch/>
         </p:blipFill>
         <p:spPr>
           <a:xfrm>
             <a:off x="228600" y="223560"/>
-            <a:ext cx="1518840" cy="462240"/>
+            <a:ext cx="1518480" cy="461880"/>
           </a:xfrm>
           <a:prstGeom prst="rect">
             <a:avLst/>
@@ -7694,14 +8892,14 @@
       </p:pic>
       <p:sp>
         <p:nvSpPr>
-          <p:cNvPr id="75" name="TextBox 7"/>
+          <p:cNvPr id="78" name="TextBox 7"/>
           <p:cNvSpPr/>
           <p:nvPr/>
         </p:nvSpPr>
         <p:spPr>
           <a:xfrm>
             <a:off x="246240" y="748800"/>
-            <a:ext cx="3748680" cy="3292920"/>
+            <a:ext cx="3748320" cy="3258720"/>
           </a:xfrm>
           <a:prstGeom prst="rect">
             <a:avLst/>
@@ -7818,18 +9016,18 @@
       </p:sp>
       <p:pic>
         <p:nvPicPr>
-          <p:cNvPr id="76" name="Picture 9"/>
+          <p:cNvPr id="79" name="Picture 9"/>
           <p:cNvPicPr/>
           <p:nvPr/>
         </p:nvPicPr>
         <p:blipFill>
-          <a:blip r:embed="rId2"/>
+          <a:blip r:embed="rId3"/>
           <a:stretch/>
         </p:blipFill>
         <p:spPr>
           <a:xfrm>
             <a:off x="4227480" y="936000"/>
-            <a:ext cx="4838760" cy="3407400"/>
+            <a:ext cx="4838400" cy="3407040"/>
           </a:xfrm>
           <a:prstGeom prst="rect">
             <a:avLst/>
@@ -7856,6 +9054,14 @@
 <file path=ppt/slides/slide5.xml><?xml version="1.0" encoding="utf-8"?>
 <p:sld xmlns:a="http://schemas.openxmlformats.org/drawingml/2006/main" xmlns:p="http://schemas.openxmlformats.org/presentationml/2006/main" xmlns:r="http://schemas.openxmlformats.org/officeDocument/2006/relationships" xmlns:p14="http://schemas.microsoft.com/office/powerpoint/2010/main" xmlns:p15="http://schemas.microsoft.com/office/powerpoint/2012/main" xmlns:mc="http://schemas.openxmlformats.org/markup-compatibility/2006">
   <p:cSld>
+    <p:bg>
+      <p:bgPr>
+        <a:blipFill rotWithShape="0">
+          <a:blip r:embed="rId1"/>
+          <a:stretch/>
+        </a:blipFill>
+      </p:bgPr>
+    </p:bg>
     <p:spTree>
       <p:nvGrpSpPr>
         <p:cNvPr id="1" name=""/>
@@ -7872,14 +9078,14 @@
       </p:grpSpPr>
       <p:sp>
         <p:nvSpPr>
-          <p:cNvPr id="77" name="Rectangle 10"/>
+          <p:cNvPr id="80" name="Rectangle 10"/>
           <p:cNvSpPr/>
           <p:nvPr/>
         </p:nvSpPr>
         <p:spPr>
           <a:xfrm>
             <a:off x="2387160" y="151920"/>
-            <a:ext cx="4681800" cy="415080"/>
+            <a:ext cx="4681440" cy="414720"/>
           </a:xfrm>
           <a:prstGeom prst="rect">
             <a:avLst/>
@@ -7946,18 +9152,18 @@
       </p:sp>
       <p:pic>
         <p:nvPicPr>
-          <p:cNvPr id="78" name="Picture 2"/>
+          <p:cNvPr id="81" name="Picture 2"/>
           <p:cNvPicPr/>
           <p:nvPr/>
         </p:nvPicPr>
         <p:blipFill>
-          <a:blip r:embed="rId1"/>
+          <a:blip r:embed="rId2"/>
           <a:stretch/>
         </p:blipFill>
         <p:spPr>
           <a:xfrm>
             <a:off x="309960" y="223560"/>
-            <a:ext cx="1518840" cy="462240"/>
+            <a:ext cx="1518480" cy="461880"/>
           </a:xfrm>
           <a:prstGeom prst="rect">
             <a:avLst/>
@@ -7970,18 +9176,18 @@
       </p:pic>
       <p:pic>
         <p:nvPicPr>
-          <p:cNvPr id="79" name="Picture 5"/>
+          <p:cNvPr id="82" name="Picture 5"/>
           <p:cNvPicPr/>
           <p:nvPr/>
         </p:nvPicPr>
         <p:blipFill>
-          <a:blip r:embed="rId2"/>
+          <a:blip r:embed="rId3"/>
           <a:stretch/>
         </p:blipFill>
         <p:spPr>
           <a:xfrm>
             <a:off x="1112040" y="914400"/>
-            <a:ext cx="6431760" cy="3713400"/>
+            <a:ext cx="6431400" cy="3713040"/>
           </a:xfrm>
           <a:prstGeom prst="rect">
             <a:avLst/>
@@ -8008,6 +9214,14 @@
 <file path=ppt/slides/slide6.xml><?xml version="1.0" encoding="utf-8"?>
 <p:sld xmlns:a="http://schemas.openxmlformats.org/drawingml/2006/main" xmlns:p="http://schemas.openxmlformats.org/presentationml/2006/main" xmlns:r="http://schemas.openxmlformats.org/officeDocument/2006/relationships" xmlns:p14="http://schemas.microsoft.com/office/powerpoint/2010/main" xmlns:p15="http://schemas.microsoft.com/office/powerpoint/2012/main" xmlns:mc="http://schemas.openxmlformats.org/markup-compatibility/2006">
   <p:cSld>
+    <p:bg>
+      <p:bgPr>
+        <a:blipFill rotWithShape="0">
+          <a:blip r:embed="rId1"/>
+          <a:stretch/>
+        </a:blipFill>
+      </p:bgPr>
+    </p:bg>
     <p:spTree>
       <p:nvGrpSpPr>
         <p:cNvPr id="1" name=""/>
@@ -8024,14 +9238,14 @@
       </p:grpSpPr>
       <p:sp>
         <p:nvSpPr>
-          <p:cNvPr id="80" name="Rectangle 10"/>
+          <p:cNvPr id="83" name="Rectangle 10"/>
           <p:cNvSpPr/>
           <p:nvPr/>
         </p:nvSpPr>
         <p:spPr>
           <a:xfrm>
             <a:off x="2387160" y="151920"/>
-            <a:ext cx="4681800" cy="415080"/>
+            <a:ext cx="4681440" cy="414720"/>
           </a:xfrm>
           <a:prstGeom prst="rect">
             <a:avLst/>
@@ -8098,18 +9312,18 @@
       </p:sp>
       <p:pic>
         <p:nvPicPr>
-          <p:cNvPr id="81" name="Picture 2"/>
+          <p:cNvPr id="84" name="Picture 2"/>
           <p:cNvPicPr/>
           <p:nvPr/>
         </p:nvPicPr>
         <p:blipFill>
-          <a:blip r:embed="rId1"/>
+          <a:blip r:embed="rId2"/>
           <a:stretch/>
         </p:blipFill>
         <p:spPr>
           <a:xfrm>
             <a:off x="309960" y="223560"/>
-            <a:ext cx="1518840" cy="462240"/>
+            <a:ext cx="1518480" cy="461880"/>
           </a:xfrm>
           <a:prstGeom prst="rect">
             <a:avLst/>
@@ -8122,14 +9336,14 @@
       </p:pic>
       <p:sp>
         <p:nvSpPr>
-          <p:cNvPr id="82" name="TextBox 6"/>
+          <p:cNvPr id="85" name="TextBox 6"/>
           <p:cNvSpPr/>
           <p:nvPr/>
         </p:nvSpPr>
         <p:spPr>
           <a:xfrm>
             <a:off x="246240" y="813600"/>
-            <a:ext cx="8756640" cy="3138840"/>
+            <a:ext cx="8756280" cy="3107880"/>
           </a:xfrm>
           <a:prstGeom prst="rect">
             <a:avLst/>
